--- a/FlakeHound_Presentation_Final.pptx
+++ b/FlakeHound_Presentation_Final.pptx
@@ -314,7 +314,7 @@
           <a:p>
             <a:fld id="{5BCAD085-E8A6-8845-BD4E-CB4CCA059FC4}" type="datetimeFigureOut">
               <a:rPr lang="en-US" smtClean="0"/>
-              <a:t>11/12/2025</a:t>
+              <a:t>1/14/2026</a:t>
             </a:fld>
             <a:endParaRPr lang="en-US"/>
           </a:p>
@@ -482,7 +482,7 @@
           <a:p>
             <a:fld id="{5BCAD085-E8A6-8845-BD4E-CB4CCA059FC4}" type="datetimeFigureOut">
               <a:rPr lang="en-US" smtClean="0"/>
-              <a:t>11/12/2025</a:t>
+              <a:t>1/14/2026</a:t>
             </a:fld>
             <a:endParaRPr lang="en-US"/>
           </a:p>
@@ -660,7 +660,7 @@
           <a:p>
             <a:fld id="{5BCAD085-E8A6-8845-BD4E-CB4CCA059FC4}" type="datetimeFigureOut">
               <a:rPr lang="en-US" smtClean="0"/>
-              <a:t>11/12/2025</a:t>
+              <a:t>1/14/2026</a:t>
             </a:fld>
             <a:endParaRPr lang="en-US"/>
           </a:p>
@@ -828,7 +828,7 @@
           <a:p>
             <a:fld id="{5BCAD085-E8A6-8845-BD4E-CB4CCA059FC4}" type="datetimeFigureOut">
               <a:rPr lang="en-US" smtClean="0"/>
-              <a:t>11/12/2025</a:t>
+              <a:t>1/14/2026</a:t>
             </a:fld>
             <a:endParaRPr lang="en-US"/>
           </a:p>
@@ -1073,7 +1073,7 @@
           <a:p>
             <a:fld id="{5BCAD085-E8A6-8845-BD4E-CB4CCA059FC4}" type="datetimeFigureOut">
               <a:rPr lang="en-US" smtClean="0"/>
-              <a:t>11/12/2025</a:t>
+              <a:t>1/14/2026</a:t>
             </a:fld>
             <a:endParaRPr lang="en-US"/>
           </a:p>
@@ -1358,7 +1358,7 @@
           <a:p>
             <a:fld id="{5BCAD085-E8A6-8845-BD4E-CB4CCA059FC4}" type="datetimeFigureOut">
               <a:rPr lang="en-US" smtClean="0"/>
-              <a:t>11/12/2025</a:t>
+              <a:t>1/14/2026</a:t>
             </a:fld>
             <a:endParaRPr lang="en-US"/>
           </a:p>
@@ -1777,7 +1777,7 @@
           <a:p>
             <a:fld id="{5BCAD085-E8A6-8845-BD4E-CB4CCA059FC4}" type="datetimeFigureOut">
               <a:rPr lang="en-US" smtClean="0"/>
-              <a:t>11/12/2025</a:t>
+              <a:t>1/14/2026</a:t>
             </a:fld>
             <a:endParaRPr lang="en-US"/>
           </a:p>
@@ -1894,7 +1894,7 @@
           <a:p>
             <a:fld id="{5BCAD085-E8A6-8845-BD4E-CB4CCA059FC4}" type="datetimeFigureOut">
               <a:rPr lang="en-US" smtClean="0"/>
-              <a:t>11/12/2025</a:t>
+              <a:t>1/14/2026</a:t>
             </a:fld>
             <a:endParaRPr lang="en-US"/>
           </a:p>
@@ -1989,7 +1989,7 @@
           <a:p>
             <a:fld id="{5BCAD085-E8A6-8845-BD4E-CB4CCA059FC4}" type="datetimeFigureOut">
               <a:rPr lang="en-US" smtClean="0"/>
-              <a:t>11/12/2025</a:t>
+              <a:t>1/14/2026</a:t>
             </a:fld>
             <a:endParaRPr lang="en-US"/>
           </a:p>
@@ -2264,7 +2264,7 @@
           <a:p>
             <a:fld id="{5BCAD085-E8A6-8845-BD4E-CB4CCA059FC4}" type="datetimeFigureOut">
               <a:rPr lang="en-US" smtClean="0"/>
-              <a:t>11/12/2025</a:t>
+              <a:t>1/14/2026</a:t>
             </a:fld>
             <a:endParaRPr lang="en-US"/>
           </a:p>
@@ -2516,7 +2516,7 @@
           <a:p>
             <a:fld id="{5BCAD085-E8A6-8845-BD4E-CB4CCA059FC4}" type="datetimeFigureOut">
               <a:rPr lang="en-US" smtClean="0"/>
-              <a:t>11/12/2025</a:t>
+              <a:t>1/14/2026</a:t>
             </a:fld>
             <a:endParaRPr lang="en-US"/>
           </a:p>
@@ -2727,7 +2727,7 @@
           <a:p>
             <a:fld id="{5BCAD085-E8A6-8845-BD4E-CB4CCA059FC4}" type="datetimeFigureOut">
               <a:rPr lang="en-US" smtClean="0"/>
-              <a:t>11/12/2025</a:t>
+              <a:t>1/14/2026</a:t>
             </a:fld>
             <a:endParaRPr lang="en-US"/>
           </a:p>
@@ -3158,7 +3158,7 @@
         </p:spPr>
         <p:txBody>
           <a:bodyPr>
-            <a:normAutofit fontScale="92500" lnSpcReduction="20000"/>
+            <a:normAutofit lnSpcReduction="10000"/>
           </a:bodyPr>
           <a:lstStyle/>
           <a:p>
@@ -3216,21 +3216,12 @@
             </a:r>
             <a:r>
               <a:rPr dirty="0"/>
-              <a:t> Rahman (Roll: 1637)</a:t>
-            </a:r>
-          </a:p>
-          <a:p>
-            <a:pPr>
-              <a:defRPr sz="2400">
-                <a:solidFill>
-                  <a:srgbClr val="444444"/>
-                </a:solidFill>
-              </a:defRPr>
-            </a:pPr>
-            <a:r>
-              <a:rPr dirty="0"/>
-              <a:t>SPL-1 Project Proposal</a:t>
-            </a:r>
+              <a:t> Rahman (Roll: </a:t>
+            </a:r>
+            <a:r>
+              <a:t>1637)</a:t>
+            </a:r>
+            <a:endParaRPr dirty="0"/>
           </a:p>
         </p:txBody>
       </p:sp>

--- a/FlakeHound_Presentation_Final.pptx
+++ b/FlakeHound_Presentation_Final.pptx
@@ -4,6 +4,9 @@
   <p:sldMasterIdLst>
     <p:sldMasterId id="2147483648" r:id="rId1"/>
   </p:sldMasterIdLst>
+  <p:notesMasterIdLst>
+    <p:notesMasterId r:id="rId12"/>
+  </p:notesMasterIdLst>
   <p:sldIdLst>
     <p:sldId id="256" r:id="rId2"/>
     <p:sldId id="257" r:id="rId3"/>
@@ -12,12 +15,9 @@
     <p:sldId id="260" r:id="rId6"/>
     <p:sldId id="261" r:id="rId7"/>
     <p:sldId id="262" r:id="rId8"/>
-    <p:sldId id="263" r:id="rId9"/>
-    <p:sldId id="264" r:id="rId10"/>
-    <p:sldId id="265" r:id="rId11"/>
-    <p:sldId id="266" r:id="rId12"/>
-    <p:sldId id="267" r:id="rId13"/>
-    <p:sldId id="269" r:id="rId14"/>
+    <p:sldId id="265" r:id="rId9"/>
+    <p:sldId id="267" r:id="rId10"/>
+    <p:sldId id="269" r:id="rId11"/>
   </p:sldIdLst>
   <p:sldSz cx="12192000" cy="6858000"/>
   <p:notesSz cx="6858000" cy="9144000"/>
@@ -135,6 +135,355 @@
 </p:presentation>
 </file>
 
+<file path=ppt/notesMasters/notesMaster1.xml><?xml version="1.0" encoding="utf-8"?>
+<p:notesMaster xmlns:a="http://schemas.openxmlformats.org/drawingml/2006/main" xmlns:r="http://schemas.openxmlformats.org/officeDocument/2006/relationships" xmlns:p="http://schemas.openxmlformats.org/presentationml/2006/main">
+  <p:cSld>
+    <p:bg>
+      <p:bgRef idx="1001">
+        <a:schemeClr val="bg1"/>
+      </p:bgRef>
+    </p:bg>
+    <p:spTree>
+      <p:nvGrpSpPr>
+        <p:cNvPr id="1" name=""/>
+        <p:cNvGrpSpPr/>
+        <p:nvPr/>
+      </p:nvGrpSpPr>
+      <p:grpSpPr>
+        <a:xfrm>
+          <a:off x="0" y="0"/>
+          <a:ext cx="0" cy="0"/>
+          <a:chOff x="0" y="0"/>
+          <a:chExt cx="0" cy="0"/>
+        </a:xfrm>
+      </p:grpSpPr>
+      <p:sp>
+        <p:nvSpPr>
+          <p:cNvPr id="2" name="Header Placeholder 1"/>
+          <p:cNvSpPr>
+            <a:spLocks noGrp="1"/>
+          </p:cNvSpPr>
+          <p:nvPr>
+            <p:ph type="hdr" sz="quarter"/>
+          </p:nvPr>
+        </p:nvSpPr>
+        <p:spPr>
+          <a:xfrm>
+            <a:off x="0" y="0"/>
+            <a:ext cx="2971800" cy="458788"/>
+          </a:xfrm>
+          <a:prstGeom prst="rect">
+            <a:avLst/>
+          </a:prstGeom>
+        </p:spPr>
+        <p:txBody>
+          <a:bodyPr vert="horz" lIns="91440" tIns="45720" rIns="91440" bIns="45720" rtlCol="0"/>
+          <a:lstStyle>
+            <a:lvl1pPr algn="l">
+              <a:defRPr sz="1200"/>
+            </a:lvl1pPr>
+          </a:lstStyle>
+          <a:p>
+            <a:endParaRPr lang="en-US"/>
+          </a:p>
+        </p:txBody>
+      </p:sp>
+      <p:sp>
+        <p:nvSpPr>
+          <p:cNvPr id="3" name="Date Placeholder 2"/>
+          <p:cNvSpPr>
+            <a:spLocks noGrp="1"/>
+          </p:cNvSpPr>
+          <p:nvPr>
+            <p:ph type="dt" idx="1"/>
+          </p:nvPr>
+        </p:nvSpPr>
+        <p:spPr>
+          <a:xfrm>
+            <a:off x="3884613" y="0"/>
+            <a:ext cx="2971800" cy="458788"/>
+          </a:xfrm>
+          <a:prstGeom prst="rect">
+            <a:avLst/>
+          </a:prstGeom>
+        </p:spPr>
+        <p:txBody>
+          <a:bodyPr vert="horz" lIns="91440" tIns="45720" rIns="91440" bIns="45720" rtlCol="0"/>
+          <a:lstStyle>
+            <a:lvl1pPr algn="r">
+              <a:defRPr sz="1200"/>
+            </a:lvl1pPr>
+          </a:lstStyle>
+          <a:p>
+            <a:fld id="{BC927789-316E-4DF1-B745-59265EBCF8C5}" type="datetimeFigureOut">
+              <a:rPr lang="en-US" smtClean="0"/>
+              <a:t>2/5/2026</a:t>
+            </a:fld>
+            <a:endParaRPr lang="en-US"/>
+          </a:p>
+        </p:txBody>
+      </p:sp>
+      <p:sp>
+        <p:nvSpPr>
+          <p:cNvPr id="4" name="Slide Image Placeholder 3"/>
+          <p:cNvSpPr>
+            <a:spLocks noGrp="1" noRot="1" noChangeAspect="1"/>
+          </p:cNvSpPr>
+          <p:nvPr>
+            <p:ph type="sldImg" idx="2"/>
+          </p:nvPr>
+        </p:nvSpPr>
+        <p:spPr>
+          <a:xfrm>
+            <a:off x="685800" y="1143000"/>
+            <a:ext cx="5486400" cy="3086100"/>
+          </a:xfrm>
+          <a:prstGeom prst="rect">
+            <a:avLst/>
+          </a:prstGeom>
+          <a:noFill/>
+          <a:ln w="12700">
+            <a:solidFill>
+              <a:prstClr val="black"/>
+            </a:solidFill>
+          </a:ln>
+        </p:spPr>
+        <p:txBody>
+          <a:bodyPr vert="horz" lIns="91440" tIns="45720" rIns="91440" bIns="45720" rtlCol="0" anchor="ctr"/>
+          <a:lstStyle/>
+          <a:p>
+            <a:endParaRPr lang="en-US"/>
+          </a:p>
+        </p:txBody>
+      </p:sp>
+      <p:sp>
+        <p:nvSpPr>
+          <p:cNvPr id="5" name="Notes Placeholder 4"/>
+          <p:cNvSpPr>
+            <a:spLocks noGrp="1"/>
+          </p:cNvSpPr>
+          <p:nvPr>
+            <p:ph type="body" sz="quarter" idx="3"/>
+          </p:nvPr>
+        </p:nvSpPr>
+        <p:spPr>
+          <a:xfrm>
+            <a:off x="685800" y="4400550"/>
+            <a:ext cx="5486400" cy="3600450"/>
+          </a:xfrm>
+          <a:prstGeom prst="rect">
+            <a:avLst/>
+          </a:prstGeom>
+        </p:spPr>
+        <p:txBody>
+          <a:bodyPr vert="horz" lIns="91440" tIns="45720" rIns="91440" bIns="45720" rtlCol="0"/>
+          <a:lstStyle/>
+          <a:p>
+            <a:pPr lvl="0"/>
+            <a:r>
+              <a:rPr lang="en-US"/>
+              <a:t>Click to edit Master text styles</a:t>
+            </a:r>
+          </a:p>
+          <a:p>
+            <a:pPr lvl="1"/>
+            <a:r>
+              <a:rPr lang="en-US"/>
+              <a:t>Second level</a:t>
+            </a:r>
+          </a:p>
+          <a:p>
+            <a:pPr lvl="2"/>
+            <a:r>
+              <a:rPr lang="en-US"/>
+              <a:t>Third level</a:t>
+            </a:r>
+          </a:p>
+          <a:p>
+            <a:pPr lvl="3"/>
+            <a:r>
+              <a:rPr lang="en-US"/>
+              <a:t>Fourth level</a:t>
+            </a:r>
+          </a:p>
+          <a:p>
+            <a:pPr lvl="4"/>
+            <a:r>
+              <a:rPr lang="en-US"/>
+              <a:t>Fifth level</a:t>
+            </a:r>
+          </a:p>
+        </p:txBody>
+      </p:sp>
+      <p:sp>
+        <p:nvSpPr>
+          <p:cNvPr id="6" name="Footer Placeholder 5"/>
+          <p:cNvSpPr>
+            <a:spLocks noGrp="1"/>
+          </p:cNvSpPr>
+          <p:nvPr>
+            <p:ph type="ftr" sz="quarter" idx="4"/>
+          </p:nvPr>
+        </p:nvSpPr>
+        <p:spPr>
+          <a:xfrm>
+            <a:off x="0" y="8685213"/>
+            <a:ext cx="2971800" cy="458787"/>
+          </a:xfrm>
+          <a:prstGeom prst="rect">
+            <a:avLst/>
+          </a:prstGeom>
+        </p:spPr>
+        <p:txBody>
+          <a:bodyPr vert="horz" lIns="91440" tIns="45720" rIns="91440" bIns="45720" rtlCol="0" anchor="b"/>
+          <a:lstStyle>
+            <a:lvl1pPr algn="l">
+              <a:defRPr sz="1200"/>
+            </a:lvl1pPr>
+          </a:lstStyle>
+          <a:p>
+            <a:endParaRPr lang="en-US"/>
+          </a:p>
+        </p:txBody>
+      </p:sp>
+      <p:sp>
+        <p:nvSpPr>
+          <p:cNvPr id="7" name="Slide Number Placeholder 6"/>
+          <p:cNvSpPr>
+            <a:spLocks noGrp="1"/>
+          </p:cNvSpPr>
+          <p:nvPr>
+            <p:ph type="sldNum" sz="quarter" idx="5"/>
+          </p:nvPr>
+        </p:nvSpPr>
+        <p:spPr>
+          <a:xfrm>
+            <a:off x="3884613" y="8685213"/>
+            <a:ext cx="2971800" cy="458787"/>
+          </a:xfrm>
+          <a:prstGeom prst="rect">
+            <a:avLst/>
+          </a:prstGeom>
+        </p:spPr>
+        <p:txBody>
+          <a:bodyPr vert="horz" lIns="91440" tIns="45720" rIns="91440" bIns="45720" rtlCol="0" anchor="b"/>
+          <a:lstStyle>
+            <a:lvl1pPr algn="r">
+              <a:defRPr sz="1200"/>
+            </a:lvl1pPr>
+          </a:lstStyle>
+          <a:p>
+            <a:fld id="{226DFA7B-711C-42B8-86A9-E1655D2A77A2}" type="slidenum">
+              <a:rPr lang="en-US" smtClean="0"/>
+              <a:t>‹#›</a:t>
+            </a:fld>
+            <a:endParaRPr lang="en-US"/>
+          </a:p>
+        </p:txBody>
+      </p:sp>
+    </p:spTree>
+    <p:extLst>
+      <p:ext uri="{BB962C8B-B14F-4D97-AF65-F5344CB8AC3E}">
+        <p14:creationId xmlns:p14="http://schemas.microsoft.com/office/powerpoint/2010/main" val="705491088"/>
+      </p:ext>
+    </p:extLst>
+  </p:cSld>
+  <p:clrMap bg1="lt1" tx1="dk1" bg2="lt2" tx2="dk2" accent1="accent1" accent2="accent2" accent3="accent3" accent4="accent4" accent5="accent5" accent6="accent6" hlink="hlink" folHlink="folHlink"/>
+  <p:notesStyle>
+    <a:lvl1pPr marL="0" algn="l" defTabSz="914400" rtl="0" eaLnBrk="1" latinLnBrk="0" hangingPunct="1">
+      <a:defRPr sz="1200" kern="1200">
+        <a:solidFill>
+          <a:schemeClr val="tx1"/>
+        </a:solidFill>
+        <a:latin typeface="+mn-lt"/>
+        <a:ea typeface="+mn-ea"/>
+        <a:cs typeface="+mn-cs"/>
+      </a:defRPr>
+    </a:lvl1pPr>
+    <a:lvl2pPr marL="457200" algn="l" defTabSz="914400" rtl="0" eaLnBrk="1" latinLnBrk="0" hangingPunct="1">
+      <a:defRPr sz="1200" kern="1200">
+        <a:solidFill>
+          <a:schemeClr val="tx1"/>
+        </a:solidFill>
+        <a:latin typeface="+mn-lt"/>
+        <a:ea typeface="+mn-ea"/>
+        <a:cs typeface="+mn-cs"/>
+      </a:defRPr>
+    </a:lvl2pPr>
+    <a:lvl3pPr marL="914400" algn="l" defTabSz="914400" rtl="0" eaLnBrk="1" latinLnBrk="0" hangingPunct="1">
+      <a:defRPr sz="1200" kern="1200">
+        <a:solidFill>
+          <a:schemeClr val="tx1"/>
+        </a:solidFill>
+        <a:latin typeface="+mn-lt"/>
+        <a:ea typeface="+mn-ea"/>
+        <a:cs typeface="+mn-cs"/>
+      </a:defRPr>
+    </a:lvl3pPr>
+    <a:lvl4pPr marL="1371600" algn="l" defTabSz="914400" rtl="0" eaLnBrk="1" latinLnBrk="0" hangingPunct="1">
+      <a:defRPr sz="1200" kern="1200">
+        <a:solidFill>
+          <a:schemeClr val="tx1"/>
+        </a:solidFill>
+        <a:latin typeface="+mn-lt"/>
+        <a:ea typeface="+mn-ea"/>
+        <a:cs typeface="+mn-cs"/>
+      </a:defRPr>
+    </a:lvl4pPr>
+    <a:lvl5pPr marL="1828800" algn="l" defTabSz="914400" rtl="0" eaLnBrk="1" latinLnBrk="0" hangingPunct="1">
+      <a:defRPr sz="1200" kern="1200">
+        <a:solidFill>
+          <a:schemeClr val="tx1"/>
+        </a:solidFill>
+        <a:latin typeface="+mn-lt"/>
+        <a:ea typeface="+mn-ea"/>
+        <a:cs typeface="+mn-cs"/>
+      </a:defRPr>
+    </a:lvl5pPr>
+    <a:lvl6pPr marL="2286000" algn="l" defTabSz="914400" rtl="0" eaLnBrk="1" latinLnBrk="0" hangingPunct="1">
+      <a:defRPr sz="1200" kern="1200">
+        <a:solidFill>
+          <a:schemeClr val="tx1"/>
+        </a:solidFill>
+        <a:latin typeface="+mn-lt"/>
+        <a:ea typeface="+mn-ea"/>
+        <a:cs typeface="+mn-cs"/>
+      </a:defRPr>
+    </a:lvl6pPr>
+    <a:lvl7pPr marL="2743200" algn="l" defTabSz="914400" rtl="0" eaLnBrk="1" latinLnBrk="0" hangingPunct="1">
+      <a:defRPr sz="1200" kern="1200">
+        <a:solidFill>
+          <a:schemeClr val="tx1"/>
+        </a:solidFill>
+        <a:latin typeface="+mn-lt"/>
+        <a:ea typeface="+mn-ea"/>
+        <a:cs typeface="+mn-cs"/>
+      </a:defRPr>
+    </a:lvl7pPr>
+    <a:lvl8pPr marL="3200400" algn="l" defTabSz="914400" rtl="0" eaLnBrk="1" latinLnBrk="0" hangingPunct="1">
+      <a:defRPr sz="1200" kern="1200">
+        <a:solidFill>
+          <a:schemeClr val="tx1"/>
+        </a:solidFill>
+        <a:latin typeface="+mn-lt"/>
+        <a:ea typeface="+mn-ea"/>
+        <a:cs typeface="+mn-cs"/>
+      </a:defRPr>
+    </a:lvl8pPr>
+    <a:lvl9pPr marL="3657600" algn="l" defTabSz="914400" rtl="0" eaLnBrk="1" latinLnBrk="0" hangingPunct="1">
+      <a:defRPr sz="1200" kern="1200">
+        <a:solidFill>
+          <a:schemeClr val="tx1"/>
+        </a:solidFill>
+        <a:latin typeface="+mn-lt"/>
+        <a:ea typeface="+mn-ea"/>
+        <a:cs typeface="+mn-cs"/>
+      </a:defRPr>
+    </a:lvl9pPr>
+  </p:notesStyle>
+</p:notesMaster>
+</file>
+
 <file path=ppt/slideLayouts/slideLayout1.xml><?xml version="1.0" encoding="utf-8"?>
 <p:sldLayout xmlns:a="http://schemas.openxmlformats.org/drawingml/2006/main" xmlns:r="http://schemas.openxmlformats.org/officeDocument/2006/relationships" xmlns:p="http://schemas.openxmlformats.org/presentationml/2006/main" type="title" preserve="1">
   <p:cSld name="Title Slide">
@@ -312,9 +661,9 @@
           <a:bodyPr/>
           <a:lstStyle/>
           <a:p>
-            <a:fld id="{5BCAD085-E8A6-8845-BD4E-CB4CCA059FC4}" type="datetimeFigureOut">
+            <a:fld id="{0143B681-7805-4D13-91E0-D00CE4B3804B}" type="datetime1">
               <a:rPr lang="en-US" smtClean="0"/>
-              <a:t>1/14/2026</a:t>
+              <a:t>2/5/2026</a:t>
             </a:fld>
             <a:endParaRPr lang="en-US"/>
           </a:p>
@@ -480,9 +829,9 @@
           <a:bodyPr/>
           <a:lstStyle/>
           <a:p>
-            <a:fld id="{5BCAD085-E8A6-8845-BD4E-CB4CCA059FC4}" type="datetimeFigureOut">
+            <a:fld id="{6004C493-3CC2-4DBC-A05F-9519F344AD36}" type="datetime1">
               <a:rPr lang="en-US" smtClean="0"/>
-              <a:t>1/14/2026</a:t>
+              <a:t>2/5/2026</a:t>
             </a:fld>
             <a:endParaRPr lang="en-US"/>
           </a:p>
@@ -658,9 +1007,9 @@
           <a:bodyPr/>
           <a:lstStyle/>
           <a:p>
-            <a:fld id="{5BCAD085-E8A6-8845-BD4E-CB4CCA059FC4}" type="datetimeFigureOut">
+            <a:fld id="{A26A5391-EB33-4777-9135-EEF016A7B893}" type="datetime1">
               <a:rPr lang="en-US" smtClean="0"/>
-              <a:t>1/14/2026</a:t>
+              <a:t>2/5/2026</a:t>
             </a:fld>
             <a:endParaRPr lang="en-US"/>
           </a:p>
@@ -826,9 +1175,9 @@
           <a:bodyPr/>
           <a:lstStyle/>
           <a:p>
-            <a:fld id="{5BCAD085-E8A6-8845-BD4E-CB4CCA059FC4}" type="datetimeFigureOut">
+            <a:fld id="{34DCDFDD-2F40-4947-A91F-DB521C4C63AF}" type="datetime1">
               <a:rPr lang="en-US" smtClean="0"/>
-              <a:t>1/14/2026</a:t>
+              <a:t>2/5/2026</a:t>
             </a:fld>
             <a:endParaRPr lang="en-US"/>
           </a:p>
@@ -1071,9 +1420,9 @@
           <a:bodyPr/>
           <a:lstStyle/>
           <a:p>
-            <a:fld id="{5BCAD085-E8A6-8845-BD4E-CB4CCA059FC4}" type="datetimeFigureOut">
+            <a:fld id="{C66AF807-00AF-475C-9951-17AB0C07FE0C}" type="datetime1">
               <a:rPr lang="en-US" smtClean="0"/>
-              <a:t>1/14/2026</a:t>
+              <a:t>2/5/2026</a:t>
             </a:fld>
             <a:endParaRPr lang="en-US"/>
           </a:p>
@@ -1356,9 +1705,9 @@
           <a:bodyPr/>
           <a:lstStyle/>
           <a:p>
-            <a:fld id="{5BCAD085-E8A6-8845-BD4E-CB4CCA059FC4}" type="datetimeFigureOut">
+            <a:fld id="{C7DDB84D-A328-4351-95DA-C977D632A59F}" type="datetime1">
               <a:rPr lang="en-US" smtClean="0"/>
-              <a:t>1/14/2026</a:t>
+              <a:t>2/5/2026</a:t>
             </a:fld>
             <a:endParaRPr lang="en-US"/>
           </a:p>
@@ -1775,9 +2124,9 @@
           <a:bodyPr/>
           <a:lstStyle/>
           <a:p>
-            <a:fld id="{5BCAD085-E8A6-8845-BD4E-CB4CCA059FC4}" type="datetimeFigureOut">
+            <a:fld id="{C4816147-6D05-4E56-87F7-7482A0CB5638}" type="datetime1">
               <a:rPr lang="en-US" smtClean="0"/>
-              <a:t>1/14/2026</a:t>
+              <a:t>2/5/2026</a:t>
             </a:fld>
             <a:endParaRPr lang="en-US"/>
           </a:p>
@@ -1892,9 +2241,9 @@
           <a:bodyPr/>
           <a:lstStyle/>
           <a:p>
-            <a:fld id="{5BCAD085-E8A6-8845-BD4E-CB4CCA059FC4}" type="datetimeFigureOut">
+            <a:fld id="{C3AFBE2B-EF14-48EA-ACE5-4AB16527524E}" type="datetime1">
               <a:rPr lang="en-US" smtClean="0"/>
-              <a:t>1/14/2026</a:t>
+              <a:t>2/5/2026</a:t>
             </a:fld>
             <a:endParaRPr lang="en-US"/>
           </a:p>
@@ -1987,9 +2336,9 @@
           <a:bodyPr/>
           <a:lstStyle/>
           <a:p>
-            <a:fld id="{5BCAD085-E8A6-8845-BD4E-CB4CCA059FC4}" type="datetimeFigureOut">
+            <a:fld id="{91F75C59-BCFE-402D-BDAE-2C6EE267CDDB}" type="datetime1">
               <a:rPr lang="en-US" smtClean="0"/>
-              <a:t>1/14/2026</a:t>
+              <a:t>2/5/2026</a:t>
             </a:fld>
             <a:endParaRPr lang="en-US"/>
           </a:p>
@@ -2262,9 +2611,9 @@
           <a:bodyPr/>
           <a:lstStyle/>
           <a:p>
-            <a:fld id="{5BCAD085-E8A6-8845-BD4E-CB4CCA059FC4}" type="datetimeFigureOut">
+            <a:fld id="{661C03C9-560B-4769-B02A-4EED2BC49C85}" type="datetime1">
               <a:rPr lang="en-US" smtClean="0"/>
-              <a:t>1/14/2026</a:t>
+              <a:t>2/5/2026</a:t>
             </a:fld>
             <a:endParaRPr lang="en-US"/>
           </a:p>
@@ -2514,9 +2863,9 @@
           <a:bodyPr/>
           <a:lstStyle/>
           <a:p>
-            <a:fld id="{5BCAD085-E8A6-8845-BD4E-CB4CCA059FC4}" type="datetimeFigureOut">
+            <a:fld id="{F44BCE93-5CC5-4E11-A040-7B58344ED17A}" type="datetime1">
               <a:rPr lang="en-US" smtClean="0"/>
-              <a:t>1/14/2026</a:t>
+              <a:t>2/5/2026</a:t>
             </a:fld>
             <a:endParaRPr lang="en-US"/>
           </a:p>
@@ -2725,9 +3074,9 @@
             </a:lvl1pPr>
           </a:lstStyle>
           <a:p>
-            <a:fld id="{5BCAD085-E8A6-8845-BD4E-CB4CCA059FC4}" type="datetimeFigureOut">
+            <a:fld id="{CDC76CC0-6B70-4F01-960C-D33EE306C4C8}" type="datetime1">
               <a:rPr lang="en-US" smtClean="0"/>
-              <a:t>1/14/2026</a:t>
+              <a:t>2/5/2026</a:t>
             </a:fld>
             <a:endParaRPr lang="en-US"/>
           </a:p>
@@ -2832,6 +3181,7 @@
     <p:sldLayoutId id="2147483658" r:id="rId10"/>
     <p:sldLayoutId id="2147483659" r:id="rId11"/>
   </p:sldLayoutIdLst>
+  <p:hf hdr="0" ftr="0" dt="0"/>
   <p:txStyles>
     <p:titleStyle>
       <a:lvl1pPr algn="ctr" defTabSz="457200" rtl="0" eaLnBrk="1" latinLnBrk="0" hangingPunct="1">
@@ -3158,7 +3508,7 @@
         </p:spPr>
         <p:txBody>
           <a:bodyPr>
-            <a:normAutofit lnSpcReduction="10000"/>
+            <a:normAutofit fontScale="92500" lnSpcReduction="20000"/>
           </a:bodyPr>
           <a:lstStyle/>
           <a:p>
@@ -3190,7 +3540,6 @@
               <a:rPr lang="en-US" dirty="0"/>
               <a:t>Test Analysis</a:t>
             </a:r>
-            <a:endParaRPr dirty="0"/>
           </a:p>
           <a:p>
             <a:pPr>
@@ -3200,6 +3549,14 @@
                 </a:solidFill>
               </a:defRPr>
             </a:pPr>
+            <a:r>
+              <a:rPr lang="en-US" dirty="0"/>
+              <a:t>Supervisor: Md. Saeed </a:t>
+            </a:r>
+            <a:r>
+              <a:rPr lang="en-US" dirty="0" err="1"/>
+              <a:t>Siddik</a:t>
+            </a:r>
             <a:endParaRPr dirty="0"/>
           </a:p>
           <a:p>
@@ -3210,18 +3567,53 @@
                 </a:solidFill>
               </a:defRPr>
             </a:pPr>
+            <a:endParaRPr dirty="0"/>
+          </a:p>
+          <a:p>
+            <a:pPr>
+              <a:defRPr sz="2400">
+                <a:solidFill>
+                  <a:srgbClr val="444444"/>
+                </a:solidFill>
+              </a:defRPr>
+            </a:pPr>
             <a:r>
               <a:rPr dirty="0" err="1"/>
               <a:t>Shohidur</a:t>
             </a:r>
             <a:r>
               <a:rPr dirty="0"/>
-              <a:t> Rahman (Roll: </a:t>
-            </a:r>
-            <a:r>
-              <a:t>1637)</a:t>
-            </a:r>
-            <a:endParaRPr dirty="0"/>
+              <a:t> Rahman (Roll: 1637)</a:t>
+            </a:r>
+          </a:p>
+        </p:txBody>
+      </p:sp>
+      <p:sp>
+        <p:nvSpPr>
+          <p:cNvPr id="4" name="Slide Number Placeholder 3">
+            <a:extLst>
+              <a:ext uri="{FF2B5EF4-FFF2-40B4-BE49-F238E27FC236}">
+                <a16:creationId xmlns:a16="http://schemas.microsoft.com/office/drawing/2014/main" id="{2A489672-BF14-B885-7C63-7DE7E9C53A70}"/>
+              </a:ext>
+            </a:extLst>
+          </p:cNvPr>
+          <p:cNvSpPr>
+            <a:spLocks noGrp="1"/>
+          </p:cNvSpPr>
+          <p:nvPr>
+            <p:ph type="sldNum" sz="quarter" idx="12"/>
+          </p:nvPr>
+        </p:nvSpPr>
+        <p:spPr/>
+        <p:txBody>
+          <a:bodyPr/>
+          <a:lstStyle/>
+          <a:p>
+            <a:fld id="{C1FF6DA9-008F-8B48-92A6-B652298478BF}" type="slidenum">
+              <a:rPr lang="en-US" smtClean="0"/>
+              <a:t>1</a:t>
+            </a:fld>
+            <a:endParaRPr lang="en-US"/>
           </a:p>
         </p:txBody>
       </p:sp>
@@ -3258,8 +3650,8 @@
         </p:nvSpPr>
         <p:spPr>
           <a:xfrm>
-            <a:off x="3367850" y="274321"/>
-            <a:ext cx="5456302" cy="769441"/>
+            <a:off x="3646334" y="2285998"/>
+            <a:ext cx="4899333" cy="1754326"/>
           </a:xfrm>
           <a:prstGeom prst="rect">
             <a:avLst/>
@@ -3267,6 +3659,332 @@
           <a:noFill/>
         </p:spPr>
         <p:txBody>
+          <a:bodyPr wrap="square">
+            <a:spAutoFit/>
+          </a:bodyPr>
+          <a:lstStyle/>
+          <a:p>
+            <a:pPr algn="ctr">
+              <a:defRPr sz="6000" b="1">
+                <a:solidFill>
+                  <a:srgbClr val="1F4E79"/>
+                </a:solidFill>
+              </a:defRPr>
+            </a:pPr>
+            <a:r>
+              <a:rPr sz="6000" dirty="0"/>
+              <a:t>Thank You!</a:t>
+            </a:r>
+            <a:endParaRPr lang="en-US" sz="6000" dirty="0"/>
+          </a:p>
+          <a:p>
+            <a:br>
+              <a:rPr lang="en-US" sz="2400" dirty="0"/>
+            </a:br>
+            <a:r>
+              <a:rPr lang="en-US" sz="2400" dirty="0"/>
+              <a:t>	Questions &amp; Feedback Welcome</a:t>
+            </a:r>
+          </a:p>
+        </p:txBody>
+      </p:sp>
+      <p:sp>
+        <p:nvSpPr>
+          <p:cNvPr id="3" name="Slide Number Placeholder 2">
+            <a:extLst>
+              <a:ext uri="{FF2B5EF4-FFF2-40B4-BE49-F238E27FC236}">
+                <a16:creationId xmlns:a16="http://schemas.microsoft.com/office/drawing/2014/main" id="{1476A63B-C2A8-CA3E-3700-A2D98588A061}"/>
+              </a:ext>
+            </a:extLst>
+          </p:cNvPr>
+          <p:cNvSpPr>
+            <a:spLocks noGrp="1"/>
+          </p:cNvSpPr>
+          <p:nvPr>
+            <p:ph type="sldNum" sz="quarter" idx="12"/>
+          </p:nvPr>
+        </p:nvSpPr>
+        <p:spPr/>
+        <p:txBody>
+          <a:bodyPr/>
+          <a:lstStyle/>
+          <a:p>
+            <a:fld id="{C1FF6DA9-008F-8B48-92A6-B652298478BF}" type="slidenum">
+              <a:rPr lang="en-US" smtClean="0"/>
+              <a:t>10</a:t>
+            </a:fld>
+            <a:endParaRPr lang="en-US"/>
+          </a:p>
+        </p:txBody>
+      </p:sp>
+    </p:spTree>
+  </p:cSld>
+  <p:clrMapOvr>
+    <a:masterClrMapping/>
+  </p:clrMapOvr>
+</p:sld>
+</file>
+
+<file path=ppt/slides/slide2.xml><?xml version="1.0" encoding="utf-8"?>
+<p:sld xmlns:a="http://schemas.openxmlformats.org/drawingml/2006/main" xmlns:r="http://schemas.openxmlformats.org/officeDocument/2006/relationships" xmlns:p="http://schemas.openxmlformats.org/presentationml/2006/main">
+  <p:cSld>
+    <p:spTree>
+      <p:nvGrpSpPr>
+        <p:cNvPr id="1" name=""/>
+        <p:cNvGrpSpPr/>
+        <p:nvPr/>
+      </p:nvGrpSpPr>
+      <p:grpSpPr>
+        <a:xfrm>
+          <a:off x="0" y="0"/>
+          <a:ext cx="0" cy="0"/>
+          <a:chOff x="0" y="0"/>
+          <a:chExt cx="0" cy="0"/>
+        </a:xfrm>
+      </p:grpSpPr>
+      <p:sp>
+        <p:nvSpPr>
+          <p:cNvPr id="2" name="Title 1"/>
+          <p:cNvSpPr>
+            <a:spLocks noGrp="1"/>
+          </p:cNvSpPr>
+          <p:nvPr>
+            <p:ph type="title"/>
+          </p:nvPr>
+        </p:nvSpPr>
+        <p:spPr/>
+        <p:txBody>
+          <a:bodyPr/>
+          <a:lstStyle/>
+          <a:p>
+            <a:pPr>
+              <a:defRPr sz="4400" b="1">
+                <a:solidFill>
+                  <a:srgbClr val="1F4E79"/>
+                </a:solidFill>
+              </a:defRPr>
+            </a:pPr>
+            <a:r>
+              <a:rPr dirty="0"/>
+              <a:t>The Problem: Flaky Tests</a:t>
+            </a:r>
+          </a:p>
+        </p:txBody>
+      </p:sp>
+      <p:sp>
+        <p:nvSpPr>
+          <p:cNvPr id="3" name="Content Placeholder 2"/>
+          <p:cNvSpPr>
+            <a:spLocks noGrp="1"/>
+          </p:cNvSpPr>
+          <p:nvPr>
+            <p:ph idx="1"/>
+          </p:nvPr>
+        </p:nvSpPr>
+        <p:spPr/>
+        <p:txBody>
+          <a:bodyPr wrap="square"/>
+          <a:lstStyle/>
+          <a:p>
+            <a:endParaRPr dirty="0"/>
+          </a:p>
+          <a:p>
+            <a:pPr>
+              <a:spcBef>
+                <a:spcPts val="1200"/>
+              </a:spcBef>
+              <a:spcAft>
+                <a:spcPts val="800"/>
+              </a:spcAft>
+              <a:defRPr sz="2400">
+                <a:solidFill>
+                  <a:srgbClr val="444444"/>
+                </a:solidFill>
+              </a:defRPr>
+            </a:pPr>
+            <a:r>
+              <a:rPr dirty="0"/>
+              <a:t>Tests sometimes pass, sometimes fail </a:t>
+            </a:r>
+            <a:r>
+              <a:rPr lang="en-US" dirty="0"/>
+              <a:t>without code changes</a:t>
+            </a:r>
+            <a:endParaRPr dirty="0"/>
+          </a:p>
+          <a:p>
+            <a:pPr>
+              <a:spcBef>
+                <a:spcPts val="1200"/>
+              </a:spcBef>
+              <a:spcAft>
+                <a:spcPts val="800"/>
+              </a:spcAft>
+              <a:defRPr sz="2400">
+                <a:solidFill>
+                  <a:srgbClr val="444444"/>
+                </a:solidFill>
+              </a:defRPr>
+            </a:pPr>
+            <a:r>
+              <a:rPr dirty="0"/>
+              <a:t>Wastes time </a:t>
+            </a:r>
+            <a:r>
+              <a:rPr lang="en-US" dirty="0"/>
+              <a:t>,</a:t>
+            </a:r>
+            <a:r>
+              <a:rPr dirty="0"/>
+              <a:t> developers debug fake problems</a:t>
+            </a:r>
+          </a:p>
+          <a:p>
+            <a:pPr>
+              <a:spcBef>
+                <a:spcPts val="1200"/>
+              </a:spcBef>
+              <a:spcAft>
+                <a:spcPts val="800"/>
+              </a:spcAft>
+              <a:defRPr sz="2400">
+                <a:solidFill>
+                  <a:srgbClr val="444444"/>
+                </a:solidFill>
+              </a:defRPr>
+            </a:pPr>
+            <a:r>
+              <a:rPr dirty="0"/>
+              <a:t>Breaks CI/CD trust</a:t>
+            </a:r>
+            <a:r>
+              <a:rPr lang="en-US" dirty="0"/>
+              <a:t>,</a:t>
+            </a:r>
+            <a:r>
+              <a:rPr dirty="0"/>
+              <a:t> can't rely on test results</a:t>
+            </a:r>
+          </a:p>
+          <a:p>
+            <a:pPr>
+              <a:spcBef>
+                <a:spcPts val="1200"/>
+              </a:spcBef>
+              <a:spcAft>
+                <a:spcPts val="800"/>
+              </a:spcAft>
+              <a:defRPr sz="2400">
+                <a:solidFill>
+                  <a:srgbClr val="444444"/>
+                </a:solidFill>
+              </a:defRPr>
+            </a:pPr>
+            <a:r>
+              <a:rPr dirty="0"/>
+              <a:t>Hard to find why tests are flaky</a:t>
+            </a:r>
+          </a:p>
+          <a:p>
+            <a:pPr>
+              <a:spcBef>
+                <a:spcPts val="1200"/>
+              </a:spcBef>
+              <a:spcAft>
+                <a:spcPts val="800"/>
+              </a:spcAft>
+              <a:defRPr sz="2400">
+                <a:solidFill>
+                  <a:srgbClr val="444444"/>
+                </a:solidFill>
+              </a:defRPr>
+            </a:pPr>
+            <a:r>
+              <a:rPr dirty="0"/>
+              <a:t>Reasons: timing issues,</a:t>
+            </a:r>
+            <a:r>
+              <a:rPr lang="en-US" dirty="0"/>
+              <a:t> thread/concurrency bugs,</a:t>
+            </a:r>
+            <a:r>
+              <a:rPr dirty="0"/>
+              <a:t> random values, environment settings</a:t>
+            </a:r>
+          </a:p>
+        </p:txBody>
+      </p:sp>
+      <p:sp>
+        <p:nvSpPr>
+          <p:cNvPr id="4" name="Slide Number Placeholder 3">
+            <a:extLst>
+              <a:ext uri="{FF2B5EF4-FFF2-40B4-BE49-F238E27FC236}">
+                <a16:creationId xmlns:a16="http://schemas.microsoft.com/office/drawing/2014/main" id="{03197069-1B97-993D-567F-26F511068FE5}"/>
+              </a:ext>
+            </a:extLst>
+          </p:cNvPr>
+          <p:cNvSpPr>
+            <a:spLocks noGrp="1"/>
+          </p:cNvSpPr>
+          <p:nvPr>
+            <p:ph type="sldNum" sz="quarter" idx="12"/>
+          </p:nvPr>
+        </p:nvSpPr>
+        <p:spPr/>
+        <p:txBody>
+          <a:bodyPr/>
+          <a:lstStyle/>
+          <a:p>
+            <a:fld id="{C1FF6DA9-008F-8B48-92A6-B652298478BF}" type="slidenum">
+              <a:rPr lang="en-US" smtClean="0"/>
+              <a:t>2</a:t>
+            </a:fld>
+            <a:endParaRPr lang="en-US"/>
+          </a:p>
+        </p:txBody>
+      </p:sp>
+    </p:spTree>
+  </p:cSld>
+  <p:clrMapOvr>
+    <a:masterClrMapping/>
+  </p:clrMapOvr>
+</p:sld>
+</file>
+
+<file path=ppt/slides/slide3.xml><?xml version="1.0" encoding="utf-8"?>
+<p:sld xmlns:a="http://schemas.openxmlformats.org/drawingml/2006/main" xmlns:r="http://schemas.openxmlformats.org/officeDocument/2006/relationships" xmlns:p="http://schemas.openxmlformats.org/presentationml/2006/main">
+  <p:cSld>
+    <p:spTree>
+      <p:nvGrpSpPr>
+        <p:cNvPr id="1" name=""/>
+        <p:cNvGrpSpPr/>
+        <p:nvPr/>
+      </p:nvGrpSpPr>
+      <p:grpSpPr>
+        <a:xfrm>
+          <a:off x="0" y="0"/>
+          <a:ext cx="0" cy="0"/>
+          <a:chOff x="0" y="0"/>
+          <a:chExt cx="0" cy="0"/>
+        </a:xfrm>
+      </p:grpSpPr>
+      <p:sp>
+        <p:nvSpPr>
+          <p:cNvPr id="2" name="TextBox 1"/>
+          <p:cNvSpPr txBox="1"/>
+          <p:nvPr/>
+        </p:nvSpPr>
+        <p:spPr>
+          <a:xfrm>
+            <a:off x="2714595" y="274321"/>
+            <a:ext cx="6762813" cy="769441"/>
+          </a:xfrm>
+          <a:prstGeom prst="rect">
+            <a:avLst/>
+          </a:prstGeom>
+          <a:noFill/>
+        </p:spPr>
+        <p:txBody>
           <a:bodyPr wrap="none">
             <a:spAutoFit/>
           </a:bodyPr>
@@ -3280,6 +3998,2040 @@
               </a:defRPr>
             </a:pPr>
             <a:r>
+              <a:rPr lang="en-US" sz="4400" dirty="0"/>
+              <a:t>The </a:t>
+            </a:r>
+            <a:r>
+              <a:rPr sz="4400" dirty="0"/>
+              <a:t>Solution: </a:t>
+            </a:r>
+            <a:r>
+              <a:rPr sz="4400" dirty="0" err="1"/>
+              <a:t>FlakeHound</a:t>
+            </a:r>
+            <a:r>
+              <a:rPr sz="4400" dirty="0"/>
+              <a:t>++</a:t>
+            </a:r>
+          </a:p>
+        </p:txBody>
+      </p:sp>
+      <p:sp>
+        <p:nvSpPr>
+          <p:cNvPr id="3" name="Rounded Rectangle 2"/>
+          <p:cNvSpPr/>
+          <p:nvPr/>
+        </p:nvSpPr>
+        <p:spPr>
+          <a:xfrm>
+            <a:off x="1350955" y="1645920"/>
+            <a:ext cx="3657600" cy="4114800"/>
+          </a:xfrm>
+          <a:prstGeom prst="roundRect">
+            <a:avLst/>
+          </a:prstGeom>
+          <a:solidFill>
+            <a:srgbClr val="F2F2F2"/>
+          </a:solidFill>
+          <a:ln w="38100">
+            <a:solidFill>
+              <a:srgbClr val="4472C4"/>
+            </a:solidFill>
+          </a:ln>
+        </p:spPr>
+        <p:style>
+          <a:lnRef idx="1">
+            <a:schemeClr val="accent1"/>
+          </a:lnRef>
+          <a:fillRef idx="3">
+            <a:schemeClr val="accent1"/>
+          </a:fillRef>
+          <a:effectRef idx="2">
+            <a:schemeClr val="accent1"/>
+          </a:effectRef>
+          <a:fontRef idx="minor">
+            <a:schemeClr val="lt1"/>
+          </a:fontRef>
+        </p:style>
+        <p:txBody>
+          <a:bodyPr rtlCol="0" anchor="ctr"/>
+          <a:lstStyle/>
+          <a:p>
+            <a:pPr algn="ctr"/>
+            <a:endParaRPr/>
+          </a:p>
+        </p:txBody>
+      </p:sp>
+      <p:sp>
+        <p:nvSpPr>
+          <p:cNvPr id="4" name="TextBox 3"/>
+          <p:cNvSpPr txBox="1"/>
+          <p:nvPr/>
+        </p:nvSpPr>
+        <p:spPr>
+          <a:xfrm>
+            <a:off x="1789342" y="1828800"/>
+            <a:ext cx="2780826" cy="523220"/>
+          </a:xfrm>
+          <a:prstGeom prst="rect">
+            <a:avLst/>
+          </a:prstGeom>
+          <a:noFill/>
+        </p:spPr>
+        <p:txBody>
+          <a:bodyPr wrap="none">
+            <a:spAutoFit/>
+          </a:bodyPr>
+          <a:lstStyle/>
+          <a:p>
+            <a:pPr algn="ctr">
+              <a:defRPr sz="2800" b="1">
+                <a:solidFill>
+                  <a:srgbClr val="4472C4"/>
+                </a:solidFill>
+              </a:defRPr>
+            </a:pPr>
+            <a:r>
+              <a:rPr sz="2800"/>
+              <a:t>Dynamic Analysis</a:t>
+            </a:r>
+          </a:p>
+        </p:txBody>
+      </p:sp>
+      <p:sp>
+        <p:nvSpPr>
+          <p:cNvPr id="5" name="TextBox 4"/>
+          <p:cNvSpPr txBox="1"/>
+          <p:nvPr/>
+        </p:nvSpPr>
+        <p:spPr>
+          <a:xfrm>
+            <a:off x="1625275" y="2468881"/>
+            <a:ext cx="3108960" cy="2246769"/>
+          </a:xfrm>
+          <a:prstGeom prst="rect">
+            <a:avLst/>
+          </a:prstGeom>
+          <a:noFill/>
+        </p:spPr>
+        <p:txBody>
+          <a:bodyPr wrap="square">
+            <a:spAutoFit/>
+          </a:bodyPr>
+          <a:lstStyle/>
+          <a:p>
+            <a:pPr>
+              <a:spcBef>
+                <a:spcPts val="800"/>
+              </a:spcBef>
+              <a:defRPr sz="2200">
+                <a:solidFill>
+                  <a:srgbClr val="444444"/>
+                </a:solidFill>
+              </a:defRPr>
+            </a:pPr>
+            <a:r>
+              <a:rPr sz="2400" dirty="0"/>
+              <a:t>• Run tests many times</a:t>
+            </a:r>
+          </a:p>
+          <a:p>
+            <a:pPr>
+              <a:spcBef>
+                <a:spcPts val="800"/>
+              </a:spcBef>
+              <a:defRPr sz="2200">
+                <a:solidFill>
+                  <a:srgbClr val="444444"/>
+                </a:solidFill>
+              </a:defRPr>
+            </a:pPr>
+            <a:r>
+              <a:rPr sz="2400" dirty="0"/>
+              <a:t>• Track which tests fail</a:t>
+            </a:r>
+          </a:p>
+          <a:p>
+            <a:pPr>
+              <a:spcBef>
+                <a:spcPts val="800"/>
+              </a:spcBef>
+              <a:defRPr sz="2200">
+                <a:solidFill>
+                  <a:srgbClr val="444444"/>
+                </a:solidFill>
+              </a:defRPr>
+            </a:pPr>
+            <a:r>
+              <a:rPr sz="2400" dirty="0"/>
+              <a:t>• Count how often they fail</a:t>
+            </a:r>
+          </a:p>
+          <a:p>
+            <a:pPr>
+              <a:spcBef>
+                <a:spcPts val="800"/>
+              </a:spcBef>
+              <a:defRPr sz="2200">
+                <a:solidFill>
+                  <a:srgbClr val="444444"/>
+                </a:solidFill>
+              </a:defRPr>
+            </a:pPr>
+            <a:r>
+              <a:rPr sz="2400" dirty="0"/>
+              <a:t>• Find flaky patterns</a:t>
+            </a:r>
+          </a:p>
+        </p:txBody>
+      </p:sp>
+      <p:sp>
+        <p:nvSpPr>
+          <p:cNvPr id="6" name="Rounded Rectangle 5"/>
+          <p:cNvSpPr/>
+          <p:nvPr/>
+        </p:nvSpPr>
+        <p:spPr>
+          <a:xfrm>
+            <a:off x="6917978" y="1645920"/>
+            <a:ext cx="3657600" cy="4114800"/>
+          </a:xfrm>
+          <a:prstGeom prst="roundRect">
+            <a:avLst/>
+          </a:prstGeom>
+          <a:solidFill>
+            <a:srgbClr val="F2F2F2"/>
+          </a:solidFill>
+          <a:ln w="38100">
+            <a:solidFill>
+              <a:srgbClr val="ED7D31"/>
+            </a:solidFill>
+          </a:ln>
+        </p:spPr>
+        <p:style>
+          <a:lnRef idx="1">
+            <a:schemeClr val="accent1"/>
+          </a:lnRef>
+          <a:fillRef idx="3">
+            <a:schemeClr val="accent1"/>
+          </a:fillRef>
+          <a:effectRef idx="2">
+            <a:schemeClr val="accent1"/>
+          </a:effectRef>
+          <a:fontRef idx="minor">
+            <a:schemeClr val="lt1"/>
+          </a:fontRef>
+        </p:style>
+        <p:txBody>
+          <a:bodyPr rtlCol="0" anchor="ctr"/>
+          <a:lstStyle/>
+          <a:p>
+            <a:pPr algn="ctr"/>
+            <a:endParaRPr/>
+          </a:p>
+        </p:txBody>
+      </p:sp>
+      <p:sp>
+        <p:nvSpPr>
+          <p:cNvPr id="7" name="TextBox 6"/>
+          <p:cNvSpPr txBox="1"/>
+          <p:nvPr/>
+        </p:nvSpPr>
+        <p:spPr>
+          <a:xfrm>
+            <a:off x="7589827" y="1828800"/>
+            <a:ext cx="2313902" cy="523220"/>
+          </a:xfrm>
+          <a:prstGeom prst="rect">
+            <a:avLst/>
+          </a:prstGeom>
+          <a:noFill/>
+        </p:spPr>
+        <p:txBody>
+          <a:bodyPr wrap="none">
+            <a:spAutoFit/>
+          </a:bodyPr>
+          <a:lstStyle/>
+          <a:p>
+            <a:pPr algn="ctr">
+              <a:defRPr sz="2800" b="1">
+                <a:solidFill>
+                  <a:srgbClr val="ED7D31"/>
+                </a:solidFill>
+              </a:defRPr>
+            </a:pPr>
+            <a:r>
+              <a:rPr sz="2800"/>
+              <a:t>Static Analysis</a:t>
+            </a:r>
+          </a:p>
+        </p:txBody>
+      </p:sp>
+      <p:sp>
+        <p:nvSpPr>
+          <p:cNvPr id="8" name="TextBox 7"/>
+          <p:cNvSpPr txBox="1"/>
+          <p:nvPr/>
+        </p:nvSpPr>
+        <p:spPr>
+          <a:xfrm>
+            <a:off x="7192298" y="2468880"/>
+            <a:ext cx="3108960" cy="1877437"/>
+          </a:xfrm>
+          <a:prstGeom prst="rect">
+            <a:avLst/>
+          </a:prstGeom>
+          <a:noFill/>
+        </p:spPr>
+        <p:txBody>
+          <a:bodyPr wrap="square">
+            <a:spAutoFit/>
+          </a:bodyPr>
+          <a:lstStyle/>
+          <a:p>
+            <a:pPr>
+              <a:spcBef>
+                <a:spcPts val="800"/>
+              </a:spcBef>
+              <a:defRPr sz="2200">
+                <a:solidFill>
+                  <a:srgbClr val="444444"/>
+                </a:solidFill>
+              </a:defRPr>
+            </a:pPr>
+            <a:r>
+              <a:rPr sz="2400" dirty="0"/>
+              <a:t>• Read C++ code</a:t>
+            </a:r>
+          </a:p>
+          <a:p>
+            <a:pPr>
+              <a:spcBef>
+                <a:spcPts val="800"/>
+              </a:spcBef>
+              <a:defRPr sz="2200">
+                <a:solidFill>
+                  <a:srgbClr val="444444"/>
+                </a:solidFill>
+              </a:defRPr>
+            </a:pPr>
+            <a:r>
+              <a:rPr sz="2400" dirty="0"/>
+              <a:t>• Look for risky code</a:t>
+            </a:r>
+          </a:p>
+          <a:p>
+            <a:pPr>
+              <a:spcBef>
+                <a:spcPts val="800"/>
+              </a:spcBef>
+              <a:defRPr sz="2200">
+                <a:solidFill>
+                  <a:srgbClr val="444444"/>
+                </a:solidFill>
+              </a:defRPr>
+            </a:pPr>
+            <a:r>
+              <a:rPr sz="2400" dirty="0"/>
+              <a:t>• Find flakiness causes</a:t>
+            </a:r>
+          </a:p>
+          <a:p>
+            <a:pPr>
+              <a:spcBef>
+                <a:spcPts val="800"/>
+              </a:spcBef>
+              <a:defRPr sz="2200">
+                <a:solidFill>
+                  <a:srgbClr val="444444"/>
+                </a:solidFill>
+              </a:defRPr>
+            </a:pPr>
+            <a:r>
+              <a:rPr sz="2400" dirty="0"/>
+              <a:t>• Tell why tests fail</a:t>
+            </a:r>
+          </a:p>
+        </p:txBody>
+      </p:sp>
+      <p:sp>
+        <p:nvSpPr>
+          <p:cNvPr id="9" name="Slide Number Placeholder 8">
+            <a:extLst>
+              <a:ext uri="{FF2B5EF4-FFF2-40B4-BE49-F238E27FC236}">
+                <a16:creationId xmlns:a16="http://schemas.microsoft.com/office/drawing/2014/main" id="{36375564-702B-818B-426E-6ADBF0C6E3B4}"/>
+              </a:ext>
+            </a:extLst>
+          </p:cNvPr>
+          <p:cNvSpPr>
+            <a:spLocks noGrp="1"/>
+          </p:cNvSpPr>
+          <p:nvPr>
+            <p:ph type="sldNum" sz="quarter" idx="12"/>
+          </p:nvPr>
+        </p:nvSpPr>
+        <p:spPr/>
+        <p:txBody>
+          <a:bodyPr/>
+          <a:lstStyle/>
+          <a:p>
+            <a:fld id="{C1FF6DA9-008F-8B48-92A6-B652298478BF}" type="slidenum">
+              <a:rPr lang="en-US" smtClean="0"/>
+              <a:t>3</a:t>
+            </a:fld>
+            <a:endParaRPr lang="en-US" dirty="0"/>
+          </a:p>
+        </p:txBody>
+      </p:sp>
+    </p:spTree>
+  </p:cSld>
+  <p:clrMapOvr>
+    <a:masterClrMapping/>
+  </p:clrMapOvr>
+</p:sld>
+</file>
+
+<file path=ppt/slides/slide4.xml><?xml version="1.0" encoding="utf-8"?>
+<p:sld xmlns:a="http://schemas.openxmlformats.org/drawingml/2006/main" xmlns:r="http://schemas.openxmlformats.org/officeDocument/2006/relationships" xmlns:p="http://schemas.openxmlformats.org/presentationml/2006/main">
+  <p:cSld>
+    <p:spTree>
+      <p:nvGrpSpPr>
+        <p:cNvPr id="1" name=""/>
+        <p:cNvGrpSpPr/>
+        <p:nvPr/>
+      </p:nvGrpSpPr>
+      <p:grpSpPr>
+        <a:xfrm>
+          <a:off x="0" y="0"/>
+          <a:ext cx="0" cy="0"/>
+          <a:chOff x="0" y="0"/>
+          <a:chExt cx="0" cy="0"/>
+        </a:xfrm>
+      </p:grpSpPr>
+      <p:sp>
+        <p:nvSpPr>
+          <p:cNvPr id="2" name="TextBox 1"/>
+          <p:cNvSpPr txBox="1"/>
+          <p:nvPr/>
+        </p:nvSpPr>
+        <p:spPr>
+          <a:xfrm>
+            <a:off x="2753419" y="274321"/>
+            <a:ext cx="6685163" cy="769441"/>
+          </a:xfrm>
+          <a:prstGeom prst="rect">
+            <a:avLst/>
+          </a:prstGeom>
+          <a:noFill/>
+        </p:spPr>
+        <p:txBody>
+          <a:bodyPr wrap="none">
+            <a:spAutoFit/>
+          </a:bodyPr>
+          <a:lstStyle/>
+          <a:p>
+            <a:pPr algn="ctr">
+              <a:defRPr sz="4400" b="1">
+                <a:solidFill>
+                  <a:srgbClr val="1F4E79"/>
+                </a:solidFill>
+              </a:defRPr>
+            </a:pPr>
+            <a:r>
+              <a:rPr sz="4400"/>
+              <a:t>How It Works - Step by Step</a:t>
+            </a:r>
+          </a:p>
+        </p:txBody>
+      </p:sp>
+      <p:sp>
+        <p:nvSpPr>
+          <p:cNvPr id="3" name="Rounded Rectangle 2"/>
+          <p:cNvSpPr/>
+          <p:nvPr/>
+        </p:nvSpPr>
+        <p:spPr>
+          <a:xfrm>
+            <a:off x="2072640" y="1671484"/>
+            <a:ext cx="1463040" cy="1101212"/>
+          </a:xfrm>
+          <a:prstGeom prst="roundRect">
+            <a:avLst/>
+          </a:prstGeom>
+          <a:solidFill>
+            <a:srgbClr val="4472C4"/>
+          </a:solidFill>
+          <a:ln w="25400">
+            <a:solidFill>
+              <a:srgbClr val="000000"/>
+            </a:solidFill>
+          </a:ln>
+        </p:spPr>
+        <p:style>
+          <a:lnRef idx="1">
+            <a:schemeClr val="accent1"/>
+          </a:lnRef>
+          <a:fillRef idx="3">
+            <a:schemeClr val="accent1"/>
+          </a:fillRef>
+          <a:effectRef idx="2">
+            <a:schemeClr val="accent1"/>
+          </a:effectRef>
+          <a:fontRef idx="minor">
+            <a:schemeClr val="lt1"/>
+          </a:fontRef>
+        </p:style>
+        <p:txBody>
+          <a:bodyPr rtlCol="0" anchor="t"/>
+          <a:lstStyle/>
+          <a:p>
+            <a:pPr algn="ctr">
+              <a:defRPr sz="1800" b="1">
+                <a:solidFill>
+                  <a:srgbClr val="FFFFFF"/>
+                </a:solidFill>
+              </a:defRPr>
+            </a:pPr>
+            <a:r>
+              <a:rPr dirty="0"/>
+              <a:t>INPUT</a:t>
+            </a:r>
+          </a:p>
+          <a:p>
+            <a:pPr algn="ctr">
+              <a:defRPr sz="1400">
+                <a:solidFill>
+                  <a:srgbClr val="FFFFFF"/>
+                </a:solidFill>
+              </a:defRPr>
+            </a:pPr>
+            <a:r>
+              <a:rPr sz="1400" dirty="0"/>
+              <a:t>Test Code</a:t>
+            </a:r>
+            <a:br>
+              <a:rPr sz="1400" dirty="0"/>
+            </a:br>
+            <a:r>
+              <a:rPr lang="en-US" sz="1400" dirty="0"/>
+              <a:t>+</a:t>
+            </a:r>
+            <a:r>
+              <a:rPr sz="1400" dirty="0"/>
+              <a:t> XML</a:t>
+            </a:r>
+          </a:p>
+        </p:txBody>
+      </p:sp>
+      <p:sp>
+        <p:nvSpPr>
+          <p:cNvPr id="4" name="Right Arrow 3"/>
+          <p:cNvSpPr/>
+          <p:nvPr/>
+        </p:nvSpPr>
+        <p:spPr>
+          <a:xfrm>
+            <a:off x="3535680" y="2122292"/>
+            <a:ext cx="274320" cy="330364"/>
+          </a:xfrm>
+          <a:prstGeom prst="rightArrow">
+            <a:avLst/>
+          </a:prstGeom>
+          <a:solidFill>
+            <a:srgbClr val="444444"/>
+          </a:solidFill>
+          <a:ln>
+            <a:noFill/>
+          </a:ln>
+        </p:spPr>
+        <p:style>
+          <a:lnRef idx="1">
+            <a:schemeClr val="accent1"/>
+          </a:lnRef>
+          <a:fillRef idx="3">
+            <a:schemeClr val="accent1"/>
+          </a:fillRef>
+          <a:effectRef idx="2">
+            <a:schemeClr val="accent1"/>
+          </a:effectRef>
+          <a:fontRef idx="minor">
+            <a:schemeClr val="lt1"/>
+          </a:fontRef>
+        </p:style>
+        <p:txBody>
+          <a:bodyPr rtlCol="0" anchor="ctr"/>
+          <a:lstStyle/>
+          <a:p>
+            <a:pPr algn="ctr"/>
+            <a:endParaRPr/>
+          </a:p>
+        </p:txBody>
+      </p:sp>
+      <p:sp>
+        <p:nvSpPr>
+          <p:cNvPr id="5" name="Rounded Rectangle 4"/>
+          <p:cNvSpPr/>
+          <p:nvPr/>
+        </p:nvSpPr>
+        <p:spPr>
+          <a:xfrm>
+            <a:off x="3810000" y="1671484"/>
+            <a:ext cx="1463040" cy="1101212"/>
+          </a:xfrm>
+          <a:prstGeom prst="roundRect">
+            <a:avLst/>
+          </a:prstGeom>
+          <a:solidFill>
+            <a:srgbClr val="5CB85C"/>
+          </a:solidFill>
+          <a:ln w="25400">
+            <a:solidFill>
+              <a:srgbClr val="000000"/>
+            </a:solidFill>
+          </a:ln>
+        </p:spPr>
+        <p:style>
+          <a:lnRef idx="1">
+            <a:schemeClr val="accent1"/>
+          </a:lnRef>
+          <a:fillRef idx="3">
+            <a:schemeClr val="accent1"/>
+          </a:fillRef>
+          <a:effectRef idx="2">
+            <a:schemeClr val="accent1"/>
+          </a:effectRef>
+          <a:fontRef idx="minor">
+            <a:schemeClr val="lt1"/>
+          </a:fontRef>
+        </p:style>
+        <p:txBody>
+          <a:bodyPr rtlCol="0" anchor="t"/>
+          <a:lstStyle/>
+          <a:p>
+            <a:pPr algn="ctr">
+              <a:defRPr sz="1800" b="1">
+                <a:solidFill>
+                  <a:srgbClr val="FFFFFF"/>
+                </a:solidFill>
+              </a:defRPr>
+            </a:pPr>
+            <a:r>
+              <a:t>RUNNER</a:t>
+            </a:r>
+          </a:p>
+          <a:p>
+            <a:pPr algn="ctr">
+              <a:defRPr sz="1400">
+                <a:solidFill>
+                  <a:srgbClr val="FFFFFF"/>
+                </a:solidFill>
+              </a:defRPr>
+            </a:pPr>
+            <a:r>
+              <a:rPr sz="1400"/>
+              <a:t>Run Tests</a:t>
+            </a:r>
+            <a:br>
+              <a:rPr sz="1400"/>
+            </a:br>
+            <a:r>
+              <a:rPr sz="1400"/>
+              <a:t>N Times</a:t>
+            </a:r>
+          </a:p>
+        </p:txBody>
+      </p:sp>
+      <p:sp>
+        <p:nvSpPr>
+          <p:cNvPr id="6" name="Right Arrow 5"/>
+          <p:cNvSpPr/>
+          <p:nvPr/>
+        </p:nvSpPr>
+        <p:spPr>
+          <a:xfrm>
+            <a:off x="5273040" y="2122292"/>
+            <a:ext cx="274320" cy="330364"/>
+          </a:xfrm>
+          <a:prstGeom prst="rightArrow">
+            <a:avLst/>
+          </a:prstGeom>
+          <a:solidFill>
+            <a:srgbClr val="444444"/>
+          </a:solidFill>
+          <a:ln>
+            <a:noFill/>
+          </a:ln>
+        </p:spPr>
+        <p:style>
+          <a:lnRef idx="1">
+            <a:schemeClr val="accent1"/>
+          </a:lnRef>
+          <a:fillRef idx="3">
+            <a:schemeClr val="accent1"/>
+          </a:fillRef>
+          <a:effectRef idx="2">
+            <a:schemeClr val="accent1"/>
+          </a:effectRef>
+          <a:fontRef idx="minor">
+            <a:schemeClr val="lt1"/>
+          </a:fontRef>
+        </p:style>
+        <p:txBody>
+          <a:bodyPr rtlCol="0" anchor="ctr"/>
+          <a:lstStyle/>
+          <a:p>
+            <a:pPr algn="ctr"/>
+            <a:endParaRPr/>
+          </a:p>
+        </p:txBody>
+      </p:sp>
+      <p:sp>
+        <p:nvSpPr>
+          <p:cNvPr id="7" name="Rounded Rectangle 6"/>
+          <p:cNvSpPr/>
+          <p:nvPr/>
+        </p:nvSpPr>
+        <p:spPr>
+          <a:xfrm>
+            <a:off x="5547360" y="1671484"/>
+            <a:ext cx="1463040" cy="1101212"/>
+          </a:xfrm>
+          <a:prstGeom prst="roundRect">
+            <a:avLst/>
+          </a:prstGeom>
+          <a:solidFill>
+            <a:srgbClr val="ED7D31"/>
+          </a:solidFill>
+          <a:ln w="25400">
+            <a:solidFill>
+              <a:srgbClr val="000000"/>
+            </a:solidFill>
+          </a:ln>
+        </p:spPr>
+        <p:style>
+          <a:lnRef idx="1">
+            <a:schemeClr val="accent1"/>
+          </a:lnRef>
+          <a:fillRef idx="3">
+            <a:schemeClr val="accent1"/>
+          </a:fillRef>
+          <a:effectRef idx="2">
+            <a:schemeClr val="accent1"/>
+          </a:effectRef>
+          <a:fontRef idx="minor">
+            <a:schemeClr val="lt1"/>
+          </a:fontRef>
+        </p:style>
+        <p:txBody>
+          <a:bodyPr rtlCol="0" anchor="t"/>
+          <a:lstStyle/>
+          <a:p>
+            <a:pPr algn="ctr">
+              <a:defRPr sz="1800" b="1">
+                <a:solidFill>
+                  <a:srgbClr val="FFFFFF"/>
+                </a:solidFill>
+              </a:defRPr>
+            </a:pPr>
+            <a:r>
+              <a:t>PARSER</a:t>
+            </a:r>
+          </a:p>
+          <a:p>
+            <a:pPr algn="ctr">
+              <a:defRPr sz="1400">
+                <a:solidFill>
+                  <a:srgbClr val="FFFFFF"/>
+                </a:solidFill>
+              </a:defRPr>
+            </a:pPr>
+            <a:r>
+              <a:rPr sz="1400"/>
+              <a:t>Extract</a:t>
+            </a:r>
+            <a:br>
+              <a:rPr sz="1400"/>
+            </a:br>
+            <a:r>
+              <a:rPr sz="1400"/>
+              <a:t>Results</a:t>
+            </a:r>
+          </a:p>
+        </p:txBody>
+      </p:sp>
+      <p:sp>
+        <p:nvSpPr>
+          <p:cNvPr id="8" name="Right Arrow 7"/>
+          <p:cNvSpPr/>
+          <p:nvPr/>
+        </p:nvSpPr>
+        <p:spPr>
+          <a:xfrm>
+            <a:off x="7010400" y="2122292"/>
+            <a:ext cx="274320" cy="330364"/>
+          </a:xfrm>
+          <a:prstGeom prst="rightArrow">
+            <a:avLst/>
+          </a:prstGeom>
+          <a:solidFill>
+            <a:srgbClr val="444444"/>
+          </a:solidFill>
+          <a:ln>
+            <a:noFill/>
+          </a:ln>
+        </p:spPr>
+        <p:style>
+          <a:lnRef idx="1">
+            <a:schemeClr val="accent1"/>
+          </a:lnRef>
+          <a:fillRef idx="3">
+            <a:schemeClr val="accent1"/>
+          </a:fillRef>
+          <a:effectRef idx="2">
+            <a:schemeClr val="accent1"/>
+          </a:effectRef>
+          <a:fontRef idx="minor">
+            <a:schemeClr val="lt1"/>
+          </a:fontRef>
+        </p:style>
+        <p:txBody>
+          <a:bodyPr rtlCol="0" anchor="ctr"/>
+          <a:lstStyle/>
+          <a:p>
+            <a:pPr algn="ctr"/>
+            <a:endParaRPr/>
+          </a:p>
+        </p:txBody>
+      </p:sp>
+      <p:sp>
+        <p:nvSpPr>
+          <p:cNvPr id="9" name="Rounded Rectangle 8"/>
+          <p:cNvSpPr/>
+          <p:nvPr/>
+        </p:nvSpPr>
+        <p:spPr>
+          <a:xfrm>
+            <a:off x="7284720" y="1671484"/>
+            <a:ext cx="1463040" cy="1101212"/>
+          </a:xfrm>
+          <a:prstGeom prst="roundRect">
+            <a:avLst/>
+          </a:prstGeom>
+          <a:solidFill>
+            <a:srgbClr val="9B59B6"/>
+          </a:solidFill>
+          <a:ln w="25400">
+            <a:solidFill>
+              <a:srgbClr val="000000"/>
+            </a:solidFill>
+          </a:ln>
+        </p:spPr>
+        <p:style>
+          <a:lnRef idx="1">
+            <a:schemeClr val="accent1"/>
+          </a:lnRef>
+          <a:fillRef idx="3">
+            <a:schemeClr val="accent1"/>
+          </a:fillRef>
+          <a:effectRef idx="2">
+            <a:schemeClr val="accent1"/>
+          </a:effectRef>
+          <a:fontRef idx="minor">
+            <a:schemeClr val="lt1"/>
+          </a:fontRef>
+        </p:style>
+        <p:txBody>
+          <a:bodyPr rtlCol="0" anchor="t"/>
+          <a:lstStyle/>
+          <a:p>
+            <a:pPr algn="ctr">
+              <a:defRPr sz="1800" b="1">
+                <a:solidFill>
+                  <a:srgbClr val="FFFFFF"/>
+                </a:solidFill>
+              </a:defRPr>
+            </a:pPr>
+            <a:r>
+              <a:t>ANALYZER</a:t>
+            </a:r>
+          </a:p>
+          <a:p>
+            <a:pPr algn="ctr">
+              <a:defRPr sz="1400">
+                <a:solidFill>
+                  <a:srgbClr val="FFFFFF"/>
+                </a:solidFill>
+              </a:defRPr>
+            </a:pPr>
+            <a:r>
+              <a:rPr sz="1400"/>
+              <a:t>Find</a:t>
+            </a:r>
+            <a:br>
+              <a:rPr sz="1400"/>
+            </a:br>
+            <a:r>
+              <a:rPr sz="1400"/>
+              <a:t>Issues</a:t>
+            </a:r>
+          </a:p>
+        </p:txBody>
+      </p:sp>
+      <p:sp>
+        <p:nvSpPr>
+          <p:cNvPr id="10" name="Right Arrow 9"/>
+          <p:cNvSpPr/>
+          <p:nvPr/>
+        </p:nvSpPr>
+        <p:spPr>
+          <a:xfrm>
+            <a:off x="8747760" y="2122292"/>
+            <a:ext cx="274320" cy="330364"/>
+          </a:xfrm>
+          <a:prstGeom prst="rightArrow">
+            <a:avLst/>
+          </a:prstGeom>
+          <a:solidFill>
+            <a:srgbClr val="444444"/>
+          </a:solidFill>
+          <a:ln>
+            <a:noFill/>
+          </a:ln>
+        </p:spPr>
+        <p:style>
+          <a:lnRef idx="1">
+            <a:schemeClr val="accent1"/>
+          </a:lnRef>
+          <a:fillRef idx="3">
+            <a:schemeClr val="accent1"/>
+          </a:fillRef>
+          <a:effectRef idx="2">
+            <a:schemeClr val="accent1"/>
+          </a:effectRef>
+          <a:fontRef idx="minor">
+            <a:schemeClr val="lt1"/>
+          </a:fontRef>
+        </p:style>
+        <p:txBody>
+          <a:bodyPr rtlCol="0" anchor="ctr"/>
+          <a:lstStyle/>
+          <a:p>
+            <a:pPr algn="ctr"/>
+            <a:endParaRPr/>
+          </a:p>
+        </p:txBody>
+      </p:sp>
+      <p:sp>
+        <p:nvSpPr>
+          <p:cNvPr id="11" name="Rounded Rectangle 10"/>
+          <p:cNvSpPr/>
+          <p:nvPr/>
+        </p:nvSpPr>
+        <p:spPr>
+          <a:xfrm>
+            <a:off x="9022080" y="1671484"/>
+            <a:ext cx="1463040" cy="1101212"/>
+          </a:xfrm>
+          <a:prstGeom prst="roundRect">
+            <a:avLst/>
+          </a:prstGeom>
+          <a:solidFill>
+            <a:srgbClr val="3498DB"/>
+          </a:solidFill>
+          <a:ln w="25400">
+            <a:solidFill>
+              <a:srgbClr val="000000"/>
+            </a:solidFill>
+          </a:ln>
+        </p:spPr>
+        <p:style>
+          <a:lnRef idx="1">
+            <a:schemeClr val="accent1"/>
+          </a:lnRef>
+          <a:fillRef idx="3">
+            <a:schemeClr val="accent1"/>
+          </a:fillRef>
+          <a:effectRef idx="2">
+            <a:schemeClr val="accent1"/>
+          </a:effectRef>
+          <a:fontRef idx="minor">
+            <a:schemeClr val="lt1"/>
+          </a:fontRef>
+        </p:style>
+        <p:txBody>
+          <a:bodyPr rtlCol="0" anchor="t"/>
+          <a:lstStyle/>
+          <a:p>
+            <a:pPr algn="ctr">
+              <a:defRPr sz="1800" b="1">
+                <a:solidFill>
+                  <a:srgbClr val="FFFFFF"/>
+                </a:solidFill>
+              </a:defRPr>
+            </a:pPr>
+            <a:r>
+              <a:t>REPORTS</a:t>
+            </a:r>
+          </a:p>
+          <a:p>
+            <a:pPr algn="ctr">
+              <a:defRPr sz="1400">
+                <a:solidFill>
+                  <a:srgbClr val="FFFFFF"/>
+                </a:solidFill>
+              </a:defRPr>
+            </a:pPr>
+            <a:r>
+              <a:rPr sz="1400"/>
+              <a:t>Show</a:t>
+            </a:r>
+            <a:br>
+              <a:rPr sz="1400"/>
+            </a:br>
+            <a:r>
+              <a:rPr sz="1400"/>
+              <a:t>Causes</a:t>
+            </a:r>
+          </a:p>
+        </p:txBody>
+      </p:sp>
+      <p:sp>
+        <p:nvSpPr>
+          <p:cNvPr id="12" name="TextBox 11"/>
+          <p:cNvSpPr txBox="1"/>
+          <p:nvPr/>
+        </p:nvSpPr>
+        <p:spPr>
+          <a:xfrm>
+            <a:off x="1775705" y="3182046"/>
+            <a:ext cx="9006349" cy="3539430"/>
+          </a:xfrm>
+          <a:prstGeom prst="rect">
+            <a:avLst/>
+          </a:prstGeom>
+          <a:noFill/>
+        </p:spPr>
+        <p:txBody>
+          <a:bodyPr wrap="square">
+            <a:spAutoFit/>
+          </a:bodyPr>
+          <a:lstStyle/>
+          <a:p>
+            <a:pPr>
+              <a:defRPr sz="2000" b="1">
+                <a:solidFill>
+                  <a:srgbClr val="444444"/>
+                </a:solidFill>
+              </a:defRPr>
+            </a:pPr>
+            <a:r>
+              <a:rPr lang="en-US" sz="2800" dirty="0"/>
+              <a:t>Simple Flow:</a:t>
+            </a:r>
+          </a:p>
+          <a:p>
+            <a:pPr>
+              <a:defRPr sz="2000" b="1">
+                <a:solidFill>
+                  <a:srgbClr val="444444"/>
+                </a:solidFill>
+              </a:defRPr>
+            </a:pPr>
+            <a:endParaRPr lang="en-US" sz="1200" dirty="0"/>
+          </a:p>
+          <a:p>
+            <a:pPr marL="457200" indent="-457200">
+              <a:buAutoNum type="arabicPeriod"/>
+              <a:defRPr sz="2000" b="1">
+                <a:solidFill>
+                  <a:srgbClr val="444444"/>
+                </a:solidFill>
+              </a:defRPr>
+            </a:pPr>
+            <a:r>
+              <a:rPr lang="en-US" sz="2400" dirty="0"/>
+              <a:t>Provide test executable (+ XML for </a:t>
+            </a:r>
+            <a:r>
+              <a:rPr lang="en-US" sz="2400" dirty="0" err="1"/>
+              <a:t>GoogleTest</a:t>
+            </a:r>
+            <a:r>
+              <a:rPr lang="en-US" sz="2400" dirty="0"/>
+              <a:t> projects)</a:t>
+            </a:r>
+          </a:p>
+          <a:p>
+            <a:pPr>
+              <a:defRPr sz="2000" b="1">
+                <a:solidFill>
+                  <a:srgbClr val="444444"/>
+                </a:solidFill>
+              </a:defRPr>
+            </a:pPr>
+            <a:endParaRPr lang="en-US" sz="1000" dirty="0"/>
+          </a:p>
+          <a:p>
+            <a:pPr>
+              <a:defRPr sz="2000" b="1">
+                <a:solidFill>
+                  <a:srgbClr val="444444"/>
+                </a:solidFill>
+              </a:defRPr>
+            </a:pPr>
+            <a:r>
+              <a:rPr lang="en-US" sz="2400" dirty="0"/>
+              <a:t>2. Run tests multiple times</a:t>
+            </a:r>
+          </a:p>
+          <a:p>
+            <a:pPr>
+              <a:defRPr sz="2000" b="1">
+                <a:solidFill>
+                  <a:srgbClr val="444444"/>
+                </a:solidFill>
+              </a:defRPr>
+            </a:pPr>
+            <a:endParaRPr lang="en-US" sz="1000" dirty="0"/>
+          </a:p>
+          <a:p>
+            <a:pPr>
+              <a:defRPr sz="2000" b="1">
+                <a:solidFill>
+                  <a:srgbClr val="444444"/>
+                </a:solidFill>
+              </a:defRPr>
+            </a:pPr>
+            <a:r>
+              <a:rPr lang="en-US" sz="2400" dirty="0"/>
+              <a:t>3. Parse and collect all test results (pass/fail data)</a:t>
+            </a:r>
+          </a:p>
+          <a:p>
+            <a:pPr>
+              <a:defRPr sz="2000" b="1">
+                <a:solidFill>
+                  <a:srgbClr val="444444"/>
+                </a:solidFill>
+              </a:defRPr>
+            </a:pPr>
+            <a:endParaRPr lang="en-US" sz="1000" dirty="0"/>
+          </a:p>
+          <a:p>
+            <a:pPr>
+              <a:defRPr sz="2000" b="1">
+                <a:solidFill>
+                  <a:srgbClr val="444444"/>
+                </a:solidFill>
+              </a:defRPr>
+            </a:pPr>
+            <a:r>
+              <a:rPr lang="en-US" sz="2400" dirty="0"/>
+              <a:t>4. Analyze code and results to identify flaky tests (static + dynamic analysis)</a:t>
+            </a:r>
+          </a:p>
+          <a:p>
+            <a:pPr>
+              <a:defRPr sz="2000" b="1">
+                <a:solidFill>
+                  <a:srgbClr val="444444"/>
+                </a:solidFill>
+              </a:defRPr>
+            </a:pPr>
+            <a:endParaRPr lang="en-US" sz="1000" dirty="0"/>
+          </a:p>
+          <a:p>
+            <a:pPr>
+              <a:defRPr sz="2000" b="1">
+                <a:solidFill>
+                  <a:srgbClr val="444444"/>
+                </a:solidFill>
+              </a:defRPr>
+            </a:pPr>
+            <a:r>
+              <a:rPr lang="en-US" sz="2400" dirty="0"/>
+              <a:t>5. Generate easy-to-read reports with explanations</a:t>
+            </a:r>
+            <a:endParaRPr sz="2400" dirty="0"/>
+          </a:p>
+        </p:txBody>
+      </p:sp>
+      <p:sp>
+        <p:nvSpPr>
+          <p:cNvPr id="13" name="Slide Number Placeholder 12">
+            <a:extLst>
+              <a:ext uri="{FF2B5EF4-FFF2-40B4-BE49-F238E27FC236}">
+                <a16:creationId xmlns:a16="http://schemas.microsoft.com/office/drawing/2014/main" id="{FEBAF5F9-E3F6-2902-64E6-206659E88F8B}"/>
+              </a:ext>
+            </a:extLst>
+          </p:cNvPr>
+          <p:cNvSpPr>
+            <a:spLocks noGrp="1"/>
+          </p:cNvSpPr>
+          <p:nvPr>
+            <p:ph type="sldNum" sz="quarter" idx="12"/>
+          </p:nvPr>
+        </p:nvSpPr>
+        <p:spPr/>
+        <p:txBody>
+          <a:bodyPr/>
+          <a:lstStyle/>
+          <a:p>
+            <a:fld id="{C1FF6DA9-008F-8B48-92A6-B652298478BF}" type="slidenum">
+              <a:rPr lang="en-US" smtClean="0"/>
+              <a:t>4</a:t>
+            </a:fld>
+            <a:endParaRPr lang="en-US"/>
+          </a:p>
+        </p:txBody>
+      </p:sp>
+    </p:spTree>
+  </p:cSld>
+  <p:clrMapOvr>
+    <a:masterClrMapping/>
+  </p:clrMapOvr>
+</p:sld>
+</file>
+
+<file path=ppt/slides/slide5.xml><?xml version="1.0" encoding="utf-8"?>
+<p:sld xmlns:a="http://schemas.openxmlformats.org/drawingml/2006/main" xmlns:r="http://schemas.openxmlformats.org/officeDocument/2006/relationships" xmlns:p="http://schemas.openxmlformats.org/presentationml/2006/main">
+  <p:cSld>
+    <p:spTree>
+      <p:nvGrpSpPr>
+        <p:cNvPr id="1" name=""/>
+        <p:cNvGrpSpPr/>
+        <p:nvPr/>
+      </p:nvGrpSpPr>
+      <p:grpSpPr>
+        <a:xfrm>
+          <a:off x="0" y="0"/>
+          <a:ext cx="0" cy="0"/>
+          <a:chOff x="0" y="0"/>
+          <a:chExt cx="0" cy="0"/>
+        </a:xfrm>
+      </p:grpSpPr>
+      <p:sp>
+        <p:nvSpPr>
+          <p:cNvPr id="2" name="TextBox 1"/>
+          <p:cNvSpPr txBox="1"/>
+          <p:nvPr/>
+        </p:nvSpPr>
+        <p:spPr>
+          <a:xfrm>
+            <a:off x="3937845" y="274321"/>
+            <a:ext cx="4316311" cy="769441"/>
+          </a:xfrm>
+          <a:prstGeom prst="rect">
+            <a:avLst/>
+          </a:prstGeom>
+          <a:noFill/>
+        </p:spPr>
+        <p:txBody>
+          <a:bodyPr wrap="none">
+            <a:spAutoFit/>
+          </a:bodyPr>
+          <a:lstStyle/>
+          <a:p>
+            <a:pPr algn="ctr">
+              <a:defRPr sz="4400" b="1">
+                <a:solidFill>
+                  <a:srgbClr val="5CB85C"/>
+                </a:solidFill>
+              </a:defRPr>
+            </a:pPr>
+            <a:r>
+              <a:rPr sz="4400" dirty="0"/>
+              <a:t>What I</a:t>
+            </a:r>
+            <a:r>
+              <a:rPr lang="en-US" sz="4400" dirty="0"/>
+              <a:t> have done</a:t>
+            </a:r>
+            <a:endParaRPr sz="4400" dirty="0"/>
+          </a:p>
+        </p:txBody>
+      </p:sp>
+      <p:sp>
+        <p:nvSpPr>
+          <p:cNvPr id="3" name="TextBox 2"/>
+          <p:cNvSpPr txBox="1"/>
+          <p:nvPr/>
+        </p:nvSpPr>
+        <p:spPr>
+          <a:xfrm>
+            <a:off x="1868129" y="1218217"/>
+            <a:ext cx="9360310" cy="5232202"/>
+          </a:xfrm>
+          <a:prstGeom prst="rect">
+            <a:avLst/>
+          </a:prstGeom>
+          <a:noFill/>
+        </p:spPr>
+        <p:txBody>
+          <a:bodyPr wrap="square">
+            <a:spAutoFit/>
+          </a:bodyPr>
+          <a:lstStyle/>
+          <a:p>
+            <a:r>
+              <a:rPr lang="en-US" sz="2400" b="1" dirty="0"/>
+              <a:t>Test Runner</a:t>
+            </a:r>
+            <a:endParaRPr lang="en-US" sz="2400" dirty="0"/>
+          </a:p>
+          <a:p>
+            <a:pPr marL="742950" lvl="1" indent="-285750">
+              <a:buFont typeface="Arial" panose="020B0604020202020204" pitchFamily="34" charset="0"/>
+              <a:buChar char="•"/>
+            </a:pPr>
+            <a:r>
+              <a:rPr lang="en-US" sz="2200" dirty="0"/>
+              <a:t>Runs tests N times, captures results</a:t>
+            </a:r>
+          </a:p>
+          <a:p>
+            <a:pPr marL="742950" lvl="1" indent="-285750">
+              <a:buFont typeface="Arial" panose="020B0604020202020204" pitchFamily="34" charset="0"/>
+              <a:buChar char="•"/>
+            </a:pPr>
+            <a:r>
+              <a:rPr lang="en-US" sz="2200" dirty="0"/>
+              <a:t>Aggregates pass/fail data</a:t>
+            </a:r>
+          </a:p>
+          <a:p>
+            <a:pPr marL="742950" lvl="1" indent="-285750">
+              <a:buFont typeface="Arial" panose="020B0604020202020204" pitchFamily="34" charset="0"/>
+              <a:buChar char="•"/>
+            </a:pPr>
+            <a:endParaRPr lang="en-US" dirty="0"/>
+          </a:p>
+          <a:p>
+            <a:r>
+              <a:rPr lang="en-US" sz="2400" b="1" dirty="0"/>
+              <a:t>Flakiness Calculator</a:t>
+            </a:r>
+            <a:endParaRPr lang="en-US" sz="2400" dirty="0"/>
+          </a:p>
+          <a:p>
+            <a:pPr marL="742950" lvl="1" indent="-285750">
+              <a:buFont typeface="Arial" panose="020B0604020202020204" pitchFamily="34" charset="0"/>
+              <a:buChar char="•"/>
+            </a:pPr>
+            <a:r>
+              <a:rPr lang="en-US" sz="2200" dirty="0"/>
+              <a:t>Wilson confidence interval (95%)</a:t>
+            </a:r>
+          </a:p>
+          <a:p>
+            <a:pPr marL="742950" lvl="1" indent="-285750">
+              <a:buFont typeface="Arial" panose="020B0604020202020204" pitchFamily="34" charset="0"/>
+              <a:buChar char="•"/>
+            </a:pPr>
+            <a:r>
+              <a:rPr lang="en-US" sz="2200" dirty="0"/>
+              <a:t>Categorizes: stable, </a:t>
+            </a:r>
+            <a:r>
+              <a:rPr lang="en-US" sz="2200" dirty="0" err="1"/>
+              <a:t>mildly_flaky</a:t>
+            </a:r>
+            <a:r>
+              <a:rPr lang="en-US" sz="2200" dirty="0"/>
+              <a:t>, </a:t>
+            </a:r>
+            <a:r>
+              <a:rPr lang="en-US" sz="2200" dirty="0" err="1"/>
+              <a:t>highly_flaky</a:t>
+            </a:r>
+            <a:r>
+              <a:rPr lang="en-US" sz="2200" dirty="0"/>
+              <a:t>, </a:t>
+            </a:r>
+            <a:r>
+              <a:rPr lang="en-US" sz="2200" dirty="0" err="1"/>
+              <a:t>always_failing</a:t>
+            </a:r>
+            <a:endParaRPr lang="en-US" sz="2200" dirty="0"/>
+          </a:p>
+          <a:p>
+            <a:pPr lvl="1"/>
+            <a:endParaRPr lang="en-US" sz="2200" dirty="0"/>
+          </a:p>
+          <a:p>
+            <a:r>
+              <a:rPr lang="en-US" sz="2400" b="1" dirty="0"/>
+              <a:t>Report Generator</a:t>
+            </a:r>
+            <a:endParaRPr lang="en-US" sz="2400" dirty="0"/>
+          </a:p>
+          <a:p>
+            <a:pPr marL="800100" lvl="1" indent="-342900">
+              <a:buFont typeface="Arial" panose="020B0604020202020204" pitchFamily="34" charset="0"/>
+              <a:buChar char="•"/>
+            </a:pPr>
+            <a:r>
+              <a:rPr lang="en-US" sz="2200" dirty="0"/>
+              <a:t>Formats text reports with statistics</a:t>
+            </a:r>
+          </a:p>
+          <a:p>
+            <a:pPr marL="800100" lvl="1" indent="-342900">
+              <a:buFont typeface="Arial" panose="020B0604020202020204" pitchFamily="34" charset="0"/>
+              <a:buChar char="•"/>
+            </a:pPr>
+            <a:r>
+              <a:rPr lang="en-US" sz="2200" dirty="0"/>
+              <a:t>Displays Wilson scores</a:t>
+            </a:r>
+          </a:p>
+          <a:p>
+            <a:pPr lvl="1"/>
+            <a:endParaRPr lang="en-US" sz="2200" dirty="0"/>
+          </a:p>
+          <a:p>
+            <a:r>
+              <a:rPr lang="en-US" sz="2400" b="1" dirty="0"/>
+              <a:t>Demo Test Suite</a:t>
+            </a:r>
+            <a:endParaRPr lang="en-US" sz="2400" dirty="0"/>
+          </a:p>
+          <a:p>
+            <a:pPr marL="800100" lvl="1" indent="-342900">
+              <a:buFont typeface="Arial" panose="020B0604020202020204" pitchFamily="34" charset="0"/>
+              <a:buChar char="•"/>
+            </a:pPr>
+            <a:r>
+              <a:rPr lang="en-US" sz="2200" dirty="0"/>
+              <a:t>2 stable + 2 flaky tests</a:t>
+            </a:r>
+          </a:p>
+          <a:p>
+            <a:pPr marL="800100" lvl="1" indent="-342900">
+              <a:buFont typeface="Arial" panose="020B0604020202020204" pitchFamily="34" charset="0"/>
+              <a:buChar char="•"/>
+            </a:pPr>
+            <a:r>
+              <a:rPr lang="en-US" sz="2200" dirty="0"/>
+              <a:t>Proves detection works</a:t>
+            </a:r>
+          </a:p>
+        </p:txBody>
+      </p:sp>
+      <p:sp>
+        <p:nvSpPr>
+          <p:cNvPr id="4" name="Slide Number Placeholder 3">
+            <a:extLst>
+              <a:ext uri="{FF2B5EF4-FFF2-40B4-BE49-F238E27FC236}">
+                <a16:creationId xmlns:a16="http://schemas.microsoft.com/office/drawing/2014/main" id="{3D66AA60-7CF6-818D-29EA-379E1021198C}"/>
+              </a:ext>
+            </a:extLst>
+          </p:cNvPr>
+          <p:cNvSpPr>
+            <a:spLocks noGrp="1"/>
+          </p:cNvSpPr>
+          <p:nvPr>
+            <p:ph type="sldNum" sz="quarter" idx="12"/>
+          </p:nvPr>
+        </p:nvSpPr>
+        <p:spPr/>
+        <p:txBody>
+          <a:bodyPr/>
+          <a:lstStyle/>
+          <a:p>
+            <a:fld id="{C1FF6DA9-008F-8B48-92A6-B652298478BF}" type="slidenum">
+              <a:rPr lang="en-US" smtClean="0"/>
+              <a:t>5</a:t>
+            </a:fld>
+            <a:endParaRPr lang="en-US"/>
+          </a:p>
+        </p:txBody>
+      </p:sp>
+    </p:spTree>
+  </p:cSld>
+  <p:clrMapOvr>
+    <a:masterClrMapping/>
+  </p:clrMapOvr>
+</p:sld>
+</file>
+
+<file path=ppt/slides/slide6.xml><?xml version="1.0" encoding="utf-8"?>
+<p:sld xmlns:a="http://schemas.openxmlformats.org/drawingml/2006/main" xmlns:r="http://schemas.openxmlformats.org/officeDocument/2006/relationships" xmlns:p="http://schemas.openxmlformats.org/presentationml/2006/main">
+  <p:cSld>
+    <p:bg>
+      <p:bgPr>
+        <a:solidFill>
+          <a:schemeClr val="bg1"/>
+        </a:solidFill>
+        <a:effectLst/>
+      </p:bgPr>
+    </p:bg>
+    <p:spTree>
+      <p:nvGrpSpPr>
+        <p:cNvPr id="1" name=""/>
+        <p:cNvGrpSpPr/>
+        <p:nvPr/>
+      </p:nvGrpSpPr>
+      <p:grpSpPr>
+        <a:xfrm>
+          <a:off x="0" y="0"/>
+          <a:ext cx="0" cy="0"/>
+          <a:chOff x="0" y="0"/>
+          <a:chExt cx="0" cy="0"/>
+        </a:xfrm>
+      </p:grpSpPr>
+      <p:sp>
+        <p:nvSpPr>
+          <p:cNvPr id="11" name="Down Arrow 7">
+            <a:extLst>
+              <a:ext uri="{FF2B5EF4-FFF2-40B4-BE49-F238E27FC236}">
+                <a16:creationId xmlns:a16="http://schemas.microsoft.com/office/drawing/2014/main" id="{D4771268-CB57-404A-9271-370EB28F6090}"/>
+              </a:ext>
+              <a:ext uri="{C183D7F6-B498-43B3-948B-1728B52AA6E4}">
+                <adec:decorative xmlns:adec="http://schemas.microsoft.com/office/drawing/2017/decorative" val="1"/>
+              </a:ext>
+            </a:extLst>
+          </p:cNvPr>
+          <p:cNvSpPr>
+            <a:spLocks noGrp="1" noRot="1" noChangeAspect="1" noMove="1" noResize="1" noEditPoints="1" noAdjustHandles="1" noChangeArrowheads="1" noChangeShapeType="1" noTextEdit="1"/>
+          </p:cNvSpPr>
+          <p:nvPr>
+            <p:extLst>
+              <p:ext uri="{386F3935-93C4-4BCD-93E2-E3B085C9AB24}">
+                <p16:designElem xmlns:p16="http://schemas.microsoft.com/office/powerpoint/2015/main" val="1"/>
+              </p:ext>
+            </p:extLst>
+          </p:nvPr>
+        </p:nvSpPr>
+        <p:spPr>
+          <a:xfrm rot="16200000">
+            <a:off x="800100" y="1491343"/>
+            <a:ext cx="3333749" cy="3499103"/>
+          </a:xfrm>
+          <a:prstGeom prst="downArrow">
+            <a:avLst>
+              <a:gd name="adj1" fmla="val 100000"/>
+              <a:gd name="adj2" fmla="val 15788"/>
+            </a:avLst>
+          </a:prstGeom>
+          <a:solidFill>
+            <a:srgbClr val="404040"/>
+          </a:solidFill>
+          <a:ln w="53975">
+            <a:noFill/>
+          </a:ln>
+        </p:spPr>
+        <p:style>
+          <a:lnRef idx="2">
+            <a:schemeClr val="accent1">
+              <a:shade val="50000"/>
+            </a:schemeClr>
+          </a:lnRef>
+          <a:fillRef idx="1">
+            <a:schemeClr val="accent1"/>
+          </a:fillRef>
+          <a:effectRef idx="0">
+            <a:schemeClr val="accent1"/>
+          </a:effectRef>
+          <a:fontRef idx="minor">
+            <a:schemeClr val="lt1"/>
+          </a:fontRef>
+        </p:style>
+        <p:txBody>
+          <a:bodyPr rtlCol="0" anchor="ctr"/>
+          <a:lstStyle/>
+          <a:p>
+            <a:pPr algn="ctr"/>
+            <a:endParaRPr lang="en-US"/>
+          </a:p>
+        </p:txBody>
+      </p:sp>
+      <p:sp>
+        <p:nvSpPr>
+          <p:cNvPr id="2" name="TextBox 1"/>
+          <p:cNvSpPr txBox="1"/>
+          <p:nvPr/>
+        </p:nvSpPr>
+        <p:spPr>
+          <a:xfrm>
+            <a:off x="1028700" y="1967266"/>
+            <a:ext cx="2628900" cy="2547257"/>
+          </a:xfrm>
+          <a:prstGeom prst="rect">
+            <a:avLst/>
+          </a:prstGeom>
+          <a:noFill/>
+        </p:spPr>
+        <p:txBody>
+          <a:bodyPr vert="horz" lIns="91440" tIns="45720" rIns="91440" bIns="45720" rtlCol="0" anchor="ctr">
+            <a:normAutofit/>
+          </a:bodyPr>
+          <a:lstStyle/>
+          <a:p>
+            <a:pPr algn="ctr" defTabSz="914400">
+              <a:lnSpc>
+                <a:spcPct val="90000"/>
+              </a:lnSpc>
+              <a:spcBef>
+                <a:spcPct val="0"/>
+              </a:spcBef>
+              <a:spcAft>
+                <a:spcPts val="600"/>
+              </a:spcAft>
+              <a:defRPr sz="4400" b="1">
+                <a:solidFill>
+                  <a:srgbClr val="5CB85C"/>
+                </a:solidFill>
+              </a:defRPr>
+            </a:pPr>
+            <a:r>
+              <a:rPr lang="en-US" sz="3600" kern="1200">
+                <a:solidFill>
+                  <a:srgbClr val="FFFFFF"/>
+                </a:solidFill>
+                <a:latin typeface="+mj-lt"/>
+                <a:ea typeface="+mj-ea"/>
+                <a:cs typeface="+mj-cs"/>
+              </a:rPr>
+              <a:t>Demo Output</a:t>
+            </a:r>
+            <a:endParaRPr lang="en-US" sz="3600" kern="1200" dirty="0">
+              <a:solidFill>
+                <a:srgbClr val="FFFFFF"/>
+              </a:solidFill>
+              <a:latin typeface="+mj-lt"/>
+              <a:ea typeface="+mj-ea"/>
+              <a:cs typeface="+mj-cs"/>
+            </a:endParaRPr>
+          </a:p>
+        </p:txBody>
+      </p:sp>
+      <p:sp>
+        <p:nvSpPr>
+          <p:cNvPr id="4" name="Slide Number Placeholder 3">
+            <a:extLst>
+              <a:ext uri="{FF2B5EF4-FFF2-40B4-BE49-F238E27FC236}">
+                <a16:creationId xmlns:a16="http://schemas.microsoft.com/office/drawing/2014/main" id="{3CB9B738-CE54-DCFC-A1D1-93C1EA03770F}"/>
+              </a:ext>
+            </a:extLst>
+          </p:cNvPr>
+          <p:cNvSpPr>
+            <a:spLocks noGrp="1"/>
+          </p:cNvSpPr>
+          <p:nvPr>
+            <p:ph type="sldNum" sz="quarter" idx="12"/>
+          </p:nvPr>
+        </p:nvSpPr>
+        <p:spPr>
+          <a:xfrm>
+            <a:off x="11034184" y="6356350"/>
+            <a:ext cx="514349" cy="365125"/>
+          </a:xfrm>
+        </p:spPr>
+        <p:txBody>
+          <a:bodyPr vert="horz" lIns="91440" tIns="45720" rIns="91440" bIns="45720" rtlCol="0" anchor="ctr">
+            <a:normAutofit/>
+          </a:bodyPr>
+          <a:lstStyle/>
+          <a:p>
+            <a:pPr defTabSz="914400">
+              <a:spcAft>
+                <a:spcPts val="600"/>
+              </a:spcAft>
+            </a:pPr>
+            <a:fld id="{C1FF6DA9-008F-8B48-92A6-B652298478BF}" type="slidenum">
+              <a:rPr lang="en-US" smtClean="0">
+                <a:solidFill>
+                  <a:schemeClr val="tx1">
+                    <a:alpha val="80000"/>
+                  </a:schemeClr>
+                </a:solidFill>
+              </a:rPr>
+              <a:pPr defTabSz="914400">
+                <a:spcAft>
+                  <a:spcPts val="600"/>
+                </a:spcAft>
+              </a:pPr>
+              <a:t>6</a:t>
+            </a:fld>
+            <a:endParaRPr lang="en-US">
+              <a:solidFill>
+                <a:schemeClr val="tx1">
+                  <a:alpha val="80000"/>
+                </a:schemeClr>
+              </a:solidFill>
+            </a:endParaRPr>
+          </a:p>
+        </p:txBody>
+      </p:sp>
+      <p:pic>
+        <p:nvPicPr>
+          <p:cNvPr id="8" name="Picture 7">
+            <a:extLst>
+              <a:ext uri="{FF2B5EF4-FFF2-40B4-BE49-F238E27FC236}">
+                <a16:creationId xmlns:a16="http://schemas.microsoft.com/office/drawing/2014/main" id="{969180A6-8EB4-083C-A5CA-90372811DF77}"/>
+              </a:ext>
+            </a:extLst>
+          </p:cNvPr>
+          <p:cNvPicPr>
+            <a:picLocks noChangeAspect="1"/>
+          </p:cNvPicPr>
+          <p:nvPr/>
+        </p:nvPicPr>
+        <p:blipFill>
+          <a:blip r:embed="rId2"/>
+          <a:stretch>
+            <a:fillRect/>
+          </a:stretch>
+        </p:blipFill>
+        <p:spPr>
+          <a:xfrm>
+            <a:off x="4286865" y="0"/>
+            <a:ext cx="3256163" cy="6858000"/>
+          </a:xfrm>
+          <a:prstGeom prst="rect">
+            <a:avLst/>
+          </a:prstGeom>
+        </p:spPr>
+      </p:pic>
+      <p:pic>
+        <p:nvPicPr>
+          <p:cNvPr id="10" name="Picture 9">
+            <a:extLst>
+              <a:ext uri="{FF2B5EF4-FFF2-40B4-BE49-F238E27FC236}">
+                <a16:creationId xmlns:a16="http://schemas.microsoft.com/office/drawing/2014/main" id="{9FF9AD06-4B24-5FAB-A007-805764D15FEA}"/>
+              </a:ext>
+            </a:extLst>
+          </p:cNvPr>
+          <p:cNvPicPr>
+            <a:picLocks noChangeAspect="1"/>
+          </p:cNvPicPr>
+          <p:nvPr/>
+        </p:nvPicPr>
+        <p:blipFill>
+          <a:blip r:embed="rId3"/>
+          <a:stretch>
+            <a:fillRect/>
+          </a:stretch>
+        </p:blipFill>
+        <p:spPr>
+          <a:xfrm>
+            <a:off x="7543028" y="0"/>
+            <a:ext cx="4677882" cy="6858000"/>
+          </a:xfrm>
+          <a:prstGeom prst="rect">
+            <a:avLst/>
+          </a:prstGeom>
+        </p:spPr>
+      </p:pic>
+    </p:spTree>
+  </p:cSld>
+  <p:clrMapOvr>
+    <a:masterClrMapping/>
+  </p:clrMapOvr>
+</p:sld>
+</file>
+
+<file path=ppt/slides/slide7.xml><?xml version="1.0" encoding="utf-8"?>
+<p:sld xmlns:a="http://schemas.openxmlformats.org/drawingml/2006/main" xmlns:r="http://schemas.openxmlformats.org/officeDocument/2006/relationships" xmlns:p="http://schemas.openxmlformats.org/presentationml/2006/main">
+  <p:cSld>
+    <p:spTree>
+      <p:nvGrpSpPr>
+        <p:cNvPr id="1" name=""/>
+        <p:cNvGrpSpPr/>
+        <p:nvPr/>
+      </p:nvGrpSpPr>
+      <p:grpSpPr>
+        <a:xfrm>
+          <a:off x="0" y="0"/>
+          <a:ext cx="0" cy="0"/>
+          <a:chOff x="0" y="0"/>
+          <a:chExt cx="0" cy="0"/>
+        </a:xfrm>
+      </p:grpSpPr>
+      <p:sp>
+        <p:nvSpPr>
+          <p:cNvPr id="2" name="TextBox 1"/>
+          <p:cNvSpPr txBox="1"/>
+          <p:nvPr/>
+        </p:nvSpPr>
+        <p:spPr>
+          <a:xfrm>
+            <a:off x="4569876" y="48179"/>
+            <a:ext cx="3052247" cy="769441"/>
+          </a:xfrm>
+          <a:prstGeom prst="rect">
+            <a:avLst/>
+          </a:prstGeom>
+          <a:noFill/>
+        </p:spPr>
+        <p:txBody>
+          <a:bodyPr wrap="none">
+            <a:spAutoFit/>
+          </a:bodyPr>
+          <a:lstStyle/>
+          <a:p>
+            <a:pPr algn="ctr">
+              <a:defRPr sz="4400" b="1">
+                <a:solidFill>
+                  <a:srgbClr val="5CB85C"/>
+                </a:solidFill>
+              </a:defRPr>
+            </a:pPr>
+            <a:r>
+              <a:rPr lang="en-US" sz="4400" dirty="0"/>
+              <a:t>What’s Next</a:t>
+            </a:r>
+            <a:endParaRPr sz="4400" dirty="0"/>
+          </a:p>
+        </p:txBody>
+      </p:sp>
+      <p:sp>
+        <p:nvSpPr>
+          <p:cNvPr id="3" name="TextBox 2"/>
+          <p:cNvSpPr txBox="1"/>
+          <p:nvPr/>
+        </p:nvSpPr>
+        <p:spPr>
+          <a:xfrm>
+            <a:off x="1710607" y="868367"/>
+            <a:ext cx="8196170" cy="5232202"/>
+          </a:xfrm>
+          <a:prstGeom prst="rect">
+            <a:avLst/>
+          </a:prstGeom>
+          <a:noFill/>
+        </p:spPr>
+        <p:txBody>
+          <a:bodyPr wrap="square">
+            <a:spAutoFit/>
+          </a:bodyPr>
+          <a:lstStyle/>
+          <a:p>
+            <a:r>
+              <a:rPr lang="en-US" sz="2400" b="1" dirty="0"/>
+              <a:t>XML Parser</a:t>
+            </a:r>
+            <a:endParaRPr lang="en-US" sz="2400" dirty="0"/>
+          </a:p>
+          <a:p>
+            <a:pPr marL="742950" lvl="1" indent="-285750">
+              <a:buFont typeface="Arial" panose="020B0604020202020204" pitchFamily="34" charset="0"/>
+              <a:buChar char="•"/>
+            </a:pPr>
+            <a:r>
+              <a:rPr lang="en-US" sz="2200" dirty="0"/>
+              <a:t>Parse </a:t>
+            </a:r>
+            <a:r>
+              <a:rPr lang="en-US" sz="2200" dirty="0" err="1"/>
+              <a:t>GoogleTest</a:t>
+            </a:r>
+            <a:r>
+              <a:rPr lang="en-US" sz="2200" dirty="0"/>
+              <a:t> XML output for real project (e.g., abseil-</a:t>
+            </a:r>
+            <a:r>
+              <a:rPr lang="en-US" sz="2200" dirty="0" err="1"/>
+              <a:t>cpp</a:t>
+            </a:r>
+            <a:r>
+              <a:rPr lang="en-US" sz="2200" dirty="0"/>
+              <a:t>)</a:t>
+            </a:r>
+          </a:p>
+          <a:p>
+            <a:pPr marL="742950" lvl="1" indent="-285750">
+              <a:buFont typeface="Arial" panose="020B0604020202020204" pitchFamily="34" charset="0"/>
+              <a:buChar char="•"/>
+            </a:pPr>
+            <a:r>
+              <a:rPr lang="en-US" sz="2200" dirty="0"/>
+              <a:t>Extract test names, status, timing data</a:t>
+            </a:r>
+          </a:p>
+          <a:p>
+            <a:pPr marL="742950" lvl="1" indent="-285750">
+              <a:buFont typeface="Arial" panose="020B0604020202020204" pitchFamily="34" charset="0"/>
+              <a:buChar char="•"/>
+            </a:pPr>
+            <a:endParaRPr lang="en-US" dirty="0"/>
+          </a:p>
+          <a:p>
+            <a:r>
+              <a:rPr lang="en-US" sz="2400" b="1" dirty="0"/>
+              <a:t>Static Code Analysis</a:t>
+            </a:r>
+            <a:endParaRPr lang="en-US" sz="2400" dirty="0"/>
+          </a:p>
+          <a:p>
+            <a:pPr marL="742950" lvl="1" indent="-285750">
+              <a:buFont typeface="Arial" panose="020B0604020202020204" pitchFamily="34" charset="0"/>
+              <a:buChar char="•"/>
+            </a:pPr>
+            <a:r>
+              <a:rPr lang="en-US" sz="2200" dirty="0"/>
+              <a:t>Build Lexer → AST → CFG pipeline</a:t>
+            </a:r>
+          </a:p>
+          <a:p>
+            <a:pPr marL="742950" lvl="1" indent="-285750">
+              <a:buFont typeface="Arial" panose="020B0604020202020204" pitchFamily="34" charset="0"/>
+              <a:buChar char="•"/>
+            </a:pPr>
+            <a:r>
+              <a:rPr lang="en-US" sz="2200" dirty="0"/>
+              <a:t> Analyze both test code and production code</a:t>
+            </a:r>
+          </a:p>
+          <a:p>
+            <a:pPr lvl="1"/>
+            <a:endParaRPr lang="en-US" sz="2200" dirty="0"/>
+          </a:p>
+          <a:p>
+            <a:r>
+              <a:rPr lang="en-US" sz="2400" b="1" dirty="0"/>
+              <a:t>Machine Learning</a:t>
+            </a:r>
+            <a:endParaRPr lang="en-US" sz="2400" dirty="0"/>
+          </a:p>
+          <a:p>
+            <a:pPr marL="800100" lvl="1" indent="-342900">
+              <a:buFont typeface="Arial" panose="020B0604020202020204" pitchFamily="34" charset="0"/>
+              <a:buChar char="•"/>
+            </a:pPr>
+            <a:r>
+              <a:rPr lang="en-US" sz="2200" dirty="0"/>
+              <a:t>Logistic regression with Stochastic Gradient Descent</a:t>
+            </a:r>
+          </a:p>
+          <a:p>
+            <a:pPr marL="800100" lvl="1" indent="-342900">
+              <a:buFont typeface="Arial" panose="020B0604020202020204" pitchFamily="34" charset="0"/>
+              <a:buChar char="•"/>
+            </a:pPr>
+            <a:r>
+              <a:rPr lang="en-US" sz="2200" dirty="0"/>
+              <a:t>Train on static+ dynamic features</a:t>
+            </a:r>
+          </a:p>
+          <a:p>
+            <a:pPr marL="800100" lvl="1" indent="-342900">
+              <a:buFont typeface="Arial" panose="020B0604020202020204" pitchFamily="34" charset="0"/>
+              <a:buChar char="•"/>
+            </a:pPr>
+            <a:r>
+              <a:rPr lang="en-US" sz="2200" dirty="0"/>
+              <a:t>Predict flakiness before running tests</a:t>
+            </a:r>
+          </a:p>
+          <a:p>
+            <a:pPr lvl="1"/>
+            <a:endParaRPr lang="en-US" sz="2200" dirty="0"/>
+          </a:p>
+          <a:p>
+            <a:r>
+              <a:rPr lang="en-US" sz="2400" b="1" dirty="0"/>
+              <a:t>Root Cause Explanation</a:t>
+            </a:r>
+            <a:endParaRPr lang="en-US" sz="2400" dirty="0"/>
+          </a:p>
+          <a:p>
+            <a:pPr marL="800100" lvl="1" indent="-342900">
+              <a:buFont typeface="Arial" panose="020B0604020202020204" pitchFamily="34" charset="0"/>
+              <a:buChar char="•"/>
+            </a:pPr>
+            <a:r>
+              <a:rPr lang="en-US" sz="2200" dirty="0"/>
+              <a:t>Correlate dynamic failure with static patterns</a:t>
+            </a:r>
+          </a:p>
+        </p:txBody>
+      </p:sp>
+      <p:sp>
+        <p:nvSpPr>
+          <p:cNvPr id="4" name="Slide Number Placeholder 3">
+            <a:extLst>
+              <a:ext uri="{FF2B5EF4-FFF2-40B4-BE49-F238E27FC236}">
+                <a16:creationId xmlns:a16="http://schemas.microsoft.com/office/drawing/2014/main" id="{96D883FF-94EA-B78F-3FE6-9F96A41D2736}"/>
+              </a:ext>
+            </a:extLst>
+          </p:cNvPr>
+          <p:cNvSpPr>
+            <a:spLocks noGrp="1"/>
+          </p:cNvSpPr>
+          <p:nvPr>
+            <p:ph type="sldNum" sz="quarter" idx="12"/>
+          </p:nvPr>
+        </p:nvSpPr>
+        <p:spPr/>
+        <p:txBody>
+          <a:bodyPr/>
+          <a:lstStyle/>
+          <a:p>
+            <a:fld id="{C1FF6DA9-008F-8B48-92A6-B652298478BF}" type="slidenum">
+              <a:rPr lang="en-US" smtClean="0"/>
+              <a:t>7</a:t>
+            </a:fld>
+            <a:endParaRPr lang="en-US"/>
+          </a:p>
+        </p:txBody>
+      </p:sp>
+    </p:spTree>
+  </p:cSld>
+  <p:clrMapOvr>
+    <a:masterClrMapping/>
+  </p:clrMapOvr>
+</p:sld>
+</file>
+
+<file path=ppt/slides/slide8.xml><?xml version="1.0" encoding="utf-8"?>
+<p:sld xmlns:a="http://schemas.openxmlformats.org/drawingml/2006/main" xmlns:r="http://schemas.openxmlformats.org/officeDocument/2006/relationships" xmlns:p="http://schemas.openxmlformats.org/presentationml/2006/main">
+  <p:cSld>
+    <p:spTree>
+      <p:nvGrpSpPr>
+        <p:cNvPr id="1" name=""/>
+        <p:cNvGrpSpPr/>
+        <p:nvPr/>
+      </p:nvGrpSpPr>
+      <p:grpSpPr>
+        <a:xfrm>
+          <a:off x="0" y="0"/>
+          <a:ext cx="0" cy="0"/>
+          <a:chOff x="0" y="0"/>
+          <a:chExt cx="0" cy="0"/>
+        </a:xfrm>
+      </p:grpSpPr>
+      <p:sp>
+        <p:nvSpPr>
+          <p:cNvPr id="2" name="TextBox 1"/>
+          <p:cNvSpPr txBox="1"/>
+          <p:nvPr/>
+        </p:nvSpPr>
+        <p:spPr>
+          <a:xfrm>
+            <a:off x="2953475" y="274321"/>
+            <a:ext cx="6285054" cy="769441"/>
+          </a:xfrm>
+          <a:prstGeom prst="rect">
+            <a:avLst/>
+          </a:prstGeom>
+          <a:noFill/>
+        </p:spPr>
+        <p:txBody>
+          <a:bodyPr wrap="none">
+            <a:spAutoFit/>
+          </a:bodyPr>
+          <a:lstStyle/>
+          <a:p>
+            <a:pPr algn="ctr">
+              <a:defRPr sz="4400" b="1">
+                <a:solidFill>
+                  <a:srgbClr val="1F4E79"/>
+                </a:solidFill>
+              </a:defRPr>
+            </a:pPr>
+            <a:r>
               <a:rPr sz="4400" dirty="0"/>
               <a:t>What </a:t>
             </a:r>
@@ -3289,8 +6041,13 @@
             </a:r>
             <a:r>
               <a:rPr sz="4400" dirty="0"/>
-              <a:t> Tool Detects</a:t>
-            </a:r>
+              <a:t> Tool </a:t>
+            </a:r>
+            <a:r>
+              <a:rPr lang="en-US" sz="4400" dirty="0"/>
+              <a:t>Will Detect</a:t>
+            </a:r>
+            <a:endParaRPr sz="4400" dirty="0"/>
           </a:p>
         </p:txBody>
       </p:sp>
@@ -3696,39 +6453,20 @@
           </a:p>
         </p:txBody>
       </p:sp>
-    </p:spTree>
-  </p:cSld>
-  <p:clrMapOvr>
-    <a:masterClrMapping/>
-  </p:clrMapOvr>
-</p:sld>
-</file>
-
-<file path=ppt/slides/slide11.xml><?xml version="1.0" encoding="utf-8"?>
-<p:sld xmlns:a="http://schemas.openxmlformats.org/drawingml/2006/main" xmlns:r="http://schemas.openxmlformats.org/officeDocument/2006/relationships" xmlns:p="http://schemas.openxmlformats.org/presentationml/2006/main">
-  <p:cSld>
-    <p:spTree>
-      <p:nvGrpSpPr>
-        <p:cNvPr id="1" name=""/>
-        <p:cNvGrpSpPr/>
-        <p:nvPr/>
-      </p:nvGrpSpPr>
-      <p:grpSpPr>
-        <a:xfrm>
-          <a:off x="0" y="0"/>
-          <a:ext cx="0" cy="0"/>
-          <a:chOff x="0" y="0"/>
-          <a:chExt cx="0" cy="0"/>
-        </a:xfrm>
-      </p:grpSpPr>
-      <p:sp>
-        <p:nvSpPr>
-          <p:cNvPr id="2" name="Title 1"/>
-          <p:cNvSpPr>
-            <a:spLocks noGrp="1"/>
-          </p:cNvSpPr>
-          <p:nvPr>
-            <p:ph type="title"/>
+      <p:sp>
+        <p:nvSpPr>
+          <p:cNvPr id="9" name="Slide Number Placeholder 8">
+            <a:extLst>
+              <a:ext uri="{FF2B5EF4-FFF2-40B4-BE49-F238E27FC236}">
+                <a16:creationId xmlns:a16="http://schemas.microsoft.com/office/drawing/2014/main" id="{90F6EF5D-D2A8-35D8-C8FB-B180A01CEADC}"/>
+              </a:ext>
+            </a:extLst>
+          </p:cNvPr>
+          <p:cNvSpPr>
+            <a:spLocks noGrp="1"/>
+          </p:cNvSpPr>
+          <p:nvPr>
+            <p:ph type="sldNum" sz="quarter" idx="12"/>
           </p:nvPr>
         </p:nvSpPr>
         <p:spPr/>
@@ -3736,2721 +6474,11 @@
           <a:bodyPr/>
           <a:lstStyle/>
           <a:p>
-            <a:pPr>
-              <a:defRPr sz="4400" b="1">
-                <a:solidFill>
-                  <a:srgbClr val="1F4E79"/>
-                </a:solidFill>
-              </a:defRPr>
-            </a:pPr>
-            <a:r>
-              <a:rPr dirty="0"/>
-              <a:t>Key Features</a:t>
-            </a:r>
-          </a:p>
-        </p:txBody>
-      </p:sp>
-      <p:sp>
-        <p:nvSpPr>
-          <p:cNvPr id="3" name="Content Placeholder 2"/>
-          <p:cNvSpPr>
-            <a:spLocks noGrp="1"/>
-          </p:cNvSpPr>
-          <p:nvPr>
-            <p:ph idx="1"/>
-          </p:nvPr>
-        </p:nvSpPr>
-        <p:spPr/>
-        <p:txBody>
-          <a:bodyPr wrap="square"/>
-          <a:lstStyle/>
-          <a:p>
-            <a:endParaRPr dirty="0"/>
-          </a:p>
-          <a:p>
-            <a:pPr>
-              <a:spcBef>
-                <a:spcPts val="1200"/>
-              </a:spcBef>
-              <a:spcAft>
-                <a:spcPts val="800"/>
-              </a:spcAft>
-              <a:defRPr sz="2400">
-                <a:solidFill>
-                  <a:srgbClr val="444444"/>
-                </a:solidFill>
-              </a:defRPr>
-            </a:pPr>
-            <a:r>
-              <a:rPr dirty="0"/>
-              <a:t>Lightweight - Uses only C++</a:t>
-            </a:r>
-          </a:p>
-          <a:p>
-            <a:pPr>
-              <a:spcBef>
-                <a:spcPts val="1200"/>
-              </a:spcBef>
-              <a:spcAft>
-                <a:spcPts val="800"/>
-              </a:spcAft>
-              <a:defRPr sz="2400">
-                <a:solidFill>
-                  <a:srgbClr val="444444"/>
-                </a:solidFill>
-              </a:defRPr>
-            </a:pPr>
-            <a:r>
-              <a:rPr dirty="0"/>
-              <a:t>Smart analysis - Tracks data flow through </a:t>
-            </a:r>
-            <a:r>
-              <a:rPr lang="en-US" dirty="0"/>
-              <a:t>the</a:t>
-            </a:r>
-            <a:r>
-              <a:rPr dirty="0"/>
-              <a:t> code</a:t>
-            </a:r>
-          </a:p>
-          <a:p>
-            <a:pPr>
-              <a:spcBef>
-                <a:spcPts val="1200"/>
-              </a:spcBef>
-              <a:spcAft>
-                <a:spcPts val="800"/>
-              </a:spcAft>
-              <a:defRPr sz="2400">
-                <a:solidFill>
-                  <a:srgbClr val="444444"/>
-                </a:solidFill>
-              </a:defRPr>
-            </a:pPr>
-            <a:r>
-              <a:rPr dirty="0"/>
-              <a:t>Machine learning - Predicts which tests might be flaky</a:t>
-            </a:r>
-          </a:p>
-          <a:p>
-            <a:pPr>
-              <a:spcBef>
-                <a:spcPts val="1200"/>
-              </a:spcBef>
-              <a:spcAft>
-                <a:spcPts val="800"/>
-              </a:spcAft>
-              <a:defRPr sz="2400">
-                <a:solidFill>
-                  <a:srgbClr val="444444"/>
-                </a:solidFill>
-              </a:defRPr>
-            </a:pPr>
-            <a:r>
-              <a:rPr dirty="0"/>
-              <a:t>Clear output - Plain text reports anyone can read</a:t>
-            </a:r>
-          </a:p>
-          <a:p>
-            <a:pPr>
-              <a:spcBef>
-                <a:spcPts val="1200"/>
-              </a:spcBef>
-              <a:spcAft>
-                <a:spcPts val="800"/>
-              </a:spcAft>
-              <a:defRPr sz="2400">
-                <a:solidFill>
-                  <a:srgbClr val="444444"/>
-                </a:solidFill>
-              </a:defRPr>
-            </a:pPr>
-            <a:r>
-              <a:rPr dirty="0"/>
-              <a:t>Root causes - Tells exactly why tests fail</a:t>
-            </a:r>
-          </a:p>
-        </p:txBody>
-      </p:sp>
-    </p:spTree>
-  </p:cSld>
-  <p:clrMapOvr>
-    <a:masterClrMapping/>
-  </p:clrMapOvr>
-</p:sld>
-</file>
-
-<file path=ppt/slides/slide12.xml><?xml version="1.0" encoding="utf-8"?>
-<p:sld xmlns:a="http://schemas.openxmlformats.org/drawingml/2006/main" xmlns:r="http://schemas.openxmlformats.org/officeDocument/2006/relationships" xmlns:p="http://schemas.openxmlformats.org/presentationml/2006/main">
-  <p:cSld>
-    <p:spTree>
-      <p:nvGrpSpPr>
-        <p:cNvPr id="1" name=""/>
-        <p:cNvGrpSpPr/>
-        <p:nvPr/>
-      </p:nvGrpSpPr>
-      <p:grpSpPr>
-        <a:xfrm>
-          <a:off x="0" y="0"/>
-          <a:ext cx="0" cy="0"/>
-          <a:chOff x="0" y="0"/>
-          <a:chExt cx="0" cy="0"/>
-        </a:xfrm>
-      </p:grpSpPr>
-      <p:sp>
-        <p:nvSpPr>
-          <p:cNvPr id="2" name="TextBox 1"/>
-          <p:cNvSpPr txBox="1"/>
-          <p:nvPr/>
-        </p:nvSpPr>
-        <p:spPr>
-          <a:xfrm>
-            <a:off x="4417496" y="274321"/>
-            <a:ext cx="3357009" cy="769441"/>
-          </a:xfrm>
-          <a:prstGeom prst="rect">
-            <a:avLst/>
-          </a:prstGeom>
-          <a:noFill/>
-        </p:spPr>
-        <p:txBody>
-          <a:bodyPr wrap="none">
-            <a:spAutoFit/>
-          </a:bodyPr>
-          <a:lstStyle/>
-          <a:p>
-            <a:pPr algn="ctr">
-              <a:defRPr sz="4400" b="1">
-                <a:solidFill>
-                  <a:srgbClr val="1F4E79"/>
-                </a:solidFill>
-              </a:defRPr>
-            </a:pPr>
-            <a:r>
-              <a:rPr sz="4400"/>
-              <a:t>Project Scope</a:t>
-            </a:r>
-          </a:p>
-        </p:txBody>
-      </p:sp>
-      <p:sp>
-        <p:nvSpPr>
-          <p:cNvPr id="3" name="TextBox 2"/>
-          <p:cNvSpPr txBox="1"/>
-          <p:nvPr/>
-        </p:nvSpPr>
-        <p:spPr>
-          <a:xfrm>
-            <a:off x="2144421" y="2158176"/>
-            <a:ext cx="2850364" cy="3016210"/>
-          </a:xfrm>
-          <a:prstGeom prst="rect">
-            <a:avLst/>
-          </a:prstGeom>
-          <a:noFill/>
-        </p:spPr>
-        <p:txBody>
-          <a:bodyPr wrap="square">
-            <a:spAutoFit/>
-          </a:bodyPr>
-          <a:lstStyle/>
-          <a:p>
-            <a:pPr algn="ctr">
-              <a:defRPr sz="3000" b="1">
-                <a:solidFill>
-                  <a:srgbClr val="5CB85C"/>
-                </a:solidFill>
-              </a:defRPr>
-            </a:pPr>
-            <a:r>
-              <a:rPr sz="3000" dirty="0"/>
-              <a:t>What's Included</a:t>
-            </a:r>
-          </a:p>
-          <a:p>
-            <a:pPr>
-              <a:spcBef>
-                <a:spcPts val="1200"/>
-              </a:spcBef>
-              <a:defRPr sz="2200">
-                <a:solidFill>
-                  <a:srgbClr val="444444"/>
-                </a:solidFill>
-              </a:defRPr>
-            </a:pPr>
-            <a:r>
-              <a:rPr sz="2200" dirty="0"/>
-              <a:t>• C++ and </a:t>
-            </a:r>
-            <a:r>
-              <a:rPr sz="2200" dirty="0" err="1"/>
-              <a:t>GoogleTest</a:t>
-            </a:r>
-            <a:endParaRPr sz="2200" dirty="0"/>
-          </a:p>
-          <a:p>
-            <a:pPr>
-              <a:spcBef>
-                <a:spcPts val="1200"/>
-              </a:spcBef>
-              <a:defRPr sz="2200">
-                <a:solidFill>
-                  <a:srgbClr val="444444"/>
-                </a:solidFill>
-              </a:defRPr>
-            </a:pPr>
-            <a:r>
-              <a:rPr sz="2200" dirty="0"/>
-              <a:t>• Simple and fast</a:t>
-            </a:r>
-          </a:p>
-          <a:p>
-            <a:pPr>
-              <a:spcBef>
-                <a:spcPts val="1200"/>
-              </a:spcBef>
-              <a:defRPr sz="2200">
-                <a:solidFill>
-                  <a:srgbClr val="444444"/>
-                </a:solidFill>
-              </a:defRPr>
-            </a:pPr>
-            <a:r>
-              <a:rPr sz="2200" dirty="0"/>
-              <a:t>• Find flaky tests</a:t>
-            </a:r>
-          </a:p>
-          <a:p>
-            <a:pPr>
-              <a:spcBef>
-                <a:spcPts val="1200"/>
-              </a:spcBef>
-              <a:defRPr sz="2200">
-                <a:solidFill>
-                  <a:srgbClr val="444444"/>
-                </a:solidFill>
-              </a:defRPr>
-            </a:pPr>
-            <a:r>
-              <a:rPr sz="2200" dirty="0"/>
-              <a:t>• Explain why they fail</a:t>
-            </a:r>
-          </a:p>
-          <a:p>
-            <a:pPr>
-              <a:spcBef>
-                <a:spcPts val="1200"/>
-              </a:spcBef>
-              <a:defRPr sz="2200">
-                <a:solidFill>
-                  <a:srgbClr val="444444"/>
-                </a:solidFill>
-              </a:defRPr>
-            </a:pPr>
-            <a:r>
-              <a:rPr sz="2200" dirty="0"/>
-              <a:t>• Easy to use</a:t>
-            </a:r>
-          </a:p>
-        </p:txBody>
-      </p:sp>
-      <p:sp>
-        <p:nvSpPr>
-          <p:cNvPr id="4" name="TextBox 3"/>
-          <p:cNvSpPr txBox="1"/>
-          <p:nvPr/>
-        </p:nvSpPr>
-        <p:spPr>
-          <a:xfrm>
-            <a:off x="7416469" y="2158176"/>
-            <a:ext cx="2850363" cy="3016210"/>
-          </a:xfrm>
-          <a:prstGeom prst="rect">
-            <a:avLst/>
-          </a:prstGeom>
-          <a:noFill/>
-        </p:spPr>
-        <p:txBody>
-          <a:bodyPr wrap="square">
-            <a:spAutoFit/>
-          </a:bodyPr>
-          <a:lstStyle/>
-          <a:p>
-            <a:pPr algn="ctr">
-              <a:defRPr sz="3000" b="1">
-                <a:solidFill>
-                  <a:srgbClr val="D9534F"/>
-                </a:solidFill>
-              </a:defRPr>
-            </a:pPr>
-            <a:r>
-              <a:rPr sz="3000" dirty="0"/>
-              <a:t>Not Included</a:t>
-            </a:r>
-          </a:p>
-          <a:p>
-            <a:pPr>
-              <a:spcBef>
-                <a:spcPts val="1200"/>
-              </a:spcBef>
-              <a:defRPr sz="2200">
-                <a:solidFill>
-                  <a:srgbClr val="444444"/>
-                </a:solidFill>
-              </a:defRPr>
-            </a:pPr>
-            <a:r>
-              <a:rPr sz="2200" dirty="0"/>
-              <a:t>• Big complex libraries</a:t>
-            </a:r>
-          </a:p>
-          <a:p>
-            <a:pPr>
-              <a:spcBef>
-                <a:spcPts val="1200"/>
-              </a:spcBef>
-              <a:defRPr sz="2200">
-                <a:solidFill>
-                  <a:srgbClr val="444444"/>
-                </a:solidFill>
-              </a:defRPr>
-            </a:pPr>
-            <a:r>
-              <a:rPr sz="2200" dirty="0"/>
-              <a:t>• Full compiler</a:t>
-            </a:r>
-          </a:p>
-          <a:p>
-            <a:pPr>
-              <a:spcBef>
-                <a:spcPts val="1200"/>
-              </a:spcBef>
-              <a:defRPr sz="2200">
-                <a:solidFill>
-                  <a:srgbClr val="444444"/>
-                </a:solidFill>
-              </a:defRPr>
-            </a:pPr>
-            <a:r>
-              <a:rPr sz="2200" dirty="0"/>
-              <a:t>• Auto code fixing</a:t>
-            </a:r>
-          </a:p>
-          <a:p>
-            <a:pPr>
-              <a:spcBef>
-                <a:spcPts val="1200"/>
-              </a:spcBef>
-              <a:defRPr sz="2200">
-                <a:solidFill>
-                  <a:srgbClr val="444444"/>
-                </a:solidFill>
-              </a:defRPr>
-            </a:pPr>
-            <a:r>
-              <a:rPr sz="2200" dirty="0"/>
-              <a:t>• Multiple languages</a:t>
-            </a:r>
-          </a:p>
-          <a:p>
-            <a:pPr>
-              <a:spcBef>
-                <a:spcPts val="1200"/>
-              </a:spcBef>
-              <a:defRPr sz="2200">
-                <a:solidFill>
-                  <a:srgbClr val="444444"/>
-                </a:solidFill>
-              </a:defRPr>
-            </a:pPr>
-            <a:r>
-              <a:rPr sz="2200" dirty="0"/>
-              <a:t>• Fancy GUI</a:t>
-            </a:r>
-          </a:p>
-        </p:txBody>
-      </p:sp>
-    </p:spTree>
-  </p:cSld>
-  <p:clrMapOvr>
-    <a:masterClrMapping/>
-  </p:clrMapOvr>
-</p:sld>
-</file>
-
-<file path=ppt/slides/slide13.xml><?xml version="1.0" encoding="utf-8"?>
-<p:sld xmlns:a="http://schemas.openxmlformats.org/drawingml/2006/main" xmlns:r="http://schemas.openxmlformats.org/officeDocument/2006/relationships" xmlns:p="http://schemas.openxmlformats.org/presentationml/2006/main">
-  <p:cSld>
-    <p:spTree>
-      <p:nvGrpSpPr>
-        <p:cNvPr id="1" name=""/>
-        <p:cNvGrpSpPr/>
-        <p:nvPr/>
-      </p:nvGrpSpPr>
-      <p:grpSpPr>
-        <a:xfrm>
-          <a:off x="0" y="0"/>
-          <a:ext cx="0" cy="0"/>
-          <a:chOff x="0" y="0"/>
-          <a:chExt cx="0" cy="0"/>
-        </a:xfrm>
-      </p:grpSpPr>
-      <p:sp>
-        <p:nvSpPr>
-          <p:cNvPr id="2" name="TextBox 1"/>
-          <p:cNvSpPr txBox="1"/>
-          <p:nvPr/>
-        </p:nvSpPr>
-        <p:spPr>
-          <a:xfrm>
-            <a:off x="3646334" y="2285998"/>
-            <a:ext cx="4899333" cy="1754326"/>
-          </a:xfrm>
-          <a:prstGeom prst="rect">
-            <a:avLst/>
-          </a:prstGeom>
-          <a:noFill/>
-        </p:spPr>
-        <p:txBody>
-          <a:bodyPr wrap="square">
-            <a:spAutoFit/>
-          </a:bodyPr>
-          <a:lstStyle/>
-          <a:p>
-            <a:pPr algn="ctr">
-              <a:defRPr sz="6000" b="1">
-                <a:solidFill>
-                  <a:srgbClr val="1F4E79"/>
-                </a:solidFill>
-              </a:defRPr>
-            </a:pPr>
-            <a:r>
-              <a:rPr sz="6000" dirty="0"/>
-              <a:t>Thank You!</a:t>
-            </a:r>
-            <a:endParaRPr lang="en-US" sz="6000" dirty="0"/>
-          </a:p>
-          <a:p>
-            <a:br>
-              <a:rPr lang="en-US" sz="2400" dirty="0"/>
-            </a:br>
-            <a:r>
-              <a:rPr lang="en-US" sz="2400" dirty="0"/>
-              <a:t>	Questions &amp; Feedback Welcome</a:t>
-            </a:r>
-          </a:p>
-        </p:txBody>
-      </p:sp>
-    </p:spTree>
-  </p:cSld>
-  <p:clrMapOvr>
-    <a:masterClrMapping/>
-  </p:clrMapOvr>
-</p:sld>
-</file>
-
-<file path=ppt/slides/slide2.xml><?xml version="1.0" encoding="utf-8"?>
-<p:sld xmlns:a="http://schemas.openxmlformats.org/drawingml/2006/main" xmlns:r="http://schemas.openxmlformats.org/officeDocument/2006/relationships" xmlns:p="http://schemas.openxmlformats.org/presentationml/2006/main">
-  <p:cSld>
-    <p:spTree>
-      <p:nvGrpSpPr>
-        <p:cNvPr id="1" name=""/>
-        <p:cNvGrpSpPr/>
-        <p:nvPr/>
-      </p:nvGrpSpPr>
-      <p:grpSpPr>
-        <a:xfrm>
-          <a:off x="0" y="0"/>
-          <a:ext cx="0" cy="0"/>
-          <a:chOff x="0" y="0"/>
-          <a:chExt cx="0" cy="0"/>
-        </a:xfrm>
-      </p:grpSpPr>
-      <p:sp>
-        <p:nvSpPr>
-          <p:cNvPr id="2" name="Title 1"/>
-          <p:cNvSpPr>
-            <a:spLocks noGrp="1"/>
-          </p:cNvSpPr>
-          <p:nvPr>
-            <p:ph type="title"/>
-          </p:nvPr>
-        </p:nvSpPr>
-        <p:spPr/>
-        <p:txBody>
-          <a:bodyPr/>
-          <a:lstStyle/>
-          <a:p>
-            <a:pPr>
-              <a:defRPr sz="4400" b="1">
-                <a:solidFill>
-                  <a:srgbClr val="1F4E79"/>
-                </a:solidFill>
-              </a:defRPr>
-            </a:pPr>
-            <a:r>
-              <a:t>The Problem: Flaky Tests</a:t>
-            </a:r>
-          </a:p>
-        </p:txBody>
-      </p:sp>
-      <p:sp>
-        <p:nvSpPr>
-          <p:cNvPr id="3" name="Content Placeholder 2"/>
-          <p:cNvSpPr>
-            <a:spLocks noGrp="1"/>
-          </p:cNvSpPr>
-          <p:nvPr>
-            <p:ph idx="1"/>
-          </p:nvPr>
-        </p:nvSpPr>
-        <p:spPr/>
-        <p:txBody>
-          <a:bodyPr wrap="square"/>
-          <a:lstStyle/>
-          <a:p>
-            <a:endParaRPr dirty="0"/>
-          </a:p>
-          <a:p>
-            <a:pPr>
-              <a:spcBef>
-                <a:spcPts val="1200"/>
-              </a:spcBef>
-              <a:spcAft>
-                <a:spcPts val="800"/>
-              </a:spcAft>
-              <a:defRPr sz="2400">
-                <a:solidFill>
-                  <a:srgbClr val="444444"/>
-                </a:solidFill>
-              </a:defRPr>
-            </a:pPr>
-            <a:r>
-              <a:rPr dirty="0"/>
-              <a:t>Tests sometimes pass, sometimes fail </a:t>
-            </a:r>
-            <a:r>
-              <a:rPr lang="en-US" dirty="0"/>
-              <a:t>without code changes</a:t>
-            </a:r>
-            <a:endParaRPr dirty="0"/>
-          </a:p>
-          <a:p>
-            <a:pPr>
-              <a:spcBef>
-                <a:spcPts val="1200"/>
-              </a:spcBef>
-              <a:spcAft>
-                <a:spcPts val="800"/>
-              </a:spcAft>
-              <a:defRPr sz="2400">
-                <a:solidFill>
-                  <a:srgbClr val="444444"/>
-                </a:solidFill>
-              </a:defRPr>
-            </a:pPr>
-            <a:r>
-              <a:rPr dirty="0"/>
-              <a:t>Wastes time </a:t>
-            </a:r>
-            <a:r>
-              <a:rPr lang="en-US" dirty="0"/>
-              <a:t>,</a:t>
-            </a:r>
-            <a:r>
-              <a:rPr dirty="0"/>
-              <a:t> developers debug fake problems</a:t>
-            </a:r>
-          </a:p>
-          <a:p>
-            <a:pPr>
-              <a:spcBef>
-                <a:spcPts val="1200"/>
-              </a:spcBef>
-              <a:spcAft>
-                <a:spcPts val="800"/>
-              </a:spcAft>
-              <a:defRPr sz="2400">
-                <a:solidFill>
-                  <a:srgbClr val="444444"/>
-                </a:solidFill>
-              </a:defRPr>
-            </a:pPr>
-            <a:r>
-              <a:rPr dirty="0"/>
-              <a:t>Breaks CI/CD trust</a:t>
-            </a:r>
-            <a:r>
-              <a:rPr lang="en-US" dirty="0"/>
-              <a:t>,</a:t>
-            </a:r>
-            <a:r>
-              <a:rPr dirty="0"/>
-              <a:t> can't rely on test results</a:t>
-            </a:r>
-          </a:p>
-          <a:p>
-            <a:pPr>
-              <a:spcBef>
-                <a:spcPts val="1200"/>
-              </a:spcBef>
-              <a:spcAft>
-                <a:spcPts val="800"/>
-              </a:spcAft>
-              <a:defRPr sz="2400">
-                <a:solidFill>
-                  <a:srgbClr val="444444"/>
-                </a:solidFill>
-              </a:defRPr>
-            </a:pPr>
-            <a:r>
-              <a:rPr dirty="0"/>
-              <a:t>Hard to find why tests are flaky</a:t>
-            </a:r>
-          </a:p>
-          <a:p>
-            <a:pPr>
-              <a:spcBef>
-                <a:spcPts val="1200"/>
-              </a:spcBef>
-              <a:spcAft>
-                <a:spcPts val="800"/>
-              </a:spcAft>
-              <a:defRPr sz="2400">
-                <a:solidFill>
-                  <a:srgbClr val="444444"/>
-                </a:solidFill>
-              </a:defRPr>
-            </a:pPr>
-            <a:r>
-              <a:rPr dirty="0"/>
-              <a:t>Reasons: timing issues, random values, environment settings</a:t>
-            </a:r>
-          </a:p>
-        </p:txBody>
-      </p:sp>
-    </p:spTree>
-  </p:cSld>
-  <p:clrMapOvr>
-    <a:masterClrMapping/>
-  </p:clrMapOvr>
-</p:sld>
-</file>
-
-<file path=ppt/slides/slide3.xml><?xml version="1.0" encoding="utf-8"?>
-<p:sld xmlns:a="http://schemas.openxmlformats.org/drawingml/2006/main" xmlns:r="http://schemas.openxmlformats.org/officeDocument/2006/relationships" xmlns:p="http://schemas.openxmlformats.org/presentationml/2006/main">
-  <p:cSld>
-    <p:spTree>
-      <p:nvGrpSpPr>
-        <p:cNvPr id="1" name=""/>
-        <p:cNvGrpSpPr/>
-        <p:nvPr/>
-      </p:nvGrpSpPr>
-      <p:grpSpPr>
-        <a:xfrm>
-          <a:off x="0" y="0"/>
-          <a:ext cx="0" cy="0"/>
-          <a:chOff x="0" y="0"/>
-          <a:chExt cx="0" cy="0"/>
-        </a:xfrm>
-      </p:grpSpPr>
-      <p:sp>
-        <p:nvSpPr>
-          <p:cNvPr id="2" name="TextBox 1"/>
-          <p:cNvSpPr txBox="1"/>
-          <p:nvPr/>
-        </p:nvSpPr>
-        <p:spPr>
-          <a:xfrm>
-            <a:off x="2714595" y="274321"/>
-            <a:ext cx="6762813" cy="769441"/>
-          </a:xfrm>
-          <a:prstGeom prst="rect">
-            <a:avLst/>
-          </a:prstGeom>
-          <a:noFill/>
-        </p:spPr>
-        <p:txBody>
-          <a:bodyPr wrap="none">
-            <a:spAutoFit/>
-          </a:bodyPr>
-          <a:lstStyle/>
-          <a:p>
-            <a:pPr algn="ctr">
-              <a:defRPr sz="4400" b="1">
-                <a:solidFill>
-                  <a:srgbClr val="1F4E79"/>
-                </a:solidFill>
-              </a:defRPr>
-            </a:pPr>
-            <a:r>
-              <a:rPr lang="en-US" sz="4400" dirty="0"/>
-              <a:t>The </a:t>
-            </a:r>
-            <a:r>
-              <a:rPr sz="4400" dirty="0"/>
-              <a:t>Solution: </a:t>
-            </a:r>
-            <a:r>
-              <a:rPr sz="4400" dirty="0" err="1"/>
-              <a:t>FlakeHound</a:t>
-            </a:r>
-            <a:r>
-              <a:rPr sz="4400" dirty="0"/>
-              <a:t>++</a:t>
-            </a:r>
-          </a:p>
-        </p:txBody>
-      </p:sp>
-      <p:sp>
-        <p:nvSpPr>
-          <p:cNvPr id="3" name="Rounded Rectangle 2"/>
-          <p:cNvSpPr/>
-          <p:nvPr/>
-        </p:nvSpPr>
-        <p:spPr>
-          <a:xfrm>
-            <a:off x="1350955" y="1645920"/>
-            <a:ext cx="3657600" cy="4114800"/>
-          </a:xfrm>
-          <a:prstGeom prst="roundRect">
-            <a:avLst/>
-          </a:prstGeom>
-          <a:solidFill>
-            <a:srgbClr val="F2F2F2"/>
-          </a:solidFill>
-          <a:ln w="38100">
-            <a:solidFill>
-              <a:srgbClr val="4472C4"/>
-            </a:solidFill>
-          </a:ln>
-        </p:spPr>
-        <p:style>
-          <a:lnRef idx="1">
-            <a:schemeClr val="accent1"/>
-          </a:lnRef>
-          <a:fillRef idx="3">
-            <a:schemeClr val="accent1"/>
-          </a:fillRef>
-          <a:effectRef idx="2">
-            <a:schemeClr val="accent1"/>
-          </a:effectRef>
-          <a:fontRef idx="minor">
-            <a:schemeClr val="lt1"/>
-          </a:fontRef>
-        </p:style>
-        <p:txBody>
-          <a:bodyPr rtlCol="0" anchor="ctr"/>
-          <a:lstStyle/>
-          <a:p>
-            <a:pPr algn="ctr"/>
-            <a:endParaRPr/>
-          </a:p>
-        </p:txBody>
-      </p:sp>
-      <p:sp>
-        <p:nvSpPr>
-          <p:cNvPr id="4" name="TextBox 3"/>
-          <p:cNvSpPr txBox="1"/>
-          <p:nvPr/>
-        </p:nvSpPr>
-        <p:spPr>
-          <a:xfrm>
-            <a:off x="1789342" y="1828800"/>
-            <a:ext cx="2780826" cy="523220"/>
-          </a:xfrm>
-          <a:prstGeom prst="rect">
-            <a:avLst/>
-          </a:prstGeom>
-          <a:noFill/>
-        </p:spPr>
-        <p:txBody>
-          <a:bodyPr wrap="none">
-            <a:spAutoFit/>
-          </a:bodyPr>
-          <a:lstStyle/>
-          <a:p>
-            <a:pPr algn="ctr">
-              <a:defRPr sz="2800" b="1">
-                <a:solidFill>
-                  <a:srgbClr val="4472C4"/>
-                </a:solidFill>
-              </a:defRPr>
-            </a:pPr>
-            <a:r>
-              <a:rPr sz="2800"/>
-              <a:t>Dynamic Analysis</a:t>
-            </a:r>
-          </a:p>
-        </p:txBody>
-      </p:sp>
-      <p:sp>
-        <p:nvSpPr>
-          <p:cNvPr id="5" name="TextBox 4"/>
-          <p:cNvSpPr txBox="1"/>
-          <p:nvPr/>
-        </p:nvSpPr>
-        <p:spPr>
-          <a:xfrm>
-            <a:off x="1625275" y="2468881"/>
-            <a:ext cx="3108960" cy="2092881"/>
-          </a:xfrm>
-          <a:prstGeom prst="rect">
-            <a:avLst/>
-          </a:prstGeom>
-          <a:noFill/>
-        </p:spPr>
-        <p:txBody>
-          <a:bodyPr wrap="square">
-            <a:spAutoFit/>
-          </a:bodyPr>
-          <a:lstStyle/>
-          <a:p>
-            <a:pPr>
-              <a:spcBef>
-                <a:spcPts val="800"/>
-              </a:spcBef>
-              <a:defRPr sz="2200">
-                <a:solidFill>
-                  <a:srgbClr val="444444"/>
-                </a:solidFill>
-              </a:defRPr>
-            </a:pPr>
-            <a:r>
-              <a:rPr sz="2200" dirty="0"/>
-              <a:t>• Run tests many times</a:t>
-            </a:r>
-          </a:p>
-          <a:p>
-            <a:pPr>
-              <a:spcBef>
-                <a:spcPts val="800"/>
-              </a:spcBef>
-              <a:defRPr sz="2200">
-                <a:solidFill>
-                  <a:srgbClr val="444444"/>
-                </a:solidFill>
-              </a:defRPr>
-            </a:pPr>
-            <a:r>
-              <a:rPr sz="2200" dirty="0"/>
-              <a:t>• Track which tests fail</a:t>
-            </a:r>
-          </a:p>
-          <a:p>
-            <a:pPr>
-              <a:spcBef>
-                <a:spcPts val="800"/>
-              </a:spcBef>
-              <a:defRPr sz="2200">
-                <a:solidFill>
-                  <a:srgbClr val="444444"/>
-                </a:solidFill>
-              </a:defRPr>
-            </a:pPr>
-            <a:r>
-              <a:rPr sz="2200" dirty="0"/>
-              <a:t>• Count how often they fail</a:t>
-            </a:r>
-          </a:p>
-          <a:p>
-            <a:pPr>
-              <a:spcBef>
-                <a:spcPts val="800"/>
-              </a:spcBef>
-              <a:defRPr sz="2200">
-                <a:solidFill>
-                  <a:srgbClr val="444444"/>
-                </a:solidFill>
-              </a:defRPr>
-            </a:pPr>
-            <a:r>
-              <a:rPr sz="2200" dirty="0"/>
-              <a:t>• Find flaky patterns</a:t>
-            </a:r>
-          </a:p>
-        </p:txBody>
-      </p:sp>
-      <p:sp>
-        <p:nvSpPr>
-          <p:cNvPr id="6" name="Rounded Rectangle 5"/>
-          <p:cNvSpPr/>
-          <p:nvPr/>
-        </p:nvSpPr>
-        <p:spPr>
-          <a:xfrm>
-            <a:off x="6917978" y="1645920"/>
-            <a:ext cx="3657600" cy="4114800"/>
-          </a:xfrm>
-          <a:prstGeom prst="roundRect">
-            <a:avLst/>
-          </a:prstGeom>
-          <a:solidFill>
-            <a:srgbClr val="F2F2F2"/>
-          </a:solidFill>
-          <a:ln w="38100">
-            <a:solidFill>
-              <a:srgbClr val="ED7D31"/>
-            </a:solidFill>
-          </a:ln>
-        </p:spPr>
-        <p:style>
-          <a:lnRef idx="1">
-            <a:schemeClr val="accent1"/>
-          </a:lnRef>
-          <a:fillRef idx="3">
-            <a:schemeClr val="accent1"/>
-          </a:fillRef>
-          <a:effectRef idx="2">
-            <a:schemeClr val="accent1"/>
-          </a:effectRef>
-          <a:fontRef idx="minor">
-            <a:schemeClr val="lt1"/>
-          </a:fontRef>
-        </p:style>
-        <p:txBody>
-          <a:bodyPr rtlCol="0" anchor="ctr"/>
-          <a:lstStyle/>
-          <a:p>
-            <a:pPr algn="ctr"/>
-            <a:endParaRPr/>
-          </a:p>
-        </p:txBody>
-      </p:sp>
-      <p:sp>
-        <p:nvSpPr>
-          <p:cNvPr id="7" name="TextBox 6"/>
-          <p:cNvSpPr txBox="1"/>
-          <p:nvPr/>
-        </p:nvSpPr>
-        <p:spPr>
-          <a:xfrm>
-            <a:off x="7589827" y="1828800"/>
-            <a:ext cx="2313902" cy="523220"/>
-          </a:xfrm>
-          <a:prstGeom prst="rect">
-            <a:avLst/>
-          </a:prstGeom>
-          <a:noFill/>
-        </p:spPr>
-        <p:txBody>
-          <a:bodyPr wrap="none">
-            <a:spAutoFit/>
-          </a:bodyPr>
-          <a:lstStyle/>
-          <a:p>
-            <a:pPr algn="ctr">
-              <a:defRPr sz="2800" b="1">
-                <a:solidFill>
-                  <a:srgbClr val="ED7D31"/>
-                </a:solidFill>
-              </a:defRPr>
-            </a:pPr>
-            <a:r>
-              <a:rPr sz="2800"/>
-              <a:t>Static Analysis</a:t>
-            </a:r>
-          </a:p>
-        </p:txBody>
-      </p:sp>
-      <p:sp>
-        <p:nvSpPr>
-          <p:cNvPr id="8" name="TextBox 7"/>
-          <p:cNvSpPr txBox="1"/>
-          <p:nvPr/>
-        </p:nvSpPr>
-        <p:spPr>
-          <a:xfrm>
-            <a:off x="7192298" y="2468880"/>
-            <a:ext cx="3108960" cy="1754326"/>
-          </a:xfrm>
-          <a:prstGeom prst="rect">
-            <a:avLst/>
-          </a:prstGeom>
-          <a:noFill/>
-        </p:spPr>
-        <p:txBody>
-          <a:bodyPr wrap="square">
-            <a:spAutoFit/>
-          </a:bodyPr>
-          <a:lstStyle/>
-          <a:p>
-            <a:pPr>
-              <a:spcBef>
-                <a:spcPts val="800"/>
-              </a:spcBef>
-              <a:defRPr sz="2200">
-                <a:solidFill>
-                  <a:srgbClr val="444444"/>
-                </a:solidFill>
-              </a:defRPr>
-            </a:pPr>
-            <a:r>
-              <a:rPr sz="2200" dirty="0"/>
-              <a:t>• Read C++ code</a:t>
-            </a:r>
-          </a:p>
-          <a:p>
-            <a:pPr>
-              <a:spcBef>
-                <a:spcPts val="800"/>
-              </a:spcBef>
-              <a:defRPr sz="2200">
-                <a:solidFill>
-                  <a:srgbClr val="444444"/>
-                </a:solidFill>
-              </a:defRPr>
-            </a:pPr>
-            <a:r>
-              <a:rPr sz="2200" dirty="0"/>
-              <a:t>• Look for risky code</a:t>
-            </a:r>
-          </a:p>
-          <a:p>
-            <a:pPr>
-              <a:spcBef>
-                <a:spcPts val="800"/>
-              </a:spcBef>
-              <a:defRPr sz="2200">
-                <a:solidFill>
-                  <a:srgbClr val="444444"/>
-                </a:solidFill>
-              </a:defRPr>
-            </a:pPr>
-            <a:r>
-              <a:rPr sz="2200" dirty="0"/>
-              <a:t>• Find flakiness causes</a:t>
-            </a:r>
-          </a:p>
-          <a:p>
-            <a:pPr>
-              <a:spcBef>
-                <a:spcPts val="800"/>
-              </a:spcBef>
-              <a:defRPr sz="2200">
-                <a:solidFill>
-                  <a:srgbClr val="444444"/>
-                </a:solidFill>
-              </a:defRPr>
-            </a:pPr>
-            <a:r>
-              <a:rPr sz="2200" dirty="0"/>
-              <a:t>• Tell why tests fail</a:t>
-            </a:r>
-          </a:p>
-        </p:txBody>
-      </p:sp>
-    </p:spTree>
-  </p:cSld>
-  <p:clrMapOvr>
-    <a:masterClrMapping/>
-  </p:clrMapOvr>
-</p:sld>
-</file>
-
-<file path=ppt/slides/slide4.xml><?xml version="1.0" encoding="utf-8"?>
-<p:sld xmlns:a="http://schemas.openxmlformats.org/drawingml/2006/main" xmlns:r="http://schemas.openxmlformats.org/officeDocument/2006/relationships" xmlns:p="http://schemas.openxmlformats.org/presentationml/2006/main">
-  <p:cSld>
-    <p:spTree>
-      <p:nvGrpSpPr>
-        <p:cNvPr id="1" name=""/>
-        <p:cNvGrpSpPr/>
-        <p:nvPr/>
-      </p:nvGrpSpPr>
-      <p:grpSpPr>
-        <a:xfrm>
-          <a:off x="0" y="0"/>
-          <a:ext cx="0" cy="0"/>
-          <a:chOff x="0" y="0"/>
-          <a:chExt cx="0" cy="0"/>
-        </a:xfrm>
-      </p:grpSpPr>
-      <p:sp>
-        <p:nvSpPr>
-          <p:cNvPr id="2" name="TextBox 1"/>
-          <p:cNvSpPr txBox="1"/>
-          <p:nvPr/>
-        </p:nvSpPr>
-        <p:spPr>
-          <a:xfrm>
-            <a:off x="2753419" y="274321"/>
-            <a:ext cx="6685163" cy="769441"/>
-          </a:xfrm>
-          <a:prstGeom prst="rect">
-            <a:avLst/>
-          </a:prstGeom>
-          <a:noFill/>
-        </p:spPr>
-        <p:txBody>
-          <a:bodyPr wrap="none">
-            <a:spAutoFit/>
-          </a:bodyPr>
-          <a:lstStyle/>
-          <a:p>
-            <a:pPr algn="ctr">
-              <a:defRPr sz="4400" b="1">
-                <a:solidFill>
-                  <a:srgbClr val="1F4E79"/>
-                </a:solidFill>
-              </a:defRPr>
-            </a:pPr>
-            <a:r>
-              <a:rPr sz="4400"/>
-              <a:t>How It Works - Step by Step</a:t>
-            </a:r>
-          </a:p>
-        </p:txBody>
-      </p:sp>
-      <p:sp>
-        <p:nvSpPr>
-          <p:cNvPr id="3" name="Rounded Rectangle 2"/>
-          <p:cNvSpPr/>
-          <p:nvPr/>
-        </p:nvSpPr>
-        <p:spPr>
-          <a:xfrm>
-            <a:off x="2072640" y="1858296"/>
-            <a:ext cx="1463040" cy="914400"/>
-          </a:xfrm>
-          <a:prstGeom prst="roundRect">
-            <a:avLst/>
-          </a:prstGeom>
-          <a:solidFill>
-            <a:srgbClr val="4472C4"/>
-          </a:solidFill>
-          <a:ln w="25400">
-            <a:solidFill>
-              <a:srgbClr val="000000"/>
-            </a:solidFill>
-          </a:ln>
-        </p:spPr>
-        <p:style>
-          <a:lnRef idx="1">
-            <a:schemeClr val="accent1"/>
-          </a:lnRef>
-          <a:fillRef idx="3">
-            <a:schemeClr val="accent1"/>
-          </a:fillRef>
-          <a:effectRef idx="2">
-            <a:schemeClr val="accent1"/>
-          </a:effectRef>
-          <a:fontRef idx="minor">
-            <a:schemeClr val="lt1"/>
-          </a:fontRef>
-        </p:style>
-        <p:txBody>
-          <a:bodyPr rtlCol="0" anchor="t"/>
-          <a:lstStyle/>
-          <a:p>
-            <a:pPr algn="ctr">
-              <a:defRPr sz="1800" b="1">
-                <a:solidFill>
-                  <a:srgbClr val="FFFFFF"/>
-                </a:solidFill>
-              </a:defRPr>
-            </a:pPr>
-            <a:r>
-              <a:t>INPUT</a:t>
-            </a:r>
-          </a:p>
-          <a:p>
-            <a:pPr algn="ctr">
-              <a:defRPr sz="1400">
-                <a:solidFill>
-                  <a:srgbClr val="FFFFFF"/>
-                </a:solidFill>
-              </a:defRPr>
-            </a:pPr>
-            <a:r>
-              <a:rPr sz="1400"/>
-              <a:t>Test Code</a:t>
-            </a:r>
-            <a:br>
-              <a:rPr sz="1400"/>
-            </a:br>
-            <a:r>
-              <a:rPr sz="1400"/>
-              <a:t>+ XML</a:t>
-            </a:r>
-          </a:p>
-        </p:txBody>
-      </p:sp>
-      <p:sp>
-        <p:nvSpPr>
-          <p:cNvPr id="4" name="Right Arrow 3"/>
-          <p:cNvSpPr/>
-          <p:nvPr/>
-        </p:nvSpPr>
-        <p:spPr>
-          <a:xfrm>
-            <a:off x="3535680" y="2178336"/>
-            <a:ext cx="274320" cy="274320"/>
-          </a:xfrm>
-          <a:prstGeom prst="rightArrow">
-            <a:avLst/>
-          </a:prstGeom>
-          <a:solidFill>
-            <a:srgbClr val="444444"/>
-          </a:solidFill>
-          <a:ln>
-            <a:noFill/>
-          </a:ln>
-        </p:spPr>
-        <p:style>
-          <a:lnRef idx="1">
-            <a:schemeClr val="accent1"/>
-          </a:lnRef>
-          <a:fillRef idx="3">
-            <a:schemeClr val="accent1"/>
-          </a:fillRef>
-          <a:effectRef idx="2">
-            <a:schemeClr val="accent1"/>
-          </a:effectRef>
-          <a:fontRef idx="minor">
-            <a:schemeClr val="lt1"/>
-          </a:fontRef>
-        </p:style>
-        <p:txBody>
-          <a:bodyPr rtlCol="0" anchor="ctr"/>
-          <a:lstStyle/>
-          <a:p>
-            <a:pPr algn="ctr"/>
-            <a:endParaRPr/>
-          </a:p>
-        </p:txBody>
-      </p:sp>
-      <p:sp>
-        <p:nvSpPr>
-          <p:cNvPr id="5" name="Rounded Rectangle 4"/>
-          <p:cNvSpPr/>
-          <p:nvPr/>
-        </p:nvSpPr>
-        <p:spPr>
-          <a:xfrm>
-            <a:off x="3810000" y="1858296"/>
-            <a:ext cx="1463040" cy="914400"/>
-          </a:xfrm>
-          <a:prstGeom prst="roundRect">
-            <a:avLst/>
-          </a:prstGeom>
-          <a:solidFill>
-            <a:srgbClr val="5CB85C"/>
-          </a:solidFill>
-          <a:ln w="25400">
-            <a:solidFill>
-              <a:srgbClr val="000000"/>
-            </a:solidFill>
-          </a:ln>
-        </p:spPr>
-        <p:style>
-          <a:lnRef idx="1">
-            <a:schemeClr val="accent1"/>
-          </a:lnRef>
-          <a:fillRef idx="3">
-            <a:schemeClr val="accent1"/>
-          </a:fillRef>
-          <a:effectRef idx="2">
-            <a:schemeClr val="accent1"/>
-          </a:effectRef>
-          <a:fontRef idx="minor">
-            <a:schemeClr val="lt1"/>
-          </a:fontRef>
-        </p:style>
-        <p:txBody>
-          <a:bodyPr rtlCol="0" anchor="t"/>
-          <a:lstStyle/>
-          <a:p>
-            <a:pPr algn="ctr">
-              <a:defRPr sz="1800" b="1">
-                <a:solidFill>
-                  <a:srgbClr val="FFFFFF"/>
-                </a:solidFill>
-              </a:defRPr>
-            </a:pPr>
-            <a:r>
-              <a:t>RUNNER</a:t>
-            </a:r>
-          </a:p>
-          <a:p>
-            <a:pPr algn="ctr">
-              <a:defRPr sz="1400">
-                <a:solidFill>
-                  <a:srgbClr val="FFFFFF"/>
-                </a:solidFill>
-              </a:defRPr>
-            </a:pPr>
-            <a:r>
-              <a:rPr sz="1400"/>
-              <a:t>Run Tests</a:t>
-            </a:r>
-            <a:br>
-              <a:rPr sz="1400"/>
-            </a:br>
-            <a:r>
-              <a:rPr sz="1400"/>
-              <a:t>N Times</a:t>
-            </a:r>
-          </a:p>
-        </p:txBody>
-      </p:sp>
-      <p:sp>
-        <p:nvSpPr>
-          <p:cNvPr id="6" name="Right Arrow 5"/>
-          <p:cNvSpPr/>
-          <p:nvPr/>
-        </p:nvSpPr>
-        <p:spPr>
-          <a:xfrm>
-            <a:off x="5273040" y="2178336"/>
-            <a:ext cx="274320" cy="274320"/>
-          </a:xfrm>
-          <a:prstGeom prst="rightArrow">
-            <a:avLst/>
-          </a:prstGeom>
-          <a:solidFill>
-            <a:srgbClr val="444444"/>
-          </a:solidFill>
-          <a:ln>
-            <a:noFill/>
-          </a:ln>
-        </p:spPr>
-        <p:style>
-          <a:lnRef idx="1">
-            <a:schemeClr val="accent1"/>
-          </a:lnRef>
-          <a:fillRef idx="3">
-            <a:schemeClr val="accent1"/>
-          </a:fillRef>
-          <a:effectRef idx="2">
-            <a:schemeClr val="accent1"/>
-          </a:effectRef>
-          <a:fontRef idx="minor">
-            <a:schemeClr val="lt1"/>
-          </a:fontRef>
-        </p:style>
-        <p:txBody>
-          <a:bodyPr rtlCol="0" anchor="ctr"/>
-          <a:lstStyle/>
-          <a:p>
-            <a:pPr algn="ctr"/>
-            <a:endParaRPr/>
-          </a:p>
-        </p:txBody>
-      </p:sp>
-      <p:sp>
-        <p:nvSpPr>
-          <p:cNvPr id="7" name="Rounded Rectangle 6"/>
-          <p:cNvSpPr/>
-          <p:nvPr/>
-        </p:nvSpPr>
-        <p:spPr>
-          <a:xfrm>
-            <a:off x="5547360" y="1858296"/>
-            <a:ext cx="1463040" cy="914400"/>
-          </a:xfrm>
-          <a:prstGeom prst="roundRect">
-            <a:avLst/>
-          </a:prstGeom>
-          <a:solidFill>
-            <a:srgbClr val="ED7D31"/>
-          </a:solidFill>
-          <a:ln w="25400">
-            <a:solidFill>
-              <a:srgbClr val="000000"/>
-            </a:solidFill>
-          </a:ln>
-        </p:spPr>
-        <p:style>
-          <a:lnRef idx="1">
-            <a:schemeClr val="accent1"/>
-          </a:lnRef>
-          <a:fillRef idx="3">
-            <a:schemeClr val="accent1"/>
-          </a:fillRef>
-          <a:effectRef idx="2">
-            <a:schemeClr val="accent1"/>
-          </a:effectRef>
-          <a:fontRef idx="minor">
-            <a:schemeClr val="lt1"/>
-          </a:fontRef>
-        </p:style>
-        <p:txBody>
-          <a:bodyPr rtlCol="0" anchor="t"/>
-          <a:lstStyle/>
-          <a:p>
-            <a:pPr algn="ctr">
-              <a:defRPr sz="1800" b="1">
-                <a:solidFill>
-                  <a:srgbClr val="FFFFFF"/>
-                </a:solidFill>
-              </a:defRPr>
-            </a:pPr>
-            <a:r>
-              <a:t>PARSER</a:t>
-            </a:r>
-          </a:p>
-          <a:p>
-            <a:pPr algn="ctr">
-              <a:defRPr sz="1400">
-                <a:solidFill>
-                  <a:srgbClr val="FFFFFF"/>
-                </a:solidFill>
-              </a:defRPr>
-            </a:pPr>
-            <a:r>
-              <a:rPr sz="1400"/>
-              <a:t>Extract</a:t>
-            </a:r>
-            <a:br>
-              <a:rPr sz="1400"/>
-            </a:br>
-            <a:r>
-              <a:rPr sz="1400"/>
-              <a:t>Results</a:t>
-            </a:r>
-          </a:p>
-        </p:txBody>
-      </p:sp>
-      <p:sp>
-        <p:nvSpPr>
-          <p:cNvPr id="8" name="Right Arrow 7"/>
-          <p:cNvSpPr/>
-          <p:nvPr/>
-        </p:nvSpPr>
-        <p:spPr>
-          <a:xfrm>
-            <a:off x="7010400" y="2178336"/>
-            <a:ext cx="274320" cy="274320"/>
-          </a:xfrm>
-          <a:prstGeom prst="rightArrow">
-            <a:avLst/>
-          </a:prstGeom>
-          <a:solidFill>
-            <a:srgbClr val="444444"/>
-          </a:solidFill>
-          <a:ln>
-            <a:noFill/>
-          </a:ln>
-        </p:spPr>
-        <p:style>
-          <a:lnRef idx="1">
-            <a:schemeClr val="accent1"/>
-          </a:lnRef>
-          <a:fillRef idx="3">
-            <a:schemeClr val="accent1"/>
-          </a:fillRef>
-          <a:effectRef idx="2">
-            <a:schemeClr val="accent1"/>
-          </a:effectRef>
-          <a:fontRef idx="minor">
-            <a:schemeClr val="lt1"/>
-          </a:fontRef>
-        </p:style>
-        <p:txBody>
-          <a:bodyPr rtlCol="0" anchor="ctr"/>
-          <a:lstStyle/>
-          <a:p>
-            <a:pPr algn="ctr"/>
-            <a:endParaRPr/>
-          </a:p>
-        </p:txBody>
-      </p:sp>
-      <p:sp>
-        <p:nvSpPr>
-          <p:cNvPr id="9" name="Rounded Rectangle 8"/>
-          <p:cNvSpPr/>
-          <p:nvPr/>
-        </p:nvSpPr>
-        <p:spPr>
-          <a:xfrm>
-            <a:off x="7284720" y="1858296"/>
-            <a:ext cx="1463040" cy="914400"/>
-          </a:xfrm>
-          <a:prstGeom prst="roundRect">
-            <a:avLst/>
-          </a:prstGeom>
-          <a:solidFill>
-            <a:srgbClr val="9B59B6"/>
-          </a:solidFill>
-          <a:ln w="25400">
-            <a:solidFill>
-              <a:srgbClr val="000000"/>
-            </a:solidFill>
-          </a:ln>
-        </p:spPr>
-        <p:style>
-          <a:lnRef idx="1">
-            <a:schemeClr val="accent1"/>
-          </a:lnRef>
-          <a:fillRef idx="3">
-            <a:schemeClr val="accent1"/>
-          </a:fillRef>
-          <a:effectRef idx="2">
-            <a:schemeClr val="accent1"/>
-          </a:effectRef>
-          <a:fontRef idx="minor">
-            <a:schemeClr val="lt1"/>
-          </a:fontRef>
-        </p:style>
-        <p:txBody>
-          <a:bodyPr rtlCol="0" anchor="t"/>
-          <a:lstStyle/>
-          <a:p>
-            <a:pPr algn="ctr">
-              <a:defRPr sz="1800" b="1">
-                <a:solidFill>
-                  <a:srgbClr val="FFFFFF"/>
-                </a:solidFill>
-              </a:defRPr>
-            </a:pPr>
-            <a:r>
-              <a:t>ANALYZER</a:t>
-            </a:r>
-          </a:p>
-          <a:p>
-            <a:pPr algn="ctr">
-              <a:defRPr sz="1400">
-                <a:solidFill>
-                  <a:srgbClr val="FFFFFF"/>
-                </a:solidFill>
-              </a:defRPr>
-            </a:pPr>
-            <a:r>
-              <a:rPr sz="1400"/>
-              <a:t>Find</a:t>
-            </a:r>
-            <a:br>
-              <a:rPr sz="1400"/>
-            </a:br>
-            <a:r>
-              <a:rPr sz="1400"/>
-              <a:t>Issues</a:t>
-            </a:r>
-          </a:p>
-        </p:txBody>
-      </p:sp>
-      <p:sp>
-        <p:nvSpPr>
-          <p:cNvPr id="10" name="Right Arrow 9"/>
-          <p:cNvSpPr/>
-          <p:nvPr/>
-        </p:nvSpPr>
-        <p:spPr>
-          <a:xfrm>
-            <a:off x="8747760" y="2178336"/>
-            <a:ext cx="274320" cy="274320"/>
-          </a:xfrm>
-          <a:prstGeom prst="rightArrow">
-            <a:avLst/>
-          </a:prstGeom>
-          <a:solidFill>
-            <a:srgbClr val="444444"/>
-          </a:solidFill>
-          <a:ln>
-            <a:noFill/>
-          </a:ln>
-        </p:spPr>
-        <p:style>
-          <a:lnRef idx="1">
-            <a:schemeClr val="accent1"/>
-          </a:lnRef>
-          <a:fillRef idx="3">
-            <a:schemeClr val="accent1"/>
-          </a:fillRef>
-          <a:effectRef idx="2">
-            <a:schemeClr val="accent1"/>
-          </a:effectRef>
-          <a:fontRef idx="minor">
-            <a:schemeClr val="lt1"/>
-          </a:fontRef>
-        </p:style>
-        <p:txBody>
-          <a:bodyPr rtlCol="0" anchor="ctr"/>
-          <a:lstStyle/>
-          <a:p>
-            <a:pPr algn="ctr"/>
-            <a:endParaRPr/>
-          </a:p>
-        </p:txBody>
-      </p:sp>
-      <p:sp>
-        <p:nvSpPr>
-          <p:cNvPr id="11" name="Rounded Rectangle 10"/>
-          <p:cNvSpPr/>
-          <p:nvPr/>
-        </p:nvSpPr>
-        <p:spPr>
-          <a:xfrm>
-            <a:off x="9022080" y="1858296"/>
-            <a:ext cx="1463040" cy="914400"/>
-          </a:xfrm>
-          <a:prstGeom prst="roundRect">
-            <a:avLst/>
-          </a:prstGeom>
-          <a:solidFill>
-            <a:srgbClr val="3498DB"/>
-          </a:solidFill>
-          <a:ln w="25400">
-            <a:solidFill>
-              <a:srgbClr val="000000"/>
-            </a:solidFill>
-          </a:ln>
-        </p:spPr>
-        <p:style>
-          <a:lnRef idx="1">
-            <a:schemeClr val="accent1"/>
-          </a:lnRef>
-          <a:fillRef idx="3">
-            <a:schemeClr val="accent1"/>
-          </a:fillRef>
-          <a:effectRef idx="2">
-            <a:schemeClr val="accent1"/>
-          </a:effectRef>
-          <a:fontRef idx="minor">
-            <a:schemeClr val="lt1"/>
-          </a:fontRef>
-        </p:style>
-        <p:txBody>
-          <a:bodyPr rtlCol="0" anchor="t"/>
-          <a:lstStyle/>
-          <a:p>
-            <a:pPr algn="ctr">
-              <a:defRPr sz="1800" b="1">
-                <a:solidFill>
-                  <a:srgbClr val="FFFFFF"/>
-                </a:solidFill>
-              </a:defRPr>
-            </a:pPr>
-            <a:r>
-              <a:t>REPORTS</a:t>
-            </a:r>
-          </a:p>
-          <a:p>
-            <a:pPr algn="ctr">
-              <a:defRPr sz="1400">
-                <a:solidFill>
-                  <a:srgbClr val="FFFFFF"/>
-                </a:solidFill>
-              </a:defRPr>
-            </a:pPr>
-            <a:r>
-              <a:rPr sz="1400"/>
-              <a:t>Show</a:t>
-            </a:r>
-            <a:br>
-              <a:rPr sz="1400"/>
-            </a:br>
-            <a:r>
-              <a:rPr sz="1400"/>
-              <a:t>Causes</a:t>
-            </a:r>
-          </a:p>
-        </p:txBody>
-      </p:sp>
-      <p:sp>
-        <p:nvSpPr>
-          <p:cNvPr id="12" name="TextBox 11"/>
-          <p:cNvSpPr txBox="1"/>
-          <p:nvPr/>
-        </p:nvSpPr>
-        <p:spPr>
-          <a:xfrm>
-            <a:off x="1759974" y="3348371"/>
-            <a:ext cx="8829368" cy="2446824"/>
-          </a:xfrm>
-          <a:prstGeom prst="rect">
-            <a:avLst/>
-          </a:prstGeom>
-          <a:noFill/>
-        </p:spPr>
-        <p:txBody>
-          <a:bodyPr wrap="square">
-            <a:spAutoFit/>
-          </a:bodyPr>
-          <a:lstStyle/>
-          <a:p>
-            <a:pPr>
-              <a:defRPr sz="2000" b="1">
-                <a:solidFill>
-                  <a:srgbClr val="444444"/>
-                </a:solidFill>
-              </a:defRPr>
-            </a:pPr>
-            <a:r>
-              <a:rPr sz="2000" dirty="0"/>
-              <a:t>Simple Flow:</a:t>
-            </a:r>
-          </a:p>
-          <a:p>
-            <a:pPr>
-              <a:spcBef>
-                <a:spcPts val="600"/>
-              </a:spcBef>
-              <a:defRPr sz="1800">
-                <a:solidFill>
-                  <a:srgbClr val="444444"/>
-                </a:solidFill>
-              </a:defRPr>
-            </a:pPr>
-            <a:r>
-              <a:rPr dirty="0"/>
-              <a:t>1. Give </a:t>
-            </a:r>
-            <a:r>
-              <a:rPr lang="en-US" dirty="0"/>
-              <a:t>the </a:t>
-            </a:r>
-            <a:r>
-              <a:rPr dirty="0"/>
-              <a:t>test code and test results (XML files)</a:t>
-            </a:r>
-          </a:p>
-          <a:p>
-            <a:pPr>
-              <a:spcBef>
-                <a:spcPts val="600"/>
-              </a:spcBef>
-              <a:defRPr sz="1800">
-                <a:solidFill>
-                  <a:srgbClr val="444444"/>
-                </a:solidFill>
-              </a:defRPr>
-            </a:pPr>
-            <a:r>
-              <a:rPr dirty="0"/>
-              <a:t>2. Tool runs tests multiple times</a:t>
-            </a:r>
-          </a:p>
-          <a:p>
-            <a:pPr>
-              <a:spcBef>
-                <a:spcPts val="600"/>
-              </a:spcBef>
-              <a:defRPr sz="1800">
-                <a:solidFill>
-                  <a:srgbClr val="444444"/>
-                </a:solidFill>
-              </a:defRPr>
-            </a:pPr>
-            <a:r>
-              <a:rPr dirty="0"/>
-              <a:t>3. Parse and collect all test results (pass/fail data)</a:t>
-            </a:r>
-          </a:p>
-          <a:p>
-            <a:pPr>
-              <a:spcBef>
-                <a:spcPts val="600"/>
-              </a:spcBef>
-              <a:defRPr sz="1800">
-                <a:solidFill>
-                  <a:srgbClr val="444444"/>
-                </a:solidFill>
-              </a:defRPr>
-            </a:pPr>
-            <a:r>
-              <a:rPr dirty="0"/>
-              <a:t>4. </a:t>
-            </a:r>
-            <a:r>
-              <a:rPr lang="en-US" dirty="0"/>
-              <a:t>Analyze both the code and the results to identify flaky tests and risky code patterns (static &amp; dynamic analysis)</a:t>
-            </a:r>
-          </a:p>
-          <a:p>
-            <a:pPr>
-              <a:spcBef>
-                <a:spcPts val="600"/>
-              </a:spcBef>
-              <a:defRPr sz="1800">
-                <a:solidFill>
-                  <a:srgbClr val="444444"/>
-                </a:solidFill>
-              </a:defRPr>
-            </a:pPr>
-            <a:r>
-              <a:rPr dirty="0"/>
-              <a:t>5. Generate easy</a:t>
-            </a:r>
-            <a:r>
-              <a:rPr lang="en-US" dirty="0"/>
-              <a:t> </a:t>
-            </a:r>
-            <a:r>
-              <a:rPr dirty="0"/>
-              <a:t>to</a:t>
-            </a:r>
-            <a:r>
-              <a:rPr lang="en-US" dirty="0"/>
-              <a:t> </a:t>
-            </a:r>
-            <a:r>
-              <a:rPr dirty="0"/>
-              <a:t>read reports with explanations</a:t>
-            </a:r>
-          </a:p>
-        </p:txBody>
-      </p:sp>
-    </p:spTree>
-  </p:cSld>
-  <p:clrMapOvr>
-    <a:masterClrMapping/>
-  </p:clrMapOvr>
-</p:sld>
-</file>
-
-<file path=ppt/slides/slide5.xml><?xml version="1.0" encoding="utf-8"?>
-<p:sld xmlns:a="http://schemas.openxmlformats.org/drawingml/2006/main" xmlns:r="http://schemas.openxmlformats.org/officeDocument/2006/relationships" xmlns:p="http://schemas.openxmlformats.org/presentationml/2006/main">
-  <p:cSld>
-    <p:spTree>
-      <p:nvGrpSpPr>
-        <p:cNvPr id="1" name=""/>
-        <p:cNvGrpSpPr/>
-        <p:nvPr/>
-      </p:nvGrpSpPr>
-      <p:grpSpPr>
-        <a:xfrm>
-          <a:off x="0" y="0"/>
-          <a:ext cx="0" cy="0"/>
-          <a:chOff x="0" y="0"/>
-          <a:chExt cx="0" cy="0"/>
-        </a:xfrm>
-      </p:grpSpPr>
-      <p:sp>
-        <p:nvSpPr>
-          <p:cNvPr id="2" name="TextBox 1"/>
-          <p:cNvSpPr txBox="1"/>
-          <p:nvPr/>
-        </p:nvSpPr>
-        <p:spPr>
-          <a:xfrm>
-            <a:off x="3471051" y="274321"/>
-            <a:ext cx="5249899" cy="769441"/>
-          </a:xfrm>
-          <a:prstGeom prst="rect">
-            <a:avLst/>
-          </a:prstGeom>
-          <a:noFill/>
-        </p:spPr>
-        <p:txBody>
-          <a:bodyPr wrap="none">
-            <a:spAutoFit/>
-          </a:bodyPr>
-          <a:lstStyle/>
-          <a:p>
-            <a:pPr algn="ctr">
-              <a:defRPr sz="4400" b="1">
-                <a:solidFill>
-                  <a:srgbClr val="5CB85C"/>
-                </a:solidFill>
-              </a:defRPr>
-            </a:pPr>
-            <a:r>
-              <a:rPr sz="4400" dirty="0"/>
-              <a:t>What I </a:t>
-            </a:r>
-            <a:r>
-              <a:rPr lang="en-US" sz="4400" dirty="0"/>
-              <a:t>will</a:t>
-            </a:r>
-            <a:r>
-              <a:rPr sz="4400" dirty="0"/>
-              <a:t> </a:t>
-            </a:r>
-            <a:r>
-              <a:rPr lang="en-US" sz="4400" dirty="0"/>
-              <a:t>do</a:t>
-            </a:r>
-            <a:r>
-              <a:rPr sz="4400" dirty="0"/>
-              <a:t> - Part 1</a:t>
-            </a:r>
-          </a:p>
-        </p:txBody>
-      </p:sp>
-      <p:sp>
-        <p:nvSpPr>
-          <p:cNvPr id="3" name="TextBox 2"/>
-          <p:cNvSpPr txBox="1"/>
-          <p:nvPr/>
-        </p:nvSpPr>
-        <p:spPr>
-          <a:xfrm>
-            <a:off x="1616425" y="1434528"/>
-            <a:ext cx="9267886" cy="5016758"/>
-          </a:xfrm>
-          <a:prstGeom prst="rect">
-            <a:avLst/>
-          </a:prstGeom>
-          <a:noFill/>
-        </p:spPr>
-        <p:txBody>
-          <a:bodyPr wrap="square">
-            <a:spAutoFit/>
-          </a:bodyPr>
-          <a:lstStyle/>
-          <a:p>
-            <a:pPr>
-              <a:spcBef>
-                <a:spcPts val="1400"/>
-              </a:spcBef>
-              <a:spcAft>
-                <a:spcPts val="1000"/>
-              </a:spcAft>
-              <a:defRPr sz="2200">
-                <a:solidFill>
-                  <a:srgbClr val="444444"/>
-                </a:solidFill>
-              </a:defRPr>
-            </a:pPr>
-            <a:r>
-              <a:rPr sz="2400" dirty="0"/>
-              <a:t>1. </a:t>
-            </a:r>
-            <a:r>
-              <a:rPr lang="en-US" sz="2400" dirty="0"/>
-              <a:t>Develop a small C++ codebase with a </a:t>
-            </a:r>
-            <a:r>
-              <a:rPr lang="en-US" sz="2400" dirty="0" err="1"/>
-              <a:t>GoogleTest</a:t>
-            </a:r>
-            <a:r>
-              <a:rPr lang="en-US" sz="2400" dirty="0"/>
-              <a:t> suite containing both stable and intentionally flaky test cases</a:t>
-            </a:r>
-            <a:endParaRPr sz="2400" dirty="0"/>
-          </a:p>
-          <a:p>
-            <a:pPr>
-              <a:spcBef>
-                <a:spcPts val="1400"/>
-              </a:spcBef>
-              <a:spcAft>
-                <a:spcPts val="1000"/>
-              </a:spcAft>
-              <a:defRPr sz="2200">
-                <a:solidFill>
-                  <a:srgbClr val="444444"/>
-                </a:solidFill>
-              </a:defRPr>
-            </a:pPr>
-            <a:r>
-              <a:rPr sz="2400" dirty="0"/>
-              <a:t>2. Build a test runner that runs tests multiple times with different conditions</a:t>
-            </a:r>
-          </a:p>
-          <a:p>
-            <a:pPr>
-              <a:spcBef>
-                <a:spcPts val="1400"/>
-              </a:spcBef>
-              <a:spcAft>
-                <a:spcPts val="1000"/>
-              </a:spcAft>
-              <a:defRPr sz="2200">
-                <a:solidFill>
-                  <a:srgbClr val="444444"/>
-                </a:solidFill>
-              </a:defRPr>
-            </a:pPr>
-            <a:r>
-              <a:rPr sz="2400" dirty="0"/>
-              <a:t>3. Write a </a:t>
-            </a:r>
-            <a:r>
-              <a:rPr lang="en-US" sz="2400" dirty="0"/>
-              <a:t>lightweight</a:t>
-            </a:r>
-            <a:r>
-              <a:rPr sz="2400" dirty="0"/>
-              <a:t> XML parser to read test results </a:t>
-            </a:r>
-          </a:p>
-          <a:p>
-            <a:pPr>
-              <a:spcBef>
-                <a:spcPts val="1400"/>
-              </a:spcBef>
-              <a:spcAft>
-                <a:spcPts val="1000"/>
-              </a:spcAft>
-              <a:defRPr sz="2200">
-                <a:solidFill>
-                  <a:srgbClr val="444444"/>
-                </a:solidFill>
-              </a:defRPr>
-            </a:pPr>
-            <a:r>
-              <a:rPr sz="2400" dirty="0"/>
-              <a:t>4. </a:t>
-            </a:r>
-            <a:r>
-              <a:rPr lang="en-US" sz="2400" dirty="0"/>
-              <a:t>Apply mathematical analysis to quantify the flakiness coefficient of each test</a:t>
-            </a:r>
-            <a:endParaRPr sz="2400" dirty="0"/>
-          </a:p>
-          <a:p>
-            <a:pPr>
-              <a:spcBef>
-                <a:spcPts val="1400"/>
-              </a:spcBef>
-              <a:spcAft>
-                <a:spcPts val="1000"/>
-              </a:spcAft>
-              <a:defRPr sz="2200">
-                <a:solidFill>
-                  <a:srgbClr val="444444"/>
-                </a:solidFill>
-              </a:defRPr>
-            </a:pPr>
-            <a:r>
-              <a:rPr sz="2400" dirty="0"/>
-              <a:t>5. </a:t>
-            </a:r>
-            <a:r>
-              <a:rPr lang="en-US" sz="2400" dirty="0"/>
-              <a:t>Implement a lexical analyzer(</a:t>
-            </a:r>
-            <a:r>
-              <a:rPr lang="en-US" sz="2400" dirty="0" err="1"/>
-              <a:t>lexer</a:t>
-            </a:r>
-            <a:r>
-              <a:rPr lang="en-US" sz="2400" dirty="0"/>
-              <a:t>) , abstract syntax tree(AST) builder and control flow graph(CFG) generator as the foundation for later static checks</a:t>
-            </a:r>
-            <a:endParaRPr sz="2400" dirty="0"/>
-          </a:p>
-        </p:txBody>
-      </p:sp>
-    </p:spTree>
-  </p:cSld>
-  <p:clrMapOvr>
-    <a:masterClrMapping/>
-  </p:clrMapOvr>
-</p:sld>
-</file>
-
-<file path=ppt/slides/slide6.xml><?xml version="1.0" encoding="utf-8"?>
-<p:sld xmlns:a="http://schemas.openxmlformats.org/drawingml/2006/main" xmlns:r="http://schemas.openxmlformats.org/officeDocument/2006/relationships" xmlns:p="http://schemas.openxmlformats.org/presentationml/2006/main">
-  <p:cSld>
-    <p:spTree>
-      <p:nvGrpSpPr>
-        <p:cNvPr id="1" name=""/>
-        <p:cNvGrpSpPr/>
-        <p:nvPr/>
-      </p:nvGrpSpPr>
-      <p:grpSpPr>
-        <a:xfrm>
-          <a:off x="0" y="0"/>
-          <a:ext cx="0" cy="0"/>
-          <a:chOff x="0" y="0"/>
-          <a:chExt cx="0" cy="0"/>
-        </a:xfrm>
-      </p:grpSpPr>
-      <p:sp>
-        <p:nvSpPr>
-          <p:cNvPr id="2" name="TextBox 1"/>
-          <p:cNvSpPr txBox="1"/>
-          <p:nvPr/>
-        </p:nvSpPr>
-        <p:spPr>
-          <a:xfrm>
-            <a:off x="3471051" y="274321"/>
-            <a:ext cx="5249899" cy="769441"/>
-          </a:xfrm>
-          <a:prstGeom prst="rect">
-            <a:avLst/>
-          </a:prstGeom>
-          <a:noFill/>
-        </p:spPr>
-        <p:txBody>
-          <a:bodyPr wrap="none">
-            <a:spAutoFit/>
-          </a:bodyPr>
-          <a:lstStyle/>
-          <a:p>
-            <a:pPr algn="ctr">
-              <a:defRPr sz="4400" b="1">
-                <a:solidFill>
-                  <a:srgbClr val="5CB85C"/>
-                </a:solidFill>
-              </a:defRPr>
-            </a:pPr>
-            <a:r>
-              <a:rPr lang="en-US" sz="4400" dirty="0"/>
-              <a:t>What I will do </a:t>
-            </a:r>
-            <a:r>
-              <a:rPr sz="4400" dirty="0"/>
-              <a:t>- Part 2</a:t>
-            </a:r>
-          </a:p>
-        </p:txBody>
-      </p:sp>
-      <p:sp>
-        <p:nvSpPr>
-          <p:cNvPr id="3" name="TextBox 2"/>
-          <p:cNvSpPr txBox="1"/>
-          <p:nvPr/>
-        </p:nvSpPr>
-        <p:spPr>
-          <a:xfrm>
-            <a:off x="1921226" y="1306707"/>
-            <a:ext cx="8599293" cy="4647426"/>
-          </a:xfrm>
-          <a:prstGeom prst="rect">
-            <a:avLst/>
-          </a:prstGeom>
-          <a:noFill/>
-        </p:spPr>
-        <p:txBody>
-          <a:bodyPr wrap="square">
-            <a:spAutoFit/>
-          </a:bodyPr>
-          <a:lstStyle/>
-          <a:p>
-            <a:pPr>
-              <a:spcBef>
-                <a:spcPts val="1400"/>
-              </a:spcBef>
-              <a:spcAft>
-                <a:spcPts val="1000"/>
-              </a:spcAft>
-              <a:defRPr sz="2200">
-                <a:solidFill>
-                  <a:srgbClr val="444444"/>
-                </a:solidFill>
-              </a:defRPr>
-            </a:pPr>
-            <a:r>
-              <a:rPr sz="2400" dirty="0"/>
-              <a:t>1. Check code for bugs (out of bounds, null pointers, memory leaks, etc.)</a:t>
-            </a:r>
-          </a:p>
-          <a:p>
-            <a:pPr>
-              <a:spcBef>
-                <a:spcPts val="1400"/>
-              </a:spcBef>
-              <a:spcAft>
-                <a:spcPts val="1000"/>
-              </a:spcAft>
-              <a:defRPr sz="2200">
-                <a:solidFill>
-                  <a:srgbClr val="444444"/>
-                </a:solidFill>
-              </a:defRPr>
-            </a:pPr>
-            <a:r>
-              <a:rPr sz="2400" dirty="0"/>
-              <a:t>2. Look for flakiness patterns</a:t>
-            </a:r>
-            <a:r>
-              <a:rPr lang="en-US" sz="2400" dirty="0"/>
-              <a:t> like random usage without seeding, sleep based timing and environment/time dependencies</a:t>
-            </a:r>
-            <a:endParaRPr sz="2400" dirty="0"/>
-          </a:p>
-          <a:p>
-            <a:pPr>
-              <a:spcBef>
-                <a:spcPts val="1400"/>
-              </a:spcBef>
-              <a:spcAft>
-                <a:spcPts val="1000"/>
-              </a:spcAft>
-              <a:defRPr sz="2200">
-                <a:solidFill>
-                  <a:srgbClr val="444444"/>
-                </a:solidFill>
-              </a:defRPr>
-            </a:pPr>
-            <a:r>
-              <a:rPr sz="2400" dirty="0"/>
-              <a:t>3. Add simple machine learning (logistic regression) to predict flaky tests</a:t>
-            </a:r>
-          </a:p>
-          <a:p>
-            <a:pPr>
-              <a:spcBef>
-                <a:spcPts val="1400"/>
-              </a:spcBef>
-              <a:spcAft>
-                <a:spcPts val="1000"/>
-              </a:spcAft>
-              <a:defRPr sz="2200">
-                <a:solidFill>
-                  <a:srgbClr val="444444"/>
-                </a:solidFill>
-              </a:defRPr>
-            </a:pPr>
-            <a:r>
-              <a:rPr sz="2400" dirty="0"/>
-              <a:t>4. </a:t>
-            </a:r>
-            <a:r>
-              <a:rPr lang="en-US" sz="2400" dirty="0"/>
-              <a:t>Correlate dynamic test outcomes with static code findings to trace probable root causes</a:t>
-            </a:r>
-            <a:endParaRPr sz="2400" dirty="0"/>
-          </a:p>
-          <a:p>
-            <a:pPr>
-              <a:spcBef>
-                <a:spcPts val="1400"/>
-              </a:spcBef>
-              <a:spcAft>
-                <a:spcPts val="1000"/>
-              </a:spcAft>
-              <a:defRPr sz="2200">
-                <a:solidFill>
-                  <a:srgbClr val="444444"/>
-                </a:solidFill>
-              </a:defRPr>
-            </a:pPr>
-            <a:r>
-              <a:rPr sz="2400" dirty="0"/>
-              <a:t>5. </a:t>
-            </a:r>
-            <a:r>
-              <a:rPr lang="en-US" sz="2400" dirty="0"/>
-              <a:t>Implement a command line interface (CLI) with simple commands</a:t>
-            </a:r>
-            <a:endParaRPr sz="2400" dirty="0"/>
-          </a:p>
-        </p:txBody>
-      </p:sp>
-    </p:spTree>
-  </p:cSld>
-  <p:clrMapOvr>
-    <a:masterClrMapping/>
-  </p:clrMapOvr>
-</p:sld>
-</file>
-
-<file path=ppt/slides/slide7.xml><?xml version="1.0" encoding="utf-8"?>
-<p:sld xmlns:a="http://schemas.openxmlformats.org/drawingml/2006/main" xmlns:r="http://schemas.openxmlformats.org/officeDocument/2006/relationships" xmlns:p="http://schemas.openxmlformats.org/presentationml/2006/main">
-  <p:cSld>
-    <p:spTree>
-      <p:nvGrpSpPr>
-        <p:cNvPr id="1" name=""/>
-        <p:cNvGrpSpPr/>
-        <p:nvPr/>
-      </p:nvGrpSpPr>
-      <p:grpSpPr>
-        <a:xfrm>
-          <a:off x="0" y="0"/>
-          <a:ext cx="0" cy="0"/>
-          <a:chOff x="0" y="0"/>
-          <a:chExt cx="0" cy="0"/>
-        </a:xfrm>
-      </p:grpSpPr>
-      <p:sp>
-        <p:nvSpPr>
-          <p:cNvPr id="2" name="TextBox 1"/>
-          <p:cNvSpPr txBox="1"/>
-          <p:nvPr/>
-        </p:nvSpPr>
-        <p:spPr>
-          <a:xfrm>
-            <a:off x="3471051" y="274321"/>
-            <a:ext cx="5249899" cy="769441"/>
-          </a:xfrm>
-          <a:prstGeom prst="rect">
-            <a:avLst/>
-          </a:prstGeom>
-          <a:noFill/>
-        </p:spPr>
-        <p:txBody>
-          <a:bodyPr wrap="none">
-            <a:spAutoFit/>
-          </a:bodyPr>
-          <a:lstStyle/>
-          <a:p>
-            <a:pPr algn="ctr">
-              <a:defRPr sz="4400" b="1">
-                <a:solidFill>
-                  <a:srgbClr val="5CB85C"/>
-                </a:solidFill>
-              </a:defRPr>
-            </a:pPr>
-            <a:r>
-              <a:rPr lang="en-US" sz="4400" dirty="0"/>
-              <a:t>What I will do </a:t>
-            </a:r>
-            <a:r>
-              <a:rPr sz="4400" dirty="0"/>
-              <a:t>- Part 3</a:t>
-            </a:r>
-          </a:p>
-        </p:txBody>
-      </p:sp>
-      <p:sp>
-        <p:nvSpPr>
-          <p:cNvPr id="3" name="TextBox 2"/>
-          <p:cNvSpPr txBox="1"/>
-          <p:nvPr/>
-        </p:nvSpPr>
-        <p:spPr>
-          <a:xfrm>
-            <a:off x="2068708" y="1523018"/>
-            <a:ext cx="8196170" cy="3170099"/>
-          </a:xfrm>
-          <a:prstGeom prst="rect">
-            <a:avLst/>
-          </a:prstGeom>
-          <a:noFill/>
-        </p:spPr>
-        <p:txBody>
-          <a:bodyPr wrap="square">
-            <a:spAutoFit/>
-          </a:bodyPr>
-          <a:lstStyle/>
-          <a:p>
-            <a:pPr>
-              <a:spcBef>
-                <a:spcPts val="1400"/>
-              </a:spcBef>
-              <a:spcAft>
-                <a:spcPts val="1000"/>
-              </a:spcAft>
-              <a:defRPr sz="2200">
-                <a:solidFill>
-                  <a:srgbClr val="444444"/>
-                </a:solidFill>
-              </a:defRPr>
-            </a:pPr>
-            <a:r>
-              <a:rPr sz="2400" dirty="0"/>
-              <a:t>1. Create clear reports</a:t>
-            </a:r>
-          </a:p>
-          <a:p>
-            <a:pPr>
-              <a:spcBef>
-                <a:spcPts val="1400"/>
-              </a:spcBef>
-              <a:spcAft>
-                <a:spcPts val="1000"/>
-              </a:spcAft>
-              <a:defRPr sz="2200">
-                <a:solidFill>
-                  <a:srgbClr val="444444"/>
-                </a:solidFill>
-              </a:defRPr>
-            </a:pPr>
-            <a:r>
-              <a:rPr sz="2400" dirty="0"/>
-              <a:t>2. Write documentation explaining how to use the tool</a:t>
-            </a:r>
-          </a:p>
-          <a:p>
-            <a:pPr>
-              <a:spcBef>
-                <a:spcPts val="1400"/>
-              </a:spcBef>
-              <a:spcAft>
-                <a:spcPts val="1000"/>
-              </a:spcAft>
-              <a:defRPr sz="2200">
-                <a:solidFill>
-                  <a:srgbClr val="444444"/>
-                </a:solidFill>
-              </a:defRPr>
-            </a:pPr>
-            <a:r>
-              <a:rPr sz="2400" dirty="0"/>
-              <a:t>3. Test the tool on demo project to prove it works</a:t>
-            </a:r>
-          </a:p>
-          <a:p>
-            <a:pPr>
-              <a:spcBef>
-                <a:spcPts val="1400"/>
-              </a:spcBef>
-              <a:spcAft>
-                <a:spcPts val="1000"/>
-              </a:spcAft>
-              <a:defRPr sz="2200">
-                <a:solidFill>
-                  <a:srgbClr val="444444"/>
-                </a:solidFill>
-              </a:defRPr>
-            </a:pPr>
-            <a:r>
-              <a:rPr sz="2400" dirty="0"/>
-              <a:t>4. Show root causes </a:t>
-            </a:r>
-            <a:r>
-              <a:rPr lang="en-US" sz="2400" dirty="0"/>
-              <a:t>:</a:t>
-            </a:r>
-            <a:r>
-              <a:rPr sz="2400" dirty="0"/>
-              <a:t> explain </a:t>
-            </a:r>
-            <a:r>
-              <a:rPr lang="en-US" sz="2400" dirty="0"/>
-              <a:t>why</a:t>
-            </a:r>
-            <a:r>
-              <a:rPr sz="2400" dirty="0"/>
-              <a:t> each test is flaky</a:t>
-            </a:r>
-          </a:p>
-          <a:p>
-            <a:pPr>
-              <a:spcBef>
-                <a:spcPts val="1400"/>
-              </a:spcBef>
-              <a:spcAft>
-                <a:spcPts val="1000"/>
-              </a:spcAft>
-              <a:defRPr sz="2200">
-                <a:solidFill>
-                  <a:srgbClr val="444444"/>
-                </a:solidFill>
-              </a:defRPr>
-            </a:pPr>
-            <a:r>
-              <a:rPr sz="2400" dirty="0"/>
-              <a:t>5. Deliver working tool + demo + complete documentation</a:t>
-            </a:r>
-          </a:p>
-        </p:txBody>
-      </p:sp>
-    </p:spTree>
-  </p:cSld>
-  <p:clrMapOvr>
-    <a:masterClrMapping/>
-  </p:clrMapOvr>
-</p:sld>
-</file>
-
-<file path=ppt/slides/slide8.xml><?xml version="1.0" encoding="utf-8"?>
-<p:sld xmlns:a="http://schemas.openxmlformats.org/drawingml/2006/main" xmlns:r="http://schemas.openxmlformats.org/officeDocument/2006/relationships" xmlns:p="http://schemas.openxmlformats.org/presentationml/2006/main">
-  <p:cSld>
-    <p:spTree>
-      <p:nvGrpSpPr>
-        <p:cNvPr id="1" name=""/>
-        <p:cNvGrpSpPr/>
-        <p:nvPr/>
-      </p:nvGrpSpPr>
-      <p:grpSpPr>
-        <a:xfrm>
-          <a:off x="0" y="0"/>
-          <a:ext cx="0" cy="0"/>
-          <a:chOff x="0" y="0"/>
-          <a:chExt cx="0" cy="0"/>
-        </a:xfrm>
-      </p:grpSpPr>
-      <p:sp>
-        <p:nvSpPr>
-          <p:cNvPr id="2" name="TextBox 1"/>
-          <p:cNvSpPr txBox="1"/>
-          <p:nvPr/>
-        </p:nvSpPr>
-        <p:spPr>
-          <a:xfrm>
-            <a:off x="3006181" y="274321"/>
-            <a:ext cx="6179640" cy="769441"/>
-          </a:xfrm>
-          <a:prstGeom prst="rect">
-            <a:avLst/>
-          </a:prstGeom>
-          <a:noFill/>
-        </p:spPr>
-        <p:txBody>
-          <a:bodyPr wrap="none">
-            <a:spAutoFit/>
-          </a:bodyPr>
-          <a:lstStyle/>
-          <a:p>
-            <a:pPr algn="ctr">
-              <a:defRPr sz="4400" b="1">
-                <a:solidFill>
-                  <a:srgbClr val="D9534F"/>
-                </a:solidFill>
-              </a:defRPr>
-            </a:pPr>
-            <a:r>
-              <a:rPr sz="4400" dirty="0"/>
-              <a:t>What I </a:t>
-            </a:r>
-            <a:r>
-              <a:rPr lang="en-US" sz="4400" dirty="0"/>
-              <a:t>will</a:t>
-            </a:r>
-            <a:r>
-              <a:rPr sz="4400" dirty="0"/>
-              <a:t> </a:t>
-            </a:r>
-            <a:r>
-              <a:rPr lang="en-US" sz="4400" dirty="0"/>
-              <a:t>not do </a:t>
-            </a:r>
-            <a:r>
-              <a:rPr sz="4400" dirty="0"/>
-              <a:t>- Part 1</a:t>
-            </a:r>
-          </a:p>
-        </p:txBody>
-      </p:sp>
-      <p:sp>
-        <p:nvSpPr>
-          <p:cNvPr id="3" name="TextBox 2"/>
-          <p:cNvSpPr txBox="1"/>
-          <p:nvPr/>
-        </p:nvSpPr>
-        <p:spPr>
-          <a:xfrm>
-            <a:off x="1754078" y="1385365"/>
-            <a:ext cx="8766438" cy="4278094"/>
-          </a:xfrm>
-          <a:prstGeom prst="rect">
-            <a:avLst/>
-          </a:prstGeom>
-          <a:noFill/>
-        </p:spPr>
-        <p:txBody>
-          <a:bodyPr wrap="square">
-            <a:spAutoFit/>
-          </a:bodyPr>
-          <a:lstStyle/>
-          <a:p>
-            <a:pPr>
-              <a:spcBef>
-                <a:spcPts val="1400"/>
-              </a:spcBef>
-              <a:spcAft>
-                <a:spcPts val="1000"/>
-              </a:spcAft>
-              <a:defRPr sz="2200">
-                <a:solidFill>
-                  <a:srgbClr val="444444"/>
-                </a:solidFill>
-              </a:defRPr>
-            </a:pPr>
-            <a:r>
-              <a:rPr sz="2400" dirty="0"/>
-              <a:t>1. Use big heavy libraries (LLVM, Clang, SQLite, etc.) </a:t>
-            </a:r>
-            <a:r>
-              <a:rPr lang="en-US" sz="2400" dirty="0"/>
-              <a:t>-</a:t>
-            </a:r>
-            <a:r>
-              <a:rPr sz="2400" dirty="0"/>
-              <a:t> keeping it simple</a:t>
-            </a:r>
-          </a:p>
-          <a:p>
-            <a:pPr>
-              <a:spcBef>
-                <a:spcPts val="1400"/>
-              </a:spcBef>
-              <a:spcAft>
-                <a:spcPts val="1000"/>
-              </a:spcAft>
-              <a:defRPr sz="2200">
-                <a:solidFill>
-                  <a:srgbClr val="444444"/>
-                </a:solidFill>
-              </a:defRPr>
-            </a:pPr>
-            <a:r>
-              <a:rPr sz="2400" dirty="0"/>
-              <a:t>2. Build a full C++ compiler </a:t>
-            </a:r>
-            <a:r>
-              <a:rPr lang="en-US" sz="2400" dirty="0"/>
-              <a:t>–</a:t>
-            </a:r>
-            <a:r>
-              <a:rPr sz="2400" dirty="0"/>
-              <a:t> </a:t>
-            </a:r>
-            <a:r>
-              <a:rPr lang="en-US" sz="2400" dirty="0"/>
-              <a:t>analysis will be function level , not full program</a:t>
-            </a:r>
-            <a:endParaRPr sz="2400" dirty="0"/>
-          </a:p>
-          <a:p>
-            <a:pPr>
-              <a:spcBef>
-                <a:spcPts val="1400"/>
-              </a:spcBef>
-              <a:spcAft>
-                <a:spcPts val="1000"/>
-              </a:spcAft>
-              <a:defRPr sz="2200">
-                <a:solidFill>
-                  <a:srgbClr val="444444"/>
-                </a:solidFill>
-              </a:defRPr>
-            </a:pPr>
-            <a:r>
-              <a:rPr sz="2400" dirty="0"/>
-              <a:t>3. Auto</a:t>
-            </a:r>
-            <a:r>
-              <a:rPr lang="en-US" sz="2400" dirty="0"/>
-              <a:t> </a:t>
-            </a:r>
-            <a:r>
-              <a:rPr sz="2400" dirty="0"/>
-              <a:t>fix code </a:t>
-            </a:r>
-            <a:r>
-              <a:rPr lang="en-US" sz="2400" dirty="0"/>
-              <a:t>or tests </a:t>
-            </a:r>
-            <a:r>
-              <a:rPr sz="2400" dirty="0"/>
-              <a:t>- tool only finds and explains problems</a:t>
-            </a:r>
-          </a:p>
-          <a:p>
-            <a:pPr>
-              <a:spcBef>
-                <a:spcPts val="1400"/>
-              </a:spcBef>
-              <a:spcAft>
-                <a:spcPts val="1000"/>
-              </a:spcAft>
-              <a:defRPr sz="2200">
-                <a:solidFill>
-                  <a:srgbClr val="444444"/>
-                </a:solidFill>
-              </a:defRPr>
-            </a:pPr>
-            <a:r>
-              <a:rPr sz="2400" dirty="0"/>
-              <a:t>4. Follow all security standards (MISRA/CERT) - just practical useful checks</a:t>
-            </a:r>
-          </a:p>
-          <a:p>
-            <a:pPr>
-              <a:spcBef>
-                <a:spcPts val="1400"/>
-              </a:spcBef>
-              <a:spcAft>
-                <a:spcPts val="1000"/>
-              </a:spcAft>
-              <a:defRPr sz="2200">
-                <a:solidFill>
-                  <a:srgbClr val="444444"/>
-                </a:solidFill>
-              </a:defRPr>
-            </a:pPr>
-            <a:r>
-              <a:rPr sz="2400" dirty="0"/>
-              <a:t>5. Support many languages - focusing on C++ only</a:t>
-            </a:r>
+            <a:fld id="{C1FF6DA9-008F-8B48-92A6-B652298478BF}" type="slidenum">
+              <a:rPr lang="en-US" smtClean="0"/>
+              <a:t>8</a:t>
+            </a:fld>
+            <a:endParaRPr lang="en-US"/>
           </a:p>
         </p:txBody>
       </p:sp>
@@ -6487,8 +6515,8 @@
         </p:nvSpPr>
         <p:spPr>
           <a:xfrm>
-            <a:off x="3006180" y="274321"/>
-            <a:ext cx="6179640" cy="769441"/>
+            <a:off x="4417496" y="274321"/>
+            <a:ext cx="3357009" cy="769441"/>
           </a:xfrm>
           <a:prstGeom prst="rect">
             <a:avLst/>
@@ -6504,17 +6532,13 @@
             <a:pPr algn="ctr">
               <a:defRPr sz="4400" b="1">
                 <a:solidFill>
-                  <a:srgbClr val="D9534F"/>
-                </a:solidFill>
-              </a:defRPr>
-            </a:pPr>
-            <a:r>
-              <a:rPr lang="en-US" sz="4400" dirty="0"/>
-              <a:t>What I will not do </a:t>
-            </a:r>
-            <a:r>
-              <a:rPr sz="4400" dirty="0"/>
-              <a:t>- Part 2</a:t>
+                  <a:srgbClr val="1F4E79"/>
+                </a:solidFill>
+              </a:defRPr>
+            </a:pPr>
+            <a:r>
+              <a:rPr sz="4400"/>
+              <a:t>Project Scope</a:t>
             </a:r>
           </a:p>
         </p:txBody>
@@ -6527,8 +6551,8 @@
         </p:nvSpPr>
         <p:spPr>
           <a:xfrm>
-            <a:off x="1675419" y="1699998"/>
-            <a:ext cx="9376039" cy="3539430"/>
+            <a:off x="2144421" y="2158176"/>
+            <a:ext cx="2850364" cy="3016210"/>
           </a:xfrm>
           <a:prstGeom prst="rect">
             <a:avLst/>
@@ -6541,13 +6565,23 @@
           </a:bodyPr>
           <a:lstStyle/>
           <a:p>
+            <a:pPr algn="ctr">
+              <a:defRPr sz="3000" b="1">
+                <a:solidFill>
+                  <a:srgbClr val="5CB85C"/>
+                </a:solidFill>
+              </a:defRPr>
+            </a:pPr>
+            <a:r>
+              <a:rPr sz="3000" dirty="0"/>
+              <a:t>What's Included</a:t>
+            </a:r>
+          </a:p>
+          <a:p>
             <a:pPr>
               <a:spcBef>
-                <a:spcPts val="1400"/>
+                <a:spcPts val="1200"/>
               </a:spcBef>
-              <a:spcAft>
-                <a:spcPts val="1000"/>
-              </a:spcAft>
               <a:defRPr sz="2200">
                 <a:solidFill>
                   <a:srgbClr val="444444"/>
@@ -6555,18 +6589,20 @@
               </a:defRPr>
             </a:pPr>
             <a:r>
-              <a:rPr sz="2400" dirty="0"/>
-              <a:t>1. Make plugins for GitHub Actions or Jenkins - just making reports</a:t>
-            </a:r>
+              <a:rPr sz="2200" dirty="0"/>
+              <a:t>• C++ and </a:t>
+            </a:r>
+            <a:r>
+              <a:rPr sz="2200" dirty="0" err="1"/>
+              <a:t>GoogleTest</a:t>
+            </a:r>
+            <a:endParaRPr sz="2200" dirty="0"/>
           </a:p>
           <a:p>
             <a:pPr>
               <a:spcBef>
-                <a:spcPts val="1400"/>
+                <a:spcPts val="1200"/>
               </a:spcBef>
-              <a:spcAft>
-                <a:spcPts val="1000"/>
-              </a:spcAft>
               <a:defRPr sz="2200">
                 <a:solidFill>
                   <a:srgbClr val="444444"/>
@@ -6574,18 +6610,15 @@
               </a:defRPr>
             </a:pPr>
             <a:r>
-              <a:rPr sz="2400" dirty="0"/>
-              <a:t>2. Build a fancy GUI app - simple command line tool only</a:t>
+              <a:rPr sz="2200" dirty="0"/>
+              <a:t>• Simple and fast</a:t>
             </a:r>
           </a:p>
           <a:p>
             <a:pPr>
               <a:spcBef>
-                <a:spcPts val="1400"/>
+                <a:spcPts val="1200"/>
               </a:spcBef>
-              <a:spcAft>
-                <a:spcPts val="1000"/>
-              </a:spcAft>
               <a:defRPr sz="2200">
                 <a:solidFill>
                   <a:srgbClr val="444444"/>
@@ -6593,18 +6626,15 @@
               </a:defRPr>
             </a:pPr>
             <a:r>
-              <a:rPr sz="2400" dirty="0"/>
-              <a:t>3. Train big ML models with datasets - just simple built-in regression</a:t>
+              <a:rPr sz="2200" dirty="0"/>
+              <a:t>• Find flaky tests</a:t>
             </a:r>
           </a:p>
           <a:p>
             <a:pPr>
               <a:spcBef>
-                <a:spcPts val="1400"/>
+                <a:spcPts val="1200"/>
               </a:spcBef>
-              <a:spcAft>
-                <a:spcPts val="1000"/>
-              </a:spcAft>
               <a:defRPr sz="2200">
                 <a:solidFill>
                   <a:srgbClr val="444444"/>
@@ -6612,26 +6642,15 @@
               </a:defRPr>
             </a:pPr>
             <a:r>
-              <a:rPr sz="2400" dirty="0"/>
-              <a:t>4. Replace advanced tools like sanitizers - </a:t>
-            </a:r>
-            <a:r>
-              <a:rPr lang="en-US" sz="2400" dirty="0"/>
-              <a:t>mine</a:t>
-            </a:r>
-            <a:r>
-              <a:rPr sz="2400" dirty="0"/>
-              <a:t> is a helper tool</a:t>
+              <a:rPr sz="2200" dirty="0"/>
+              <a:t>• Explain why they fail</a:t>
             </a:r>
           </a:p>
           <a:p>
             <a:pPr>
               <a:spcBef>
-                <a:spcPts val="1400"/>
+                <a:spcPts val="1200"/>
               </a:spcBef>
-              <a:spcAft>
-                <a:spcPts val="1000"/>
-              </a:spcAft>
               <a:defRPr sz="2200">
                 <a:solidFill>
                   <a:srgbClr val="444444"/>
@@ -6639,22 +6658,154 @@
               </a:defRPr>
             </a:pPr>
             <a:r>
-              <a:rPr sz="2400" dirty="0"/>
-              <a:t>5. </a:t>
-            </a:r>
-            <a:r>
-              <a:rPr lang="en-US" sz="2400" dirty="0"/>
-              <a:t>Implement additional compiler components beyond the minimal </a:t>
-            </a:r>
-            <a:r>
-              <a:rPr lang="en-US" sz="2400" dirty="0" err="1"/>
-              <a:t>lexer</a:t>
-            </a:r>
-            <a:r>
-              <a:rPr lang="en-US" sz="2400" dirty="0"/>
-              <a:t>, AST and CFG needed for static checks</a:t>
-            </a:r>
-            <a:endParaRPr sz="2400" dirty="0"/>
+              <a:rPr sz="2200" dirty="0"/>
+              <a:t>• Easy to use</a:t>
+            </a:r>
+          </a:p>
+        </p:txBody>
+      </p:sp>
+      <p:sp>
+        <p:nvSpPr>
+          <p:cNvPr id="4" name="TextBox 3"/>
+          <p:cNvSpPr txBox="1"/>
+          <p:nvPr/>
+        </p:nvSpPr>
+        <p:spPr>
+          <a:xfrm>
+            <a:off x="7416469" y="2158176"/>
+            <a:ext cx="2850363" cy="3016210"/>
+          </a:xfrm>
+          <a:prstGeom prst="rect">
+            <a:avLst/>
+          </a:prstGeom>
+          <a:noFill/>
+        </p:spPr>
+        <p:txBody>
+          <a:bodyPr wrap="square">
+            <a:spAutoFit/>
+          </a:bodyPr>
+          <a:lstStyle/>
+          <a:p>
+            <a:pPr algn="ctr">
+              <a:defRPr sz="3000" b="1">
+                <a:solidFill>
+                  <a:srgbClr val="D9534F"/>
+                </a:solidFill>
+              </a:defRPr>
+            </a:pPr>
+            <a:r>
+              <a:rPr sz="3000" dirty="0"/>
+              <a:t>Not Included</a:t>
+            </a:r>
+          </a:p>
+          <a:p>
+            <a:pPr>
+              <a:spcBef>
+                <a:spcPts val="1200"/>
+              </a:spcBef>
+              <a:defRPr sz="2200">
+                <a:solidFill>
+                  <a:srgbClr val="444444"/>
+                </a:solidFill>
+              </a:defRPr>
+            </a:pPr>
+            <a:r>
+              <a:rPr sz="2200" dirty="0"/>
+              <a:t>• Big complex libraries</a:t>
+            </a:r>
+          </a:p>
+          <a:p>
+            <a:pPr>
+              <a:spcBef>
+                <a:spcPts val="1200"/>
+              </a:spcBef>
+              <a:defRPr sz="2200">
+                <a:solidFill>
+                  <a:srgbClr val="444444"/>
+                </a:solidFill>
+              </a:defRPr>
+            </a:pPr>
+            <a:r>
+              <a:rPr sz="2200" dirty="0"/>
+              <a:t>• Full compiler</a:t>
+            </a:r>
+          </a:p>
+          <a:p>
+            <a:pPr>
+              <a:spcBef>
+                <a:spcPts val="1200"/>
+              </a:spcBef>
+              <a:defRPr sz="2200">
+                <a:solidFill>
+                  <a:srgbClr val="444444"/>
+                </a:solidFill>
+              </a:defRPr>
+            </a:pPr>
+            <a:r>
+              <a:rPr sz="2200" dirty="0"/>
+              <a:t>• Auto code fixing</a:t>
+            </a:r>
+          </a:p>
+          <a:p>
+            <a:pPr>
+              <a:spcBef>
+                <a:spcPts val="1200"/>
+              </a:spcBef>
+              <a:defRPr sz="2200">
+                <a:solidFill>
+                  <a:srgbClr val="444444"/>
+                </a:solidFill>
+              </a:defRPr>
+            </a:pPr>
+            <a:r>
+              <a:rPr sz="2200" dirty="0"/>
+              <a:t>• Multiple languages</a:t>
+            </a:r>
+          </a:p>
+          <a:p>
+            <a:pPr>
+              <a:spcBef>
+                <a:spcPts val="1200"/>
+              </a:spcBef>
+              <a:defRPr sz="2200">
+                <a:solidFill>
+                  <a:srgbClr val="444444"/>
+                </a:solidFill>
+              </a:defRPr>
+            </a:pPr>
+            <a:r>
+              <a:rPr sz="2200" dirty="0"/>
+              <a:t>• Fancy GUI</a:t>
+            </a:r>
+          </a:p>
+        </p:txBody>
+      </p:sp>
+      <p:sp>
+        <p:nvSpPr>
+          <p:cNvPr id="5" name="Slide Number Placeholder 4">
+            <a:extLst>
+              <a:ext uri="{FF2B5EF4-FFF2-40B4-BE49-F238E27FC236}">
+                <a16:creationId xmlns:a16="http://schemas.microsoft.com/office/drawing/2014/main" id="{CA6EB711-C6BC-CCC5-27C1-F8563EA43EED}"/>
+              </a:ext>
+            </a:extLst>
+          </p:cNvPr>
+          <p:cNvSpPr>
+            <a:spLocks noGrp="1"/>
+          </p:cNvSpPr>
+          <p:nvPr>
+            <p:ph type="sldNum" sz="quarter" idx="12"/>
+          </p:nvPr>
+        </p:nvSpPr>
+        <p:spPr/>
+        <p:txBody>
+          <a:bodyPr/>
+          <a:lstStyle/>
+          <a:p>
+            <a:fld id="{C1FF6DA9-008F-8B48-92A6-B652298478BF}" type="slidenum">
+              <a:rPr lang="en-US" smtClean="0"/>
+              <a:t>9</a:t>
+            </a:fld>
+            <a:endParaRPr lang="en-US"/>
           </a:p>
         </p:txBody>
       </p:sp>
@@ -6984,4 +7135,319 @@
   </a:objectDefaults>
   <a:extraClrSchemeLst/>
 </a:theme>
+</file>
+
+<file path=ppt/theme/theme2.xml><?xml version="1.0" encoding="utf-8"?>
+<a:theme xmlns:a="http://schemas.openxmlformats.org/drawingml/2006/main" name="Office Theme">
+  <a:themeElements>
+    <a:clrScheme name="Office">
+      <a:dk1>
+        <a:sysClr val="windowText" lastClr="000000"/>
+      </a:dk1>
+      <a:lt1>
+        <a:sysClr val="window" lastClr="FFFFFF"/>
+      </a:lt1>
+      <a:dk2>
+        <a:srgbClr val="0E2841"/>
+      </a:dk2>
+      <a:lt2>
+        <a:srgbClr val="E8E8E8"/>
+      </a:lt2>
+      <a:accent1>
+        <a:srgbClr val="156082"/>
+      </a:accent1>
+      <a:accent2>
+        <a:srgbClr val="E97132"/>
+      </a:accent2>
+      <a:accent3>
+        <a:srgbClr val="196B24"/>
+      </a:accent3>
+      <a:accent4>
+        <a:srgbClr val="0F9ED5"/>
+      </a:accent4>
+      <a:accent5>
+        <a:srgbClr val="A02B93"/>
+      </a:accent5>
+      <a:accent6>
+        <a:srgbClr val="4EA72E"/>
+      </a:accent6>
+      <a:hlink>
+        <a:srgbClr val="467886"/>
+      </a:hlink>
+      <a:folHlink>
+        <a:srgbClr val="96607D"/>
+      </a:folHlink>
+    </a:clrScheme>
+    <a:fontScheme name="Office">
+      <a:majorFont>
+        <a:latin typeface="Aptos Display" panose="02110004020202020204"/>
+        <a:ea typeface=""/>
+        <a:cs typeface=""/>
+        <a:font script="Jpan" typeface="游ゴシック Light"/>
+        <a:font script="Hang" typeface="맑은 고딕"/>
+        <a:font script="Hans" typeface="等线 Light"/>
+        <a:font script="Hant" typeface="新細明體"/>
+        <a:font script="Arab" typeface="Times New Roman"/>
+        <a:font script="Hebr" typeface="Times New Roman"/>
+        <a:font script="Thai" typeface="Angsana New"/>
+        <a:font script="Ethi" typeface="Nyala"/>
+        <a:font script="Beng" typeface="Vrinda"/>
+        <a:font script="Gujr" typeface="Shruti"/>
+        <a:font script="Khmr" typeface="MoolBoran"/>
+        <a:font script="Knda" typeface="Tunga"/>
+        <a:font script="Guru" typeface="Raavi"/>
+        <a:font script="Cans" typeface="Euphemia"/>
+        <a:font script="Cher" typeface="Plantagenet Cherokee"/>
+        <a:font script="Yiii" typeface="Microsoft Yi Baiti"/>
+        <a:font script="Tibt" typeface="Microsoft Himalaya"/>
+        <a:font script="Thaa" typeface="MV Boli"/>
+        <a:font script="Deva" typeface="Mangal"/>
+        <a:font script="Telu" typeface="Gautami"/>
+        <a:font script="Taml" typeface="Latha"/>
+        <a:font script="Syrc" typeface="Estrangelo Edessa"/>
+        <a:font script="Orya" typeface="Kalinga"/>
+        <a:font script="Mlym" typeface="Kartika"/>
+        <a:font script="Laoo" typeface="DokChampa"/>
+        <a:font script="Sinh" typeface="Iskoola Pota"/>
+        <a:font script="Mong" typeface="Mongolian Baiti"/>
+        <a:font script="Viet" typeface="Times New Roman"/>
+        <a:font script="Uigh" typeface="Microsoft Uighur"/>
+        <a:font script="Geor" typeface="Sylfaen"/>
+        <a:font script="Armn" typeface="Arial"/>
+        <a:font script="Bugi" typeface="Leelawadee UI"/>
+        <a:font script="Bopo" typeface="Microsoft JhengHei"/>
+        <a:font script="Java" typeface="Javanese Text"/>
+        <a:font script="Lisu" typeface="Segoe UI"/>
+        <a:font script="Mymr" typeface="Myanmar Text"/>
+        <a:font script="Nkoo" typeface="Ebrima"/>
+        <a:font script="Olck" typeface="Nirmala UI"/>
+        <a:font script="Osma" typeface="Ebrima"/>
+        <a:font script="Phag" typeface="Phagspa"/>
+        <a:font script="Syrn" typeface="Estrangelo Edessa"/>
+        <a:font script="Syrj" typeface="Estrangelo Edessa"/>
+        <a:font script="Syre" typeface="Estrangelo Edessa"/>
+        <a:font script="Sora" typeface="Nirmala UI"/>
+        <a:font script="Tale" typeface="Microsoft Tai Le"/>
+        <a:font script="Talu" typeface="Microsoft New Tai Lue"/>
+        <a:font script="Tfng" typeface="Ebrima"/>
+      </a:majorFont>
+      <a:minorFont>
+        <a:latin typeface="Aptos" panose="02110004020202020204"/>
+        <a:ea typeface=""/>
+        <a:cs typeface=""/>
+        <a:font script="Jpan" typeface="游ゴシック"/>
+        <a:font script="Hang" typeface="맑은 고딕"/>
+        <a:font script="Hans" typeface="等线"/>
+        <a:font script="Hant" typeface="新細明體"/>
+        <a:font script="Arab" typeface="Arial"/>
+        <a:font script="Hebr" typeface="Arial"/>
+        <a:font script="Thai" typeface="Cordia New"/>
+        <a:font script="Ethi" typeface="Nyala"/>
+        <a:font script="Beng" typeface="Vrinda"/>
+        <a:font script="Gujr" typeface="Shruti"/>
+        <a:font script="Khmr" typeface="DaunPenh"/>
+        <a:font script="Knda" typeface="Tunga"/>
+        <a:font script="Guru" typeface="Raavi"/>
+        <a:font script="Cans" typeface="Euphemia"/>
+        <a:font script="Cher" typeface="Plantagenet Cherokee"/>
+        <a:font script="Yiii" typeface="Microsoft Yi Baiti"/>
+        <a:font script="Tibt" typeface="Microsoft Himalaya"/>
+        <a:font script="Thaa" typeface="MV Boli"/>
+        <a:font script="Deva" typeface="Mangal"/>
+        <a:font script="Telu" typeface="Gautami"/>
+        <a:font script="Taml" typeface="Latha"/>
+        <a:font script="Syrc" typeface="Estrangelo Edessa"/>
+        <a:font script="Orya" typeface="Kalinga"/>
+        <a:font script="Mlym" typeface="Kartika"/>
+        <a:font script="Laoo" typeface="DokChampa"/>
+        <a:font script="Sinh" typeface="Iskoola Pota"/>
+        <a:font script="Mong" typeface="Mongolian Baiti"/>
+        <a:font script="Viet" typeface="Arial"/>
+        <a:font script="Uigh" typeface="Microsoft Uighur"/>
+        <a:font script="Geor" typeface="Sylfaen"/>
+        <a:font script="Armn" typeface="Arial"/>
+        <a:font script="Bugi" typeface="Leelawadee UI"/>
+        <a:font script="Bopo" typeface="Microsoft JhengHei"/>
+        <a:font script="Java" typeface="Javanese Text"/>
+        <a:font script="Lisu" typeface="Segoe UI"/>
+        <a:font script="Mymr" typeface="Myanmar Text"/>
+        <a:font script="Nkoo" typeface="Ebrima"/>
+        <a:font script="Olck" typeface="Nirmala UI"/>
+        <a:font script="Osma" typeface="Ebrima"/>
+        <a:font script="Phag" typeface="Phagspa"/>
+        <a:font script="Syrn" typeface="Estrangelo Edessa"/>
+        <a:font script="Syrj" typeface="Estrangelo Edessa"/>
+        <a:font script="Syre" typeface="Estrangelo Edessa"/>
+        <a:font script="Sora" typeface="Nirmala UI"/>
+        <a:font script="Tale" typeface="Microsoft Tai Le"/>
+        <a:font script="Talu" typeface="Microsoft New Tai Lue"/>
+        <a:font script="Tfng" typeface="Ebrima"/>
+      </a:minorFont>
+    </a:fontScheme>
+    <a:fmtScheme name="Office">
+      <a:fillStyleLst>
+        <a:solidFill>
+          <a:schemeClr val="phClr"/>
+        </a:solidFill>
+        <a:gradFill rotWithShape="1">
+          <a:gsLst>
+            <a:gs pos="0">
+              <a:schemeClr val="phClr">
+                <a:lumMod val="110000"/>
+                <a:satMod val="105000"/>
+                <a:tint val="67000"/>
+              </a:schemeClr>
+            </a:gs>
+            <a:gs pos="50000">
+              <a:schemeClr val="phClr">
+                <a:lumMod val="105000"/>
+                <a:satMod val="103000"/>
+                <a:tint val="73000"/>
+              </a:schemeClr>
+            </a:gs>
+            <a:gs pos="100000">
+              <a:schemeClr val="phClr">
+                <a:lumMod val="105000"/>
+                <a:satMod val="109000"/>
+                <a:tint val="81000"/>
+              </a:schemeClr>
+            </a:gs>
+          </a:gsLst>
+          <a:lin ang="5400000" scaled="0"/>
+        </a:gradFill>
+        <a:gradFill rotWithShape="1">
+          <a:gsLst>
+            <a:gs pos="0">
+              <a:schemeClr val="phClr">
+                <a:satMod val="103000"/>
+                <a:lumMod val="102000"/>
+                <a:tint val="94000"/>
+              </a:schemeClr>
+            </a:gs>
+            <a:gs pos="50000">
+              <a:schemeClr val="phClr">
+                <a:satMod val="110000"/>
+                <a:lumMod val="100000"/>
+                <a:shade val="100000"/>
+              </a:schemeClr>
+            </a:gs>
+            <a:gs pos="100000">
+              <a:schemeClr val="phClr">
+                <a:lumMod val="99000"/>
+                <a:satMod val="120000"/>
+                <a:shade val="78000"/>
+              </a:schemeClr>
+            </a:gs>
+          </a:gsLst>
+          <a:lin ang="5400000" scaled="0"/>
+        </a:gradFill>
+      </a:fillStyleLst>
+      <a:lnStyleLst>
+        <a:ln w="12700" cap="flat" cmpd="sng" algn="ctr">
+          <a:solidFill>
+            <a:schemeClr val="phClr"/>
+          </a:solidFill>
+          <a:prstDash val="solid"/>
+          <a:miter lim="800000"/>
+        </a:ln>
+        <a:ln w="19050" cap="flat" cmpd="sng" algn="ctr">
+          <a:solidFill>
+            <a:schemeClr val="phClr"/>
+          </a:solidFill>
+          <a:prstDash val="solid"/>
+          <a:miter lim="800000"/>
+        </a:ln>
+        <a:ln w="25400" cap="flat" cmpd="sng" algn="ctr">
+          <a:solidFill>
+            <a:schemeClr val="phClr"/>
+          </a:solidFill>
+          <a:prstDash val="solid"/>
+          <a:miter lim="800000"/>
+        </a:ln>
+      </a:lnStyleLst>
+      <a:effectStyleLst>
+        <a:effectStyle>
+          <a:effectLst/>
+        </a:effectStyle>
+        <a:effectStyle>
+          <a:effectLst/>
+        </a:effectStyle>
+        <a:effectStyle>
+          <a:effectLst>
+            <a:outerShdw blurRad="57150" dist="19050" dir="5400000" algn="ctr" rotWithShape="0">
+              <a:srgbClr val="000000">
+                <a:alpha val="63000"/>
+              </a:srgbClr>
+            </a:outerShdw>
+          </a:effectLst>
+        </a:effectStyle>
+      </a:effectStyleLst>
+      <a:bgFillStyleLst>
+        <a:solidFill>
+          <a:schemeClr val="phClr"/>
+        </a:solidFill>
+        <a:solidFill>
+          <a:schemeClr val="phClr">
+            <a:tint val="95000"/>
+            <a:satMod val="170000"/>
+          </a:schemeClr>
+        </a:solidFill>
+        <a:gradFill rotWithShape="1">
+          <a:gsLst>
+            <a:gs pos="0">
+              <a:schemeClr val="phClr">
+                <a:tint val="93000"/>
+                <a:satMod val="150000"/>
+                <a:shade val="98000"/>
+                <a:lumMod val="102000"/>
+              </a:schemeClr>
+            </a:gs>
+            <a:gs pos="50000">
+              <a:schemeClr val="phClr">
+                <a:tint val="98000"/>
+                <a:satMod val="130000"/>
+                <a:shade val="90000"/>
+                <a:lumMod val="103000"/>
+              </a:schemeClr>
+            </a:gs>
+            <a:gs pos="100000">
+              <a:schemeClr val="phClr">
+                <a:shade val="63000"/>
+                <a:satMod val="120000"/>
+              </a:schemeClr>
+            </a:gs>
+          </a:gsLst>
+          <a:lin ang="5400000" scaled="0"/>
+        </a:gradFill>
+      </a:bgFillStyleLst>
+    </a:fmtScheme>
+  </a:themeElements>
+  <a:objectDefaults>
+    <a:lnDef>
+      <a:spPr/>
+      <a:bodyPr/>
+      <a:lstStyle/>
+      <a:style>
+        <a:lnRef idx="2">
+          <a:schemeClr val="accent1"/>
+        </a:lnRef>
+        <a:fillRef idx="0">
+          <a:schemeClr val="accent1"/>
+        </a:fillRef>
+        <a:effectRef idx="1">
+          <a:schemeClr val="accent1"/>
+        </a:effectRef>
+        <a:fontRef idx="minor">
+          <a:schemeClr val="tx1"/>
+        </a:fontRef>
+      </a:style>
+    </a:lnDef>
+  </a:objectDefaults>
+  <a:extraClrSchemeLst/>
+  <a:extLst>
+    <a:ext uri="{05A4C25C-085E-4340-85A3-A5531E510DB2}">
+      <thm15:themeFamily xmlns:thm15="http://schemas.microsoft.com/office/thememl/2012/main" name="Office Theme" id="{2E142A2C-CD16-42D6-873A-C26D2A0506FA}" vid="{1BDDFF52-6CD6-40A5-AB3C-68EB2F1E4D0A}"/>
+    </a:ext>
+  </a:extLst>
+</a:theme>
 </file>
--- a/FlakeHound_Presentation_Final.pptx
+++ b/FlakeHound_Presentation_Final.pptx
@@ -217,7 +217,7 @@
           <a:p>
             <a:fld id="{BC927789-316E-4DF1-B745-59265EBCF8C5}" type="datetimeFigureOut">
               <a:rPr lang="en-US" smtClean="0"/>
-              <a:t>2/5/2026</a:t>
+              <a:t>4/21/2026</a:t>
             </a:fld>
             <a:endParaRPr lang="en-US"/>
           </a:p>
@@ -663,7 +663,7 @@
           <a:p>
             <a:fld id="{0143B681-7805-4D13-91E0-D00CE4B3804B}" type="datetime1">
               <a:rPr lang="en-US" smtClean="0"/>
-              <a:t>2/5/2026</a:t>
+              <a:t>4/21/2026</a:t>
             </a:fld>
             <a:endParaRPr lang="en-US"/>
           </a:p>
@@ -831,7 +831,7 @@
           <a:p>
             <a:fld id="{6004C493-3CC2-4DBC-A05F-9519F344AD36}" type="datetime1">
               <a:rPr lang="en-US" smtClean="0"/>
-              <a:t>2/5/2026</a:t>
+              <a:t>4/21/2026</a:t>
             </a:fld>
             <a:endParaRPr lang="en-US"/>
           </a:p>
@@ -1009,7 +1009,7 @@
           <a:p>
             <a:fld id="{A26A5391-EB33-4777-9135-EEF016A7B893}" type="datetime1">
               <a:rPr lang="en-US" smtClean="0"/>
-              <a:t>2/5/2026</a:t>
+              <a:t>4/21/2026</a:t>
             </a:fld>
             <a:endParaRPr lang="en-US"/>
           </a:p>
@@ -1177,7 +1177,7 @@
           <a:p>
             <a:fld id="{34DCDFDD-2F40-4947-A91F-DB521C4C63AF}" type="datetime1">
               <a:rPr lang="en-US" smtClean="0"/>
-              <a:t>2/5/2026</a:t>
+              <a:t>4/21/2026</a:t>
             </a:fld>
             <a:endParaRPr lang="en-US"/>
           </a:p>
@@ -1422,7 +1422,7 @@
           <a:p>
             <a:fld id="{C66AF807-00AF-475C-9951-17AB0C07FE0C}" type="datetime1">
               <a:rPr lang="en-US" smtClean="0"/>
-              <a:t>2/5/2026</a:t>
+              <a:t>4/21/2026</a:t>
             </a:fld>
             <a:endParaRPr lang="en-US"/>
           </a:p>
@@ -1707,7 +1707,7 @@
           <a:p>
             <a:fld id="{C7DDB84D-A328-4351-95DA-C977D632A59F}" type="datetime1">
               <a:rPr lang="en-US" smtClean="0"/>
-              <a:t>2/5/2026</a:t>
+              <a:t>4/21/2026</a:t>
             </a:fld>
             <a:endParaRPr lang="en-US"/>
           </a:p>
@@ -2126,7 +2126,7 @@
           <a:p>
             <a:fld id="{C4816147-6D05-4E56-87F7-7482A0CB5638}" type="datetime1">
               <a:rPr lang="en-US" smtClean="0"/>
-              <a:t>2/5/2026</a:t>
+              <a:t>4/21/2026</a:t>
             </a:fld>
             <a:endParaRPr lang="en-US"/>
           </a:p>
@@ -2243,7 +2243,7 @@
           <a:p>
             <a:fld id="{C3AFBE2B-EF14-48EA-ACE5-4AB16527524E}" type="datetime1">
               <a:rPr lang="en-US" smtClean="0"/>
-              <a:t>2/5/2026</a:t>
+              <a:t>4/21/2026</a:t>
             </a:fld>
             <a:endParaRPr lang="en-US"/>
           </a:p>
@@ -2338,7 +2338,7 @@
           <a:p>
             <a:fld id="{91F75C59-BCFE-402D-BDAE-2C6EE267CDDB}" type="datetime1">
               <a:rPr lang="en-US" smtClean="0"/>
-              <a:t>2/5/2026</a:t>
+              <a:t>4/21/2026</a:t>
             </a:fld>
             <a:endParaRPr lang="en-US"/>
           </a:p>
@@ -2613,7 +2613,7 @@
           <a:p>
             <a:fld id="{661C03C9-560B-4769-B02A-4EED2BC49C85}" type="datetime1">
               <a:rPr lang="en-US" smtClean="0"/>
-              <a:t>2/5/2026</a:t>
+              <a:t>4/21/2026</a:t>
             </a:fld>
             <a:endParaRPr lang="en-US"/>
           </a:p>
@@ -2865,7 +2865,7 @@
           <a:p>
             <a:fld id="{F44BCE93-5CC5-4E11-A040-7B58344ED17A}" type="datetime1">
               <a:rPr lang="en-US" smtClean="0"/>
-              <a:t>2/5/2026</a:t>
+              <a:t>4/21/2026</a:t>
             </a:fld>
             <a:endParaRPr lang="en-US"/>
           </a:p>
@@ -3076,7 +3076,7 @@
           <a:p>
             <a:fld id="{CDC76CC0-6B70-4F01-960C-D33EE306C4C8}" type="datetime1">
               <a:rPr lang="en-US" smtClean="0"/>
-              <a:t>2/5/2026</a:t>
+              <a:t>4/21/2026</a:t>
             </a:fld>
             <a:endParaRPr lang="en-US"/>
           </a:p>

--- a/FlakeHound_Presentation_Final.pptx
+++ b/FlakeHound_Presentation_Final.pptx
@@ -13,8 +13,8 @@
     <p:sldId id="258" r:id="rId4"/>
     <p:sldId id="259" r:id="rId5"/>
     <p:sldId id="260" r:id="rId6"/>
-    <p:sldId id="261" r:id="rId7"/>
-    <p:sldId id="262" r:id="rId8"/>
+    <p:sldId id="262" r:id="rId7"/>
+    <p:sldId id="261" r:id="rId8"/>
     <p:sldId id="265" r:id="rId9"/>
     <p:sldId id="267" r:id="rId10"/>
     <p:sldId id="269" r:id="rId11"/>
@@ -217,7 +217,7 @@
           <a:p>
             <a:fld id="{BC927789-316E-4DF1-B745-59265EBCF8C5}" type="datetimeFigureOut">
               <a:rPr lang="en-US" smtClean="0"/>
-              <a:t>4/21/2026</a:t>
+              <a:t>4/23/2026</a:t>
             </a:fld>
             <a:endParaRPr lang="en-US"/>
           </a:p>
@@ -663,7 +663,7 @@
           <a:p>
             <a:fld id="{0143B681-7805-4D13-91E0-D00CE4B3804B}" type="datetime1">
               <a:rPr lang="en-US" smtClean="0"/>
-              <a:t>4/21/2026</a:t>
+              <a:t>4/23/2026</a:t>
             </a:fld>
             <a:endParaRPr lang="en-US"/>
           </a:p>
@@ -831,7 +831,7 @@
           <a:p>
             <a:fld id="{6004C493-3CC2-4DBC-A05F-9519F344AD36}" type="datetime1">
               <a:rPr lang="en-US" smtClean="0"/>
-              <a:t>4/21/2026</a:t>
+              <a:t>4/23/2026</a:t>
             </a:fld>
             <a:endParaRPr lang="en-US"/>
           </a:p>
@@ -1009,7 +1009,7 @@
           <a:p>
             <a:fld id="{A26A5391-EB33-4777-9135-EEF016A7B893}" type="datetime1">
               <a:rPr lang="en-US" smtClean="0"/>
-              <a:t>4/21/2026</a:t>
+              <a:t>4/23/2026</a:t>
             </a:fld>
             <a:endParaRPr lang="en-US"/>
           </a:p>
@@ -1177,7 +1177,7 @@
           <a:p>
             <a:fld id="{34DCDFDD-2F40-4947-A91F-DB521C4C63AF}" type="datetime1">
               <a:rPr lang="en-US" smtClean="0"/>
-              <a:t>4/21/2026</a:t>
+              <a:t>4/23/2026</a:t>
             </a:fld>
             <a:endParaRPr lang="en-US"/>
           </a:p>
@@ -1422,7 +1422,7 @@
           <a:p>
             <a:fld id="{C66AF807-00AF-475C-9951-17AB0C07FE0C}" type="datetime1">
               <a:rPr lang="en-US" smtClean="0"/>
-              <a:t>4/21/2026</a:t>
+              <a:t>4/23/2026</a:t>
             </a:fld>
             <a:endParaRPr lang="en-US"/>
           </a:p>
@@ -1707,7 +1707,7 @@
           <a:p>
             <a:fld id="{C7DDB84D-A328-4351-95DA-C977D632A59F}" type="datetime1">
               <a:rPr lang="en-US" smtClean="0"/>
-              <a:t>4/21/2026</a:t>
+              <a:t>4/23/2026</a:t>
             </a:fld>
             <a:endParaRPr lang="en-US"/>
           </a:p>
@@ -2126,7 +2126,7 @@
           <a:p>
             <a:fld id="{C4816147-6D05-4E56-87F7-7482A0CB5638}" type="datetime1">
               <a:rPr lang="en-US" smtClean="0"/>
-              <a:t>4/21/2026</a:t>
+              <a:t>4/23/2026</a:t>
             </a:fld>
             <a:endParaRPr lang="en-US"/>
           </a:p>
@@ -2243,7 +2243,7 @@
           <a:p>
             <a:fld id="{C3AFBE2B-EF14-48EA-ACE5-4AB16527524E}" type="datetime1">
               <a:rPr lang="en-US" smtClean="0"/>
-              <a:t>4/21/2026</a:t>
+              <a:t>4/23/2026</a:t>
             </a:fld>
             <a:endParaRPr lang="en-US"/>
           </a:p>
@@ -2338,7 +2338,7 @@
           <a:p>
             <a:fld id="{91F75C59-BCFE-402D-BDAE-2C6EE267CDDB}" type="datetime1">
               <a:rPr lang="en-US" smtClean="0"/>
-              <a:t>4/21/2026</a:t>
+              <a:t>4/23/2026</a:t>
             </a:fld>
             <a:endParaRPr lang="en-US"/>
           </a:p>
@@ -2613,7 +2613,7 @@
           <a:p>
             <a:fld id="{661C03C9-560B-4769-B02A-4EED2BC49C85}" type="datetime1">
               <a:rPr lang="en-US" smtClean="0"/>
-              <a:t>4/21/2026</a:t>
+              <a:t>4/23/2026</a:t>
             </a:fld>
             <a:endParaRPr lang="en-US"/>
           </a:p>
@@ -2865,7 +2865,7 @@
           <a:p>
             <a:fld id="{F44BCE93-5CC5-4E11-A040-7B58344ED17A}" type="datetime1">
               <a:rPr lang="en-US" smtClean="0"/>
-              <a:t>4/21/2026</a:t>
+              <a:t>4/23/2026</a:t>
             </a:fld>
             <a:endParaRPr lang="en-US"/>
           </a:p>
@@ -3076,7 +3076,7 @@
           <a:p>
             <a:fld id="{CDC76CC0-6B70-4F01-960C-D33EE306C4C8}" type="datetime1">
               <a:rPr lang="en-US" smtClean="0"/>
-              <a:t>4/21/2026</a:t>
+              <a:t>4/23/2026</a:t>
             </a:fld>
             <a:endParaRPr lang="en-US"/>
           </a:p>
@@ -3583,7 +3583,15 @@
             </a:r>
             <a:r>
               <a:rPr dirty="0"/>
-              <a:t> Rahman (Roll: 1637)</a:t>
+              <a:t> Rahman (Roll: </a:t>
+            </a:r>
+            <a:r>
+              <a:rPr lang="en-US" dirty="0"/>
+              <a:t>245425</a:t>
+            </a:r>
+            <a:r>
+              <a:rPr dirty="0"/>
+              <a:t>)</a:t>
             </a:r>
           </a:p>
         </p:txBody>
@@ -5218,8 +5226,8 @@
         </p:nvSpPr>
         <p:spPr>
           <a:xfrm>
-            <a:off x="3937845" y="274321"/>
-            <a:ext cx="4316311" cy="769441"/>
+            <a:off x="4699499" y="274321"/>
+            <a:ext cx="2793009" cy="769441"/>
           </a:xfrm>
           <a:prstGeom prst="rect">
             <a:avLst/>
@@ -5240,12 +5248,8 @@
               </a:defRPr>
             </a:pPr>
             <a:r>
-              <a:rPr sz="4400" dirty="0"/>
-              <a:t>What I</a:t>
-            </a:r>
-            <a:r>
               <a:rPr lang="en-US" sz="4400" dirty="0"/>
-              <a:t> have done</a:t>
+              <a:t>Before Mid</a:t>
             </a:r>
             <a:endParaRPr sz="4400" dirty="0"/>
           </a:p>
@@ -5456,6 +5460,259 @@
 </file>
 
 <file path=ppt/slides/slide6.xml><?xml version="1.0" encoding="utf-8"?>
+<p:sld xmlns:a="http://schemas.openxmlformats.org/drawingml/2006/main" xmlns:r="http://schemas.openxmlformats.org/officeDocument/2006/relationships" xmlns:p="http://schemas.openxmlformats.org/presentationml/2006/main">
+  <p:cSld>
+    <p:spTree>
+      <p:nvGrpSpPr>
+        <p:cNvPr id="1" name=""/>
+        <p:cNvGrpSpPr/>
+        <p:nvPr/>
+      </p:nvGrpSpPr>
+      <p:grpSpPr>
+        <a:xfrm>
+          <a:off x="0" y="0"/>
+          <a:ext cx="0" cy="0"/>
+          <a:chOff x="0" y="0"/>
+          <a:chExt cx="0" cy="0"/>
+        </a:xfrm>
+      </p:grpSpPr>
+      <p:sp>
+        <p:nvSpPr>
+          <p:cNvPr id="2" name="TextBox 1"/>
+          <p:cNvSpPr txBox="1"/>
+          <p:nvPr/>
+        </p:nvSpPr>
+        <p:spPr>
+          <a:xfrm>
+            <a:off x="4876180" y="48179"/>
+            <a:ext cx="2439643" cy="769441"/>
+          </a:xfrm>
+          <a:prstGeom prst="rect">
+            <a:avLst/>
+          </a:prstGeom>
+          <a:noFill/>
+        </p:spPr>
+        <p:txBody>
+          <a:bodyPr wrap="none">
+            <a:spAutoFit/>
+          </a:bodyPr>
+          <a:lstStyle/>
+          <a:p>
+            <a:pPr algn="ctr">
+              <a:defRPr sz="4400" b="1">
+                <a:solidFill>
+                  <a:srgbClr val="5CB85C"/>
+                </a:solidFill>
+              </a:defRPr>
+            </a:pPr>
+            <a:r>
+              <a:rPr lang="en-US" sz="4400" dirty="0"/>
+              <a:t>After Mid</a:t>
+            </a:r>
+            <a:endParaRPr sz="4400" dirty="0"/>
+          </a:p>
+        </p:txBody>
+      </p:sp>
+      <p:sp>
+        <p:nvSpPr>
+          <p:cNvPr id="3" name="TextBox 2"/>
+          <p:cNvSpPr txBox="1"/>
+          <p:nvPr/>
+        </p:nvSpPr>
+        <p:spPr>
+          <a:xfrm>
+            <a:off x="1710607" y="868367"/>
+            <a:ext cx="8196170" cy="5232202"/>
+          </a:xfrm>
+          <a:prstGeom prst="rect">
+            <a:avLst/>
+          </a:prstGeom>
+          <a:noFill/>
+        </p:spPr>
+        <p:txBody>
+          <a:bodyPr wrap="square">
+            <a:spAutoFit/>
+          </a:bodyPr>
+          <a:lstStyle/>
+          <a:p>
+            <a:r>
+              <a:rPr lang="en-US" sz="2400" b="1" dirty="0"/>
+              <a:t>XML Parser</a:t>
+            </a:r>
+            <a:endParaRPr lang="en-US" sz="2400" dirty="0"/>
+          </a:p>
+          <a:p>
+            <a:pPr marL="742950" lvl="1" indent="-285750">
+              <a:buFont typeface="Arial" panose="020B0604020202020204" pitchFamily="34" charset="0"/>
+              <a:buChar char="•"/>
+            </a:pPr>
+            <a:r>
+              <a:rPr lang="en-US" sz="2200" dirty="0"/>
+              <a:t>Parse </a:t>
+            </a:r>
+            <a:r>
+              <a:rPr lang="en-US" sz="2200" dirty="0" err="1"/>
+              <a:t>GoogleTest</a:t>
+            </a:r>
+            <a:r>
+              <a:rPr lang="en-US" sz="2200" dirty="0"/>
+              <a:t> XML output for real project (e.g., abseil-</a:t>
+            </a:r>
+            <a:r>
+              <a:rPr lang="en-US" sz="2200" dirty="0" err="1"/>
+              <a:t>cpp</a:t>
+            </a:r>
+            <a:r>
+              <a:rPr lang="en-US" sz="2200" dirty="0"/>
+              <a:t>)</a:t>
+            </a:r>
+          </a:p>
+          <a:p>
+            <a:pPr marL="742950" lvl="1" indent="-285750">
+              <a:buFont typeface="Arial" panose="020B0604020202020204" pitchFamily="34" charset="0"/>
+              <a:buChar char="•"/>
+            </a:pPr>
+            <a:r>
+              <a:rPr lang="en-US" sz="2200" dirty="0"/>
+              <a:t>Extract test names, status, timing data</a:t>
+            </a:r>
+          </a:p>
+          <a:p>
+            <a:pPr marL="742950" lvl="1" indent="-285750">
+              <a:buFont typeface="Arial" panose="020B0604020202020204" pitchFamily="34" charset="0"/>
+              <a:buChar char="•"/>
+            </a:pPr>
+            <a:endParaRPr lang="en-US" dirty="0"/>
+          </a:p>
+          <a:p>
+            <a:r>
+              <a:rPr lang="en-US" sz="2400" b="1" dirty="0"/>
+              <a:t>Static Code Analysis</a:t>
+            </a:r>
+            <a:endParaRPr lang="en-US" sz="2400" dirty="0"/>
+          </a:p>
+          <a:p>
+            <a:pPr marL="742950" lvl="1" indent="-285750">
+              <a:buFont typeface="Arial" panose="020B0604020202020204" pitchFamily="34" charset="0"/>
+              <a:buChar char="•"/>
+            </a:pPr>
+            <a:r>
+              <a:rPr lang="en-US" sz="2200" dirty="0"/>
+              <a:t>Build Lexer → AST → CFG pipeline</a:t>
+            </a:r>
+          </a:p>
+          <a:p>
+            <a:pPr marL="742950" lvl="1" indent="-285750">
+              <a:buFont typeface="Arial" panose="020B0604020202020204" pitchFamily="34" charset="0"/>
+              <a:buChar char="•"/>
+            </a:pPr>
+            <a:r>
+              <a:rPr lang="en-US" sz="2200" dirty="0"/>
+              <a:t> Analyze both test code and production code</a:t>
+            </a:r>
+          </a:p>
+          <a:p>
+            <a:pPr lvl="1"/>
+            <a:endParaRPr lang="en-US" sz="2200" dirty="0"/>
+          </a:p>
+          <a:p>
+            <a:r>
+              <a:rPr lang="en-US" sz="2400" b="1" dirty="0"/>
+              <a:t>Machine Learning</a:t>
+            </a:r>
+            <a:endParaRPr lang="en-US" sz="2400" dirty="0"/>
+          </a:p>
+          <a:p>
+            <a:pPr marL="800100" lvl="1" indent="-342900">
+              <a:buFont typeface="Arial" panose="020B0604020202020204" pitchFamily="34" charset="0"/>
+              <a:buChar char="•"/>
+            </a:pPr>
+            <a:r>
+              <a:rPr lang="en-US" sz="2200" dirty="0"/>
+              <a:t>Logistic regression with Stochastic Gradient Descent</a:t>
+            </a:r>
+          </a:p>
+          <a:p>
+            <a:pPr marL="800100" lvl="1" indent="-342900">
+              <a:buFont typeface="Arial" panose="020B0604020202020204" pitchFamily="34" charset="0"/>
+              <a:buChar char="•"/>
+            </a:pPr>
+            <a:r>
+              <a:rPr lang="en-US" sz="2200" dirty="0"/>
+              <a:t>Train on static features</a:t>
+            </a:r>
+          </a:p>
+          <a:p>
+            <a:pPr marL="800100" lvl="1" indent="-342900">
+              <a:buFont typeface="Arial" panose="020B0604020202020204" pitchFamily="34" charset="0"/>
+              <a:buChar char="•"/>
+            </a:pPr>
+            <a:r>
+              <a:rPr lang="en-US" sz="2200" dirty="0"/>
+              <a:t>Predict flakiness before running tests</a:t>
+            </a:r>
+          </a:p>
+          <a:p>
+            <a:pPr lvl="1"/>
+            <a:endParaRPr lang="en-US" sz="2200" dirty="0"/>
+          </a:p>
+          <a:p>
+            <a:r>
+              <a:rPr lang="en-US" sz="2400" b="1" dirty="0"/>
+              <a:t>Root Cause Explanation</a:t>
+            </a:r>
+            <a:endParaRPr lang="en-US" sz="2400" dirty="0"/>
+          </a:p>
+          <a:p>
+            <a:pPr marL="800100" lvl="1" indent="-342900">
+              <a:buFont typeface="Arial" panose="020B0604020202020204" pitchFamily="34" charset="0"/>
+              <a:buChar char="•"/>
+            </a:pPr>
+            <a:r>
+              <a:rPr lang="en-US" sz="2200" dirty="0"/>
+              <a:t>Correlate dynamic failure with static patterns</a:t>
+            </a:r>
+          </a:p>
+        </p:txBody>
+      </p:sp>
+      <p:sp>
+        <p:nvSpPr>
+          <p:cNvPr id="4" name="Slide Number Placeholder 3">
+            <a:extLst>
+              <a:ext uri="{FF2B5EF4-FFF2-40B4-BE49-F238E27FC236}">
+                <a16:creationId xmlns:a16="http://schemas.microsoft.com/office/drawing/2014/main" id="{96D883FF-94EA-B78F-3FE6-9F96A41D2736}"/>
+              </a:ext>
+            </a:extLst>
+          </p:cNvPr>
+          <p:cNvSpPr>
+            <a:spLocks noGrp="1"/>
+          </p:cNvSpPr>
+          <p:nvPr>
+            <p:ph type="sldNum" sz="quarter" idx="12"/>
+          </p:nvPr>
+        </p:nvSpPr>
+        <p:spPr/>
+        <p:txBody>
+          <a:bodyPr/>
+          <a:lstStyle/>
+          <a:p>
+            <a:fld id="{C1FF6DA9-008F-8B48-92A6-B652298478BF}" type="slidenum">
+              <a:rPr lang="en-US" smtClean="0"/>
+              <a:t>6</a:t>
+            </a:fld>
+            <a:endParaRPr lang="en-US"/>
+          </a:p>
+        </p:txBody>
+      </p:sp>
+    </p:spTree>
+  </p:cSld>
+  <p:clrMapOvr>
+    <a:masterClrMapping/>
+  </p:clrMapOvr>
+</p:sld>
+</file>
+
+<file path=ppt/slides/slide7.xml><?xml version="1.0" encoding="utf-8"?>
 <p:sld xmlns:a="http://schemas.openxmlformats.org/drawingml/2006/main" xmlns:r="http://schemas.openxmlformats.org/officeDocument/2006/relationships" xmlns:p="http://schemas.openxmlformats.org/presentationml/2006/main">
   <p:cSld>
     <p:bg>
@@ -5554,7 +5811,7 @@
         </p:nvSpPr>
         <p:spPr>
           <a:xfrm>
-            <a:off x="1028700" y="1967266"/>
+            <a:off x="940211" y="1967266"/>
             <a:ext cx="2628900" cy="2547257"/>
           </a:xfrm>
           <a:prstGeom prst="rect">
@@ -5585,7 +5842,7 @@
               </a:defRPr>
             </a:pPr>
             <a:r>
-              <a:rPr lang="en-US" sz="3600" kern="1200">
+              <a:rPr lang="en-US" sz="3600" kern="1200" dirty="0">
                 <a:solidFill>
                   <a:srgbClr val="FFFFFF"/>
                 </a:solidFill>
@@ -5593,7 +5850,44 @@
                 <a:ea typeface="+mj-ea"/>
                 <a:cs typeface="+mj-cs"/>
               </a:rPr>
-              <a:t>Demo Output</a:t>
+              <a:t>Demo </a:t>
+            </a:r>
+            <a:endParaRPr lang="en-US" sz="3600" dirty="0">
+              <a:solidFill>
+                <a:srgbClr val="FFFFFF"/>
+              </a:solidFill>
+              <a:latin typeface="+mj-lt"/>
+              <a:ea typeface="+mj-ea"/>
+              <a:cs typeface="+mj-cs"/>
+            </a:endParaRPr>
+          </a:p>
+          <a:p>
+            <a:pPr algn="ctr" defTabSz="914400">
+              <a:lnSpc>
+                <a:spcPct val="90000"/>
+              </a:lnSpc>
+              <a:spcBef>
+                <a:spcPct val="0"/>
+              </a:spcBef>
+              <a:spcAft>
+                <a:spcPts val="600"/>
+              </a:spcAft>
+              <a:defRPr sz="4400" b="1">
+                <a:solidFill>
+                  <a:srgbClr val="5CB85C"/>
+                </a:solidFill>
+              </a:defRPr>
+            </a:pPr>
+            <a:r>
+              <a:rPr lang="en-US" sz="3600" kern="1200">
+                <a:solidFill>
+                  <a:srgbClr val="FFFFFF"/>
+                </a:solidFill>
+                <a:latin typeface="+mj-lt"/>
+                <a:ea typeface="+mj-ea"/>
+                <a:cs typeface="+mj-cs"/>
+              </a:rPr>
+              <a:t>I/O</a:t>
             </a:r>
             <a:endParaRPr lang="en-US" sz="3600" kern="1200" dirty="0">
               <a:solidFill>
@@ -5652,7 +5946,7 @@
                   <a:spcPts val="600"/>
                 </a:spcAft>
               </a:pPr>
-              <a:t>6</a:t>
+              <a:t>7</a:t>
             </a:fld>
             <a:endParaRPr lang="en-US">
               <a:solidFill>
@@ -5666,10 +5960,10 @@
       </p:sp>
       <p:pic>
         <p:nvPicPr>
-          <p:cNvPr id="8" name="Picture 7">
+          <p:cNvPr id="10" name="Picture 9">
             <a:extLst>
               <a:ext uri="{FF2B5EF4-FFF2-40B4-BE49-F238E27FC236}">
-                <a16:creationId xmlns:a16="http://schemas.microsoft.com/office/drawing/2014/main" id="{969180A6-8EB4-083C-A5CA-90372811DF77}"/>
+                <a16:creationId xmlns:a16="http://schemas.microsoft.com/office/drawing/2014/main" id="{9FF9AD06-4B24-5FAB-A007-805764D15FEA}"/>
               </a:ext>
             </a:extLst>
           </p:cNvPr>
@@ -5686,36 +5980,6 @@
         </p:blipFill>
         <p:spPr>
           <a:xfrm>
-            <a:off x="4286865" y="0"/>
-            <a:ext cx="3256163" cy="6858000"/>
-          </a:xfrm>
-          <a:prstGeom prst="rect">
-            <a:avLst/>
-          </a:prstGeom>
-        </p:spPr>
-      </p:pic>
-      <p:pic>
-        <p:nvPicPr>
-          <p:cNvPr id="10" name="Picture 9">
-            <a:extLst>
-              <a:ext uri="{FF2B5EF4-FFF2-40B4-BE49-F238E27FC236}">
-                <a16:creationId xmlns:a16="http://schemas.microsoft.com/office/drawing/2014/main" id="{9FF9AD06-4B24-5FAB-A007-805764D15FEA}"/>
-              </a:ext>
-            </a:extLst>
-          </p:cNvPr>
-          <p:cNvPicPr>
-            <a:picLocks noChangeAspect="1"/>
-          </p:cNvPicPr>
-          <p:nvPr/>
-        </p:nvPicPr>
-        <p:blipFill>
-          <a:blip r:embed="rId3"/>
-          <a:stretch>
-            <a:fillRect/>
-          </a:stretch>
-        </p:blipFill>
-        <p:spPr>
-          <a:xfrm>
             <a:off x="7543028" y="0"/>
             <a:ext cx="4677882" cy="6858000"/>
           </a:xfrm>
@@ -5724,259 +5988,6 @@
           </a:prstGeom>
         </p:spPr>
       </p:pic>
-    </p:spTree>
-  </p:cSld>
-  <p:clrMapOvr>
-    <a:masterClrMapping/>
-  </p:clrMapOvr>
-</p:sld>
-</file>
-
-<file path=ppt/slides/slide7.xml><?xml version="1.0" encoding="utf-8"?>
-<p:sld xmlns:a="http://schemas.openxmlformats.org/drawingml/2006/main" xmlns:r="http://schemas.openxmlformats.org/officeDocument/2006/relationships" xmlns:p="http://schemas.openxmlformats.org/presentationml/2006/main">
-  <p:cSld>
-    <p:spTree>
-      <p:nvGrpSpPr>
-        <p:cNvPr id="1" name=""/>
-        <p:cNvGrpSpPr/>
-        <p:nvPr/>
-      </p:nvGrpSpPr>
-      <p:grpSpPr>
-        <a:xfrm>
-          <a:off x="0" y="0"/>
-          <a:ext cx="0" cy="0"/>
-          <a:chOff x="0" y="0"/>
-          <a:chExt cx="0" cy="0"/>
-        </a:xfrm>
-      </p:grpSpPr>
-      <p:sp>
-        <p:nvSpPr>
-          <p:cNvPr id="2" name="TextBox 1"/>
-          <p:cNvSpPr txBox="1"/>
-          <p:nvPr/>
-        </p:nvSpPr>
-        <p:spPr>
-          <a:xfrm>
-            <a:off x="4569876" y="48179"/>
-            <a:ext cx="3052247" cy="769441"/>
-          </a:xfrm>
-          <a:prstGeom prst="rect">
-            <a:avLst/>
-          </a:prstGeom>
-          <a:noFill/>
-        </p:spPr>
-        <p:txBody>
-          <a:bodyPr wrap="none">
-            <a:spAutoFit/>
-          </a:bodyPr>
-          <a:lstStyle/>
-          <a:p>
-            <a:pPr algn="ctr">
-              <a:defRPr sz="4400" b="1">
-                <a:solidFill>
-                  <a:srgbClr val="5CB85C"/>
-                </a:solidFill>
-              </a:defRPr>
-            </a:pPr>
-            <a:r>
-              <a:rPr lang="en-US" sz="4400" dirty="0"/>
-              <a:t>What’s Next</a:t>
-            </a:r>
-            <a:endParaRPr sz="4400" dirty="0"/>
-          </a:p>
-        </p:txBody>
-      </p:sp>
-      <p:sp>
-        <p:nvSpPr>
-          <p:cNvPr id="3" name="TextBox 2"/>
-          <p:cNvSpPr txBox="1"/>
-          <p:nvPr/>
-        </p:nvSpPr>
-        <p:spPr>
-          <a:xfrm>
-            <a:off x="1710607" y="868367"/>
-            <a:ext cx="8196170" cy="5232202"/>
-          </a:xfrm>
-          <a:prstGeom prst="rect">
-            <a:avLst/>
-          </a:prstGeom>
-          <a:noFill/>
-        </p:spPr>
-        <p:txBody>
-          <a:bodyPr wrap="square">
-            <a:spAutoFit/>
-          </a:bodyPr>
-          <a:lstStyle/>
-          <a:p>
-            <a:r>
-              <a:rPr lang="en-US" sz="2400" b="1" dirty="0"/>
-              <a:t>XML Parser</a:t>
-            </a:r>
-            <a:endParaRPr lang="en-US" sz="2400" dirty="0"/>
-          </a:p>
-          <a:p>
-            <a:pPr marL="742950" lvl="1" indent="-285750">
-              <a:buFont typeface="Arial" panose="020B0604020202020204" pitchFamily="34" charset="0"/>
-              <a:buChar char="•"/>
-            </a:pPr>
-            <a:r>
-              <a:rPr lang="en-US" sz="2200" dirty="0"/>
-              <a:t>Parse </a:t>
-            </a:r>
-            <a:r>
-              <a:rPr lang="en-US" sz="2200" dirty="0" err="1"/>
-              <a:t>GoogleTest</a:t>
-            </a:r>
-            <a:r>
-              <a:rPr lang="en-US" sz="2200" dirty="0"/>
-              <a:t> XML output for real project (e.g., abseil-</a:t>
-            </a:r>
-            <a:r>
-              <a:rPr lang="en-US" sz="2200" dirty="0" err="1"/>
-              <a:t>cpp</a:t>
-            </a:r>
-            <a:r>
-              <a:rPr lang="en-US" sz="2200" dirty="0"/>
-              <a:t>)</a:t>
-            </a:r>
-          </a:p>
-          <a:p>
-            <a:pPr marL="742950" lvl="1" indent="-285750">
-              <a:buFont typeface="Arial" panose="020B0604020202020204" pitchFamily="34" charset="0"/>
-              <a:buChar char="•"/>
-            </a:pPr>
-            <a:r>
-              <a:rPr lang="en-US" sz="2200" dirty="0"/>
-              <a:t>Extract test names, status, timing data</a:t>
-            </a:r>
-          </a:p>
-          <a:p>
-            <a:pPr marL="742950" lvl="1" indent="-285750">
-              <a:buFont typeface="Arial" panose="020B0604020202020204" pitchFamily="34" charset="0"/>
-              <a:buChar char="•"/>
-            </a:pPr>
-            <a:endParaRPr lang="en-US" dirty="0"/>
-          </a:p>
-          <a:p>
-            <a:r>
-              <a:rPr lang="en-US" sz="2400" b="1" dirty="0"/>
-              <a:t>Static Code Analysis</a:t>
-            </a:r>
-            <a:endParaRPr lang="en-US" sz="2400" dirty="0"/>
-          </a:p>
-          <a:p>
-            <a:pPr marL="742950" lvl="1" indent="-285750">
-              <a:buFont typeface="Arial" panose="020B0604020202020204" pitchFamily="34" charset="0"/>
-              <a:buChar char="•"/>
-            </a:pPr>
-            <a:r>
-              <a:rPr lang="en-US" sz="2200" dirty="0"/>
-              <a:t>Build Lexer → AST → CFG pipeline</a:t>
-            </a:r>
-          </a:p>
-          <a:p>
-            <a:pPr marL="742950" lvl="1" indent="-285750">
-              <a:buFont typeface="Arial" panose="020B0604020202020204" pitchFamily="34" charset="0"/>
-              <a:buChar char="•"/>
-            </a:pPr>
-            <a:r>
-              <a:rPr lang="en-US" sz="2200" dirty="0"/>
-              <a:t> Analyze both test code and production code</a:t>
-            </a:r>
-          </a:p>
-          <a:p>
-            <a:pPr lvl="1"/>
-            <a:endParaRPr lang="en-US" sz="2200" dirty="0"/>
-          </a:p>
-          <a:p>
-            <a:r>
-              <a:rPr lang="en-US" sz="2400" b="1" dirty="0"/>
-              <a:t>Machine Learning</a:t>
-            </a:r>
-            <a:endParaRPr lang="en-US" sz="2400" dirty="0"/>
-          </a:p>
-          <a:p>
-            <a:pPr marL="800100" lvl="1" indent="-342900">
-              <a:buFont typeface="Arial" panose="020B0604020202020204" pitchFamily="34" charset="0"/>
-              <a:buChar char="•"/>
-            </a:pPr>
-            <a:r>
-              <a:rPr lang="en-US" sz="2200" dirty="0"/>
-              <a:t>Logistic regression with Stochastic Gradient Descent</a:t>
-            </a:r>
-          </a:p>
-          <a:p>
-            <a:pPr marL="800100" lvl="1" indent="-342900">
-              <a:buFont typeface="Arial" panose="020B0604020202020204" pitchFamily="34" charset="0"/>
-              <a:buChar char="•"/>
-            </a:pPr>
-            <a:r>
-              <a:rPr lang="en-US" sz="2200" dirty="0"/>
-              <a:t>Train on static+ dynamic features</a:t>
-            </a:r>
-          </a:p>
-          <a:p>
-            <a:pPr marL="800100" lvl="1" indent="-342900">
-              <a:buFont typeface="Arial" panose="020B0604020202020204" pitchFamily="34" charset="0"/>
-              <a:buChar char="•"/>
-            </a:pPr>
-            <a:r>
-              <a:rPr lang="en-US" sz="2200" dirty="0"/>
-              <a:t>Predict flakiness before running tests</a:t>
-            </a:r>
-          </a:p>
-          <a:p>
-            <a:pPr lvl="1"/>
-            <a:endParaRPr lang="en-US" sz="2200" dirty="0"/>
-          </a:p>
-          <a:p>
-            <a:r>
-              <a:rPr lang="en-US" sz="2400" b="1" dirty="0"/>
-              <a:t>Root Cause Explanation</a:t>
-            </a:r>
-            <a:endParaRPr lang="en-US" sz="2400" dirty="0"/>
-          </a:p>
-          <a:p>
-            <a:pPr marL="800100" lvl="1" indent="-342900">
-              <a:buFont typeface="Arial" panose="020B0604020202020204" pitchFamily="34" charset="0"/>
-              <a:buChar char="•"/>
-            </a:pPr>
-            <a:r>
-              <a:rPr lang="en-US" sz="2200" dirty="0"/>
-              <a:t>Correlate dynamic failure with static patterns</a:t>
-            </a:r>
-          </a:p>
-        </p:txBody>
-      </p:sp>
-      <p:sp>
-        <p:nvSpPr>
-          <p:cNvPr id="4" name="Slide Number Placeholder 3">
-            <a:extLst>
-              <a:ext uri="{FF2B5EF4-FFF2-40B4-BE49-F238E27FC236}">
-                <a16:creationId xmlns:a16="http://schemas.microsoft.com/office/drawing/2014/main" id="{96D883FF-94EA-B78F-3FE6-9F96A41D2736}"/>
-              </a:ext>
-            </a:extLst>
-          </p:cNvPr>
-          <p:cNvSpPr>
-            <a:spLocks noGrp="1"/>
-          </p:cNvSpPr>
-          <p:nvPr>
-            <p:ph type="sldNum" sz="quarter" idx="12"/>
-          </p:nvPr>
-        </p:nvSpPr>
-        <p:spPr/>
-        <p:txBody>
-          <a:bodyPr/>
-          <a:lstStyle/>
-          <a:p>
-            <a:fld id="{C1FF6DA9-008F-8B48-92A6-B652298478BF}" type="slidenum">
-              <a:rPr lang="en-US" smtClean="0"/>
-              <a:t>7</a:t>
-            </a:fld>
-            <a:endParaRPr lang="en-US"/>
-          </a:p>
-        </p:txBody>
-      </p:sp>
     </p:spTree>
   </p:cSld>
   <p:clrMapOvr>

--- a/FlakeHound_Presentation_Final.pptx
+++ b/FlakeHound_Presentation_Final.pptx
@@ -5,7 +5,7 @@
     <p:sldMasterId id="2147483648" r:id="rId1"/>
   </p:sldMasterIdLst>
   <p:notesMasterIdLst>
-    <p:notesMasterId r:id="rId12"/>
+    <p:notesMasterId r:id="rId14"/>
   </p:notesMasterIdLst>
   <p:sldIdLst>
     <p:sldId id="256" r:id="rId2"/>
@@ -15,9 +15,11 @@
     <p:sldId id="260" r:id="rId6"/>
     <p:sldId id="262" r:id="rId7"/>
     <p:sldId id="261" r:id="rId8"/>
-    <p:sldId id="265" r:id="rId9"/>
-    <p:sldId id="267" r:id="rId10"/>
-    <p:sldId id="269" r:id="rId11"/>
+    <p:sldId id="270" r:id="rId9"/>
+    <p:sldId id="271" r:id="rId10"/>
+    <p:sldId id="265" r:id="rId11"/>
+    <p:sldId id="267" r:id="rId12"/>
+    <p:sldId id="269" r:id="rId13"/>
   </p:sldIdLst>
   <p:sldSz cx="12192000" cy="6858000"/>
   <p:notesSz cx="6858000" cy="9144000"/>
@@ -3503,12 +3505,12 @@
         <p:spPr>
           <a:xfrm>
             <a:off x="2895600" y="3404416"/>
-            <a:ext cx="6400800" cy="1752600"/>
+            <a:ext cx="6400800" cy="2524436"/>
           </a:xfrm>
         </p:spPr>
         <p:txBody>
           <a:bodyPr>
-            <a:normAutofit fontScale="92500" lnSpcReduction="20000"/>
+            <a:normAutofit/>
           </a:bodyPr>
           <a:lstStyle/>
           <a:p>
@@ -3567,7 +3569,23 @@
                 </a:solidFill>
               </a:defRPr>
             </a:pPr>
-            <a:endParaRPr dirty="0"/>
+            <a:r>
+              <a:rPr dirty="0" err="1"/>
+              <a:t>Shohidur</a:t>
+            </a:r>
+            <a:r>
+              <a:rPr dirty="0"/>
+              <a:t> Rahman (Roll: </a:t>
+            </a:r>
+            <a:r>
+              <a:rPr lang="en-US" dirty="0"/>
+              <a:t>245425</a:t>
+            </a:r>
+            <a:r>
+              <a:rPr dirty="0"/>
+              <a:t>)</a:t>
+            </a:r>
+            <a:endParaRPr lang="en-US" dirty="0"/>
           </a:p>
           <a:p>
             <a:pPr>
@@ -3578,20 +3596,8 @@
               </a:defRPr>
             </a:pPr>
             <a:r>
-              <a:rPr dirty="0" err="1"/>
-              <a:t>Shohidur</a:t>
-            </a:r>
-            <a:r>
-              <a:rPr dirty="0"/>
-              <a:t> Rahman (Roll: </a:t>
-            </a:r>
-            <a:r>
               <a:rPr lang="en-US" dirty="0"/>
-              <a:t>245425</a:t>
-            </a:r>
-            <a:r>
-              <a:rPr dirty="0"/>
-              <a:t>)</a:t>
+              <a:t>LOC: ~3500</a:t>
             </a:r>
           </a:p>
         </p:txBody>
@@ -3658,6 +3664,838 @@
         </p:nvSpPr>
         <p:spPr>
           <a:xfrm>
+            <a:off x="2953475" y="274321"/>
+            <a:ext cx="6285054" cy="769441"/>
+          </a:xfrm>
+          <a:prstGeom prst="rect">
+            <a:avLst/>
+          </a:prstGeom>
+          <a:noFill/>
+        </p:spPr>
+        <p:txBody>
+          <a:bodyPr wrap="none">
+            <a:spAutoFit/>
+          </a:bodyPr>
+          <a:lstStyle/>
+          <a:p>
+            <a:pPr algn="ctr">
+              <a:defRPr sz="4400" b="1">
+                <a:solidFill>
+                  <a:srgbClr val="1F4E79"/>
+                </a:solidFill>
+              </a:defRPr>
+            </a:pPr>
+            <a:r>
+              <a:rPr sz="4400" dirty="0"/>
+              <a:t>What </a:t>
+            </a:r>
+            <a:r>
+              <a:rPr lang="en-US" sz="4400" dirty="0"/>
+              <a:t>The</a:t>
+            </a:r>
+            <a:r>
+              <a:rPr sz="4400" dirty="0"/>
+              <a:t> Tool </a:t>
+            </a:r>
+            <a:r>
+              <a:rPr lang="en-US" sz="4400" dirty="0"/>
+              <a:t>Will Detect</a:t>
+            </a:r>
+            <a:endParaRPr sz="4400" dirty="0"/>
+          </a:p>
+        </p:txBody>
+      </p:sp>
+      <p:sp>
+        <p:nvSpPr>
+          <p:cNvPr id="3" name="Rounded Rectangle 2"/>
+          <p:cNvSpPr/>
+          <p:nvPr/>
+        </p:nvSpPr>
+        <p:spPr>
+          <a:xfrm>
+            <a:off x="1539050" y="1645920"/>
+            <a:ext cx="3657600" cy="4389120"/>
+          </a:xfrm>
+          <a:prstGeom prst="roundRect">
+            <a:avLst/>
+          </a:prstGeom>
+          <a:solidFill>
+            <a:srgbClr val="F2F2F2"/>
+          </a:solidFill>
+          <a:ln w="38100">
+            <a:solidFill>
+              <a:srgbClr val="ED7D31"/>
+            </a:solidFill>
+          </a:ln>
+        </p:spPr>
+        <p:style>
+          <a:lnRef idx="1">
+            <a:schemeClr val="accent1"/>
+          </a:lnRef>
+          <a:fillRef idx="3">
+            <a:schemeClr val="accent1"/>
+          </a:fillRef>
+          <a:effectRef idx="2">
+            <a:schemeClr val="accent1"/>
+          </a:effectRef>
+          <a:fontRef idx="minor">
+            <a:schemeClr val="lt1"/>
+          </a:fontRef>
+        </p:style>
+        <p:txBody>
+          <a:bodyPr rtlCol="0" anchor="ctr"/>
+          <a:lstStyle/>
+          <a:p>
+            <a:pPr algn="ctr"/>
+            <a:endParaRPr/>
+          </a:p>
+        </p:txBody>
+      </p:sp>
+      <p:sp>
+        <p:nvSpPr>
+          <p:cNvPr id="4" name="TextBox 3"/>
+          <p:cNvSpPr txBox="1"/>
+          <p:nvPr/>
+        </p:nvSpPr>
+        <p:spPr>
+          <a:xfrm>
+            <a:off x="1876779" y="1818968"/>
+            <a:ext cx="2645275" cy="523220"/>
+          </a:xfrm>
+          <a:prstGeom prst="rect">
+            <a:avLst/>
+          </a:prstGeom>
+          <a:noFill/>
+        </p:spPr>
+        <p:txBody>
+          <a:bodyPr wrap="none">
+            <a:spAutoFit/>
+          </a:bodyPr>
+          <a:lstStyle/>
+          <a:p>
+            <a:pPr algn="ctr">
+              <a:defRPr sz="2800" b="1">
+                <a:solidFill>
+                  <a:srgbClr val="ED7D31"/>
+                </a:solidFill>
+              </a:defRPr>
+            </a:pPr>
+            <a:r>
+              <a:rPr sz="2800" dirty="0"/>
+              <a:t>Flakiness Causes</a:t>
+            </a:r>
+          </a:p>
+        </p:txBody>
+      </p:sp>
+      <p:sp>
+        <p:nvSpPr>
+          <p:cNvPr id="5" name="TextBox 4"/>
+          <p:cNvSpPr txBox="1"/>
+          <p:nvPr/>
+        </p:nvSpPr>
+        <p:spPr>
+          <a:xfrm>
+            <a:off x="1644936" y="2459048"/>
+            <a:ext cx="3108960" cy="3313728"/>
+          </a:xfrm>
+          <a:prstGeom prst="rect">
+            <a:avLst/>
+          </a:prstGeom>
+          <a:noFill/>
+        </p:spPr>
+        <p:txBody>
+          <a:bodyPr wrap="square">
+            <a:spAutoFit/>
+          </a:bodyPr>
+          <a:lstStyle/>
+          <a:p>
+            <a:pPr>
+              <a:spcBef>
+                <a:spcPts val="800"/>
+              </a:spcBef>
+              <a:defRPr sz="2200">
+                <a:solidFill>
+                  <a:srgbClr val="444444"/>
+                </a:solidFill>
+              </a:defRPr>
+            </a:pPr>
+            <a:r>
+              <a:rPr sz="2200" dirty="0"/>
+              <a:t>• Random numbers (no seed)</a:t>
+            </a:r>
+          </a:p>
+          <a:p>
+            <a:pPr>
+              <a:spcBef>
+                <a:spcPts val="800"/>
+              </a:spcBef>
+              <a:defRPr sz="2200">
+                <a:solidFill>
+                  <a:srgbClr val="444444"/>
+                </a:solidFill>
+              </a:defRPr>
+            </a:pPr>
+            <a:r>
+              <a:rPr sz="2200" dirty="0"/>
+              <a:t>• Sleep or wait calls</a:t>
+            </a:r>
+          </a:p>
+          <a:p>
+            <a:pPr>
+              <a:spcBef>
+                <a:spcPts val="800"/>
+              </a:spcBef>
+              <a:defRPr sz="2200">
+                <a:solidFill>
+                  <a:srgbClr val="444444"/>
+                </a:solidFill>
+              </a:defRPr>
+            </a:pPr>
+            <a:r>
+              <a:rPr sz="2200" dirty="0"/>
+              <a:t>• Environment variables</a:t>
+            </a:r>
+          </a:p>
+          <a:p>
+            <a:pPr>
+              <a:spcBef>
+                <a:spcPts val="800"/>
+              </a:spcBef>
+              <a:defRPr sz="2200">
+                <a:solidFill>
+                  <a:srgbClr val="444444"/>
+                </a:solidFill>
+              </a:defRPr>
+            </a:pPr>
+            <a:r>
+              <a:rPr sz="2200" dirty="0"/>
+              <a:t>• Time-based code</a:t>
+            </a:r>
+          </a:p>
+          <a:p>
+            <a:pPr>
+              <a:spcBef>
+                <a:spcPts val="800"/>
+              </a:spcBef>
+              <a:defRPr sz="2200">
+                <a:solidFill>
+                  <a:srgbClr val="444444"/>
+                </a:solidFill>
+              </a:defRPr>
+            </a:pPr>
+            <a:r>
+              <a:rPr sz="2200" dirty="0"/>
+              <a:t>• Shared global variables</a:t>
+            </a:r>
+          </a:p>
+          <a:p>
+            <a:pPr>
+              <a:spcBef>
+                <a:spcPts val="800"/>
+              </a:spcBef>
+              <a:defRPr sz="2200">
+                <a:solidFill>
+                  <a:srgbClr val="444444"/>
+                </a:solidFill>
+              </a:defRPr>
+            </a:pPr>
+            <a:r>
+              <a:rPr sz="2200" dirty="0"/>
+              <a:t>• Thread/concurrency issues</a:t>
+            </a:r>
+          </a:p>
+        </p:txBody>
+      </p:sp>
+      <p:sp>
+        <p:nvSpPr>
+          <p:cNvPr id="6" name="Rounded Rectangle 5"/>
+          <p:cNvSpPr/>
+          <p:nvPr/>
+        </p:nvSpPr>
+        <p:spPr>
+          <a:xfrm>
+            <a:off x="6632839" y="1616424"/>
+            <a:ext cx="3657600" cy="4389120"/>
+          </a:xfrm>
+          <a:prstGeom prst="roundRect">
+            <a:avLst/>
+          </a:prstGeom>
+          <a:solidFill>
+            <a:srgbClr val="F2F2F2"/>
+          </a:solidFill>
+          <a:ln w="38100">
+            <a:solidFill>
+              <a:srgbClr val="4472C4"/>
+            </a:solidFill>
+          </a:ln>
+        </p:spPr>
+        <p:style>
+          <a:lnRef idx="1">
+            <a:schemeClr val="accent1"/>
+          </a:lnRef>
+          <a:fillRef idx="3">
+            <a:schemeClr val="accent1"/>
+          </a:fillRef>
+          <a:effectRef idx="2">
+            <a:schemeClr val="accent1"/>
+          </a:effectRef>
+          <a:fontRef idx="minor">
+            <a:schemeClr val="lt1"/>
+          </a:fontRef>
+        </p:style>
+        <p:txBody>
+          <a:bodyPr rtlCol="0" anchor="ctr"/>
+          <a:lstStyle/>
+          <a:p>
+            <a:pPr algn="ctr"/>
+            <a:endParaRPr/>
+          </a:p>
+        </p:txBody>
+      </p:sp>
+      <p:sp>
+        <p:nvSpPr>
+          <p:cNvPr id="7" name="TextBox 6"/>
+          <p:cNvSpPr txBox="1"/>
+          <p:nvPr/>
+        </p:nvSpPr>
+        <p:spPr>
+          <a:xfrm>
+            <a:off x="7248583" y="1799304"/>
+            <a:ext cx="2426113" cy="523220"/>
+          </a:xfrm>
+          <a:prstGeom prst="rect">
+            <a:avLst/>
+          </a:prstGeom>
+          <a:noFill/>
+        </p:spPr>
+        <p:txBody>
+          <a:bodyPr wrap="none">
+            <a:spAutoFit/>
+          </a:bodyPr>
+          <a:lstStyle/>
+          <a:p>
+            <a:pPr algn="ctr">
+              <a:defRPr sz="2800" b="1">
+                <a:solidFill>
+                  <a:srgbClr val="4472C4"/>
+                </a:solidFill>
+              </a:defRPr>
+            </a:pPr>
+            <a:r>
+              <a:rPr sz="2800"/>
+              <a:t>Code Problems</a:t>
+            </a:r>
+          </a:p>
+        </p:txBody>
+      </p:sp>
+      <p:sp>
+        <p:nvSpPr>
+          <p:cNvPr id="8" name="TextBox 7"/>
+          <p:cNvSpPr txBox="1"/>
+          <p:nvPr/>
+        </p:nvSpPr>
+        <p:spPr>
+          <a:xfrm>
+            <a:off x="6907159" y="2439385"/>
+            <a:ext cx="3108960" cy="2975173"/>
+          </a:xfrm>
+          <a:prstGeom prst="rect">
+            <a:avLst/>
+          </a:prstGeom>
+          <a:noFill/>
+        </p:spPr>
+        <p:txBody>
+          <a:bodyPr wrap="square">
+            <a:spAutoFit/>
+          </a:bodyPr>
+          <a:lstStyle/>
+          <a:p>
+            <a:pPr>
+              <a:spcBef>
+                <a:spcPts val="800"/>
+              </a:spcBef>
+              <a:defRPr sz="2200">
+                <a:solidFill>
+                  <a:srgbClr val="444444"/>
+                </a:solidFill>
+              </a:defRPr>
+            </a:pPr>
+            <a:r>
+              <a:rPr sz="2200" dirty="0"/>
+              <a:t>• Array out of bounds</a:t>
+            </a:r>
+          </a:p>
+          <a:p>
+            <a:pPr>
+              <a:spcBef>
+                <a:spcPts val="800"/>
+              </a:spcBef>
+              <a:defRPr sz="2200">
+                <a:solidFill>
+                  <a:srgbClr val="444444"/>
+                </a:solidFill>
+              </a:defRPr>
+            </a:pPr>
+            <a:r>
+              <a:rPr sz="2200" dirty="0"/>
+              <a:t>• Null pointer use</a:t>
+            </a:r>
+          </a:p>
+          <a:p>
+            <a:pPr>
+              <a:spcBef>
+                <a:spcPts val="800"/>
+              </a:spcBef>
+              <a:defRPr sz="2200">
+                <a:solidFill>
+                  <a:srgbClr val="444444"/>
+                </a:solidFill>
+              </a:defRPr>
+            </a:pPr>
+            <a:r>
+              <a:rPr sz="2200" dirty="0"/>
+              <a:t>• Memory leaks</a:t>
+            </a:r>
+          </a:p>
+          <a:p>
+            <a:pPr>
+              <a:spcBef>
+                <a:spcPts val="800"/>
+              </a:spcBef>
+              <a:defRPr sz="2200">
+                <a:solidFill>
+                  <a:srgbClr val="444444"/>
+                </a:solidFill>
+              </a:defRPr>
+            </a:pPr>
+            <a:r>
+              <a:rPr sz="2200" dirty="0"/>
+              <a:t>• Division by zero</a:t>
+            </a:r>
+          </a:p>
+          <a:p>
+            <a:pPr>
+              <a:spcBef>
+                <a:spcPts val="800"/>
+              </a:spcBef>
+              <a:defRPr sz="2200">
+                <a:solidFill>
+                  <a:srgbClr val="444444"/>
+                </a:solidFill>
+              </a:defRPr>
+            </a:pPr>
+            <a:r>
+              <a:rPr sz="2200" dirty="0"/>
+              <a:t>• Uninitialized variables</a:t>
+            </a:r>
+          </a:p>
+          <a:p>
+            <a:pPr>
+              <a:spcBef>
+                <a:spcPts val="800"/>
+              </a:spcBef>
+              <a:defRPr sz="2200">
+                <a:solidFill>
+                  <a:srgbClr val="444444"/>
+                </a:solidFill>
+              </a:defRPr>
+            </a:pPr>
+            <a:r>
+              <a:rPr sz="2200" dirty="0"/>
+              <a:t>• Missing return statements</a:t>
+            </a:r>
+          </a:p>
+        </p:txBody>
+      </p:sp>
+      <p:sp>
+        <p:nvSpPr>
+          <p:cNvPr id="9" name="Slide Number Placeholder 8">
+            <a:extLst>
+              <a:ext uri="{FF2B5EF4-FFF2-40B4-BE49-F238E27FC236}">
+                <a16:creationId xmlns:a16="http://schemas.microsoft.com/office/drawing/2014/main" id="{90F6EF5D-D2A8-35D8-C8FB-B180A01CEADC}"/>
+              </a:ext>
+            </a:extLst>
+          </p:cNvPr>
+          <p:cNvSpPr>
+            <a:spLocks noGrp="1"/>
+          </p:cNvSpPr>
+          <p:nvPr>
+            <p:ph type="sldNum" sz="quarter" idx="12"/>
+          </p:nvPr>
+        </p:nvSpPr>
+        <p:spPr/>
+        <p:txBody>
+          <a:bodyPr/>
+          <a:lstStyle/>
+          <a:p>
+            <a:fld id="{C1FF6DA9-008F-8B48-92A6-B652298478BF}" type="slidenum">
+              <a:rPr lang="en-US" smtClean="0"/>
+              <a:t>10</a:t>
+            </a:fld>
+            <a:endParaRPr lang="en-US"/>
+          </a:p>
+        </p:txBody>
+      </p:sp>
+    </p:spTree>
+  </p:cSld>
+  <p:clrMapOvr>
+    <a:masterClrMapping/>
+  </p:clrMapOvr>
+</p:sld>
+</file>
+
+<file path=ppt/slides/slide11.xml><?xml version="1.0" encoding="utf-8"?>
+<p:sld xmlns:a="http://schemas.openxmlformats.org/drawingml/2006/main" xmlns:r="http://schemas.openxmlformats.org/officeDocument/2006/relationships" xmlns:p="http://schemas.openxmlformats.org/presentationml/2006/main">
+  <p:cSld>
+    <p:spTree>
+      <p:nvGrpSpPr>
+        <p:cNvPr id="1" name=""/>
+        <p:cNvGrpSpPr/>
+        <p:nvPr/>
+      </p:nvGrpSpPr>
+      <p:grpSpPr>
+        <a:xfrm>
+          <a:off x="0" y="0"/>
+          <a:ext cx="0" cy="0"/>
+          <a:chOff x="0" y="0"/>
+          <a:chExt cx="0" cy="0"/>
+        </a:xfrm>
+      </p:grpSpPr>
+      <p:sp>
+        <p:nvSpPr>
+          <p:cNvPr id="2" name="TextBox 1"/>
+          <p:cNvSpPr txBox="1"/>
+          <p:nvPr/>
+        </p:nvSpPr>
+        <p:spPr>
+          <a:xfrm>
+            <a:off x="4417496" y="274321"/>
+            <a:ext cx="3357009" cy="769441"/>
+          </a:xfrm>
+          <a:prstGeom prst="rect">
+            <a:avLst/>
+          </a:prstGeom>
+          <a:noFill/>
+        </p:spPr>
+        <p:txBody>
+          <a:bodyPr wrap="none">
+            <a:spAutoFit/>
+          </a:bodyPr>
+          <a:lstStyle/>
+          <a:p>
+            <a:pPr algn="ctr">
+              <a:defRPr sz="4400" b="1">
+                <a:solidFill>
+                  <a:srgbClr val="1F4E79"/>
+                </a:solidFill>
+              </a:defRPr>
+            </a:pPr>
+            <a:r>
+              <a:rPr sz="4400"/>
+              <a:t>Project Scope</a:t>
+            </a:r>
+          </a:p>
+        </p:txBody>
+      </p:sp>
+      <p:sp>
+        <p:nvSpPr>
+          <p:cNvPr id="3" name="TextBox 2"/>
+          <p:cNvSpPr txBox="1"/>
+          <p:nvPr/>
+        </p:nvSpPr>
+        <p:spPr>
+          <a:xfrm>
+            <a:off x="2144421" y="2158176"/>
+            <a:ext cx="2850364" cy="3016210"/>
+          </a:xfrm>
+          <a:prstGeom prst="rect">
+            <a:avLst/>
+          </a:prstGeom>
+          <a:noFill/>
+        </p:spPr>
+        <p:txBody>
+          <a:bodyPr wrap="square">
+            <a:spAutoFit/>
+          </a:bodyPr>
+          <a:lstStyle/>
+          <a:p>
+            <a:pPr algn="ctr">
+              <a:defRPr sz="3000" b="1">
+                <a:solidFill>
+                  <a:srgbClr val="5CB85C"/>
+                </a:solidFill>
+              </a:defRPr>
+            </a:pPr>
+            <a:r>
+              <a:rPr sz="3000" dirty="0"/>
+              <a:t>What's Included</a:t>
+            </a:r>
+          </a:p>
+          <a:p>
+            <a:pPr>
+              <a:spcBef>
+                <a:spcPts val="1200"/>
+              </a:spcBef>
+              <a:defRPr sz="2200">
+                <a:solidFill>
+                  <a:srgbClr val="444444"/>
+                </a:solidFill>
+              </a:defRPr>
+            </a:pPr>
+            <a:r>
+              <a:rPr sz="2200" dirty="0"/>
+              <a:t>• C++ and </a:t>
+            </a:r>
+            <a:r>
+              <a:rPr sz="2200" dirty="0" err="1"/>
+              <a:t>GoogleTest</a:t>
+            </a:r>
+            <a:endParaRPr sz="2200" dirty="0"/>
+          </a:p>
+          <a:p>
+            <a:pPr>
+              <a:spcBef>
+                <a:spcPts val="1200"/>
+              </a:spcBef>
+              <a:defRPr sz="2200">
+                <a:solidFill>
+                  <a:srgbClr val="444444"/>
+                </a:solidFill>
+              </a:defRPr>
+            </a:pPr>
+            <a:r>
+              <a:rPr sz="2200" dirty="0"/>
+              <a:t>• Simple and fast</a:t>
+            </a:r>
+          </a:p>
+          <a:p>
+            <a:pPr>
+              <a:spcBef>
+                <a:spcPts val="1200"/>
+              </a:spcBef>
+              <a:defRPr sz="2200">
+                <a:solidFill>
+                  <a:srgbClr val="444444"/>
+                </a:solidFill>
+              </a:defRPr>
+            </a:pPr>
+            <a:r>
+              <a:rPr sz="2200" dirty="0"/>
+              <a:t>• Find flaky tests</a:t>
+            </a:r>
+          </a:p>
+          <a:p>
+            <a:pPr>
+              <a:spcBef>
+                <a:spcPts val="1200"/>
+              </a:spcBef>
+              <a:defRPr sz="2200">
+                <a:solidFill>
+                  <a:srgbClr val="444444"/>
+                </a:solidFill>
+              </a:defRPr>
+            </a:pPr>
+            <a:r>
+              <a:rPr sz="2200" dirty="0"/>
+              <a:t>• Explain why they fail</a:t>
+            </a:r>
+          </a:p>
+          <a:p>
+            <a:pPr>
+              <a:spcBef>
+                <a:spcPts val="1200"/>
+              </a:spcBef>
+              <a:defRPr sz="2200">
+                <a:solidFill>
+                  <a:srgbClr val="444444"/>
+                </a:solidFill>
+              </a:defRPr>
+            </a:pPr>
+            <a:r>
+              <a:rPr sz="2200" dirty="0"/>
+              <a:t>• Easy to use</a:t>
+            </a:r>
+          </a:p>
+        </p:txBody>
+      </p:sp>
+      <p:sp>
+        <p:nvSpPr>
+          <p:cNvPr id="4" name="TextBox 3"/>
+          <p:cNvSpPr txBox="1"/>
+          <p:nvPr/>
+        </p:nvSpPr>
+        <p:spPr>
+          <a:xfrm>
+            <a:off x="7416469" y="2158176"/>
+            <a:ext cx="2850363" cy="3016210"/>
+          </a:xfrm>
+          <a:prstGeom prst="rect">
+            <a:avLst/>
+          </a:prstGeom>
+          <a:noFill/>
+        </p:spPr>
+        <p:txBody>
+          <a:bodyPr wrap="square">
+            <a:spAutoFit/>
+          </a:bodyPr>
+          <a:lstStyle/>
+          <a:p>
+            <a:pPr algn="ctr">
+              <a:defRPr sz="3000" b="1">
+                <a:solidFill>
+                  <a:srgbClr val="D9534F"/>
+                </a:solidFill>
+              </a:defRPr>
+            </a:pPr>
+            <a:r>
+              <a:rPr sz="3000" dirty="0"/>
+              <a:t>Not Included</a:t>
+            </a:r>
+          </a:p>
+          <a:p>
+            <a:pPr>
+              <a:spcBef>
+                <a:spcPts val="1200"/>
+              </a:spcBef>
+              <a:defRPr sz="2200">
+                <a:solidFill>
+                  <a:srgbClr val="444444"/>
+                </a:solidFill>
+              </a:defRPr>
+            </a:pPr>
+            <a:r>
+              <a:rPr sz="2200" dirty="0"/>
+              <a:t>• Big complex libraries</a:t>
+            </a:r>
+          </a:p>
+          <a:p>
+            <a:pPr>
+              <a:spcBef>
+                <a:spcPts val="1200"/>
+              </a:spcBef>
+              <a:defRPr sz="2200">
+                <a:solidFill>
+                  <a:srgbClr val="444444"/>
+                </a:solidFill>
+              </a:defRPr>
+            </a:pPr>
+            <a:r>
+              <a:rPr sz="2200" dirty="0"/>
+              <a:t>• Full compiler</a:t>
+            </a:r>
+          </a:p>
+          <a:p>
+            <a:pPr>
+              <a:spcBef>
+                <a:spcPts val="1200"/>
+              </a:spcBef>
+              <a:defRPr sz="2200">
+                <a:solidFill>
+                  <a:srgbClr val="444444"/>
+                </a:solidFill>
+              </a:defRPr>
+            </a:pPr>
+            <a:r>
+              <a:rPr sz="2200" dirty="0"/>
+              <a:t>• Auto code fixing</a:t>
+            </a:r>
+          </a:p>
+          <a:p>
+            <a:pPr>
+              <a:spcBef>
+                <a:spcPts val="1200"/>
+              </a:spcBef>
+              <a:defRPr sz="2200">
+                <a:solidFill>
+                  <a:srgbClr val="444444"/>
+                </a:solidFill>
+              </a:defRPr>
+            </a:pPr>
+            <a:r>
+              <a:rPr sz="2200" dirty="0"/>
+              <a:t>• Multiple languages</a:t>
+            </a:r>
+          </a:p>
+          <a:p>
+            <a:pPr>
+              <a:spcBef>
+                <a:spcPts val="1200"/>
+              </a:spcBef>
+              <a:defRPr sz="2200">
+                <a:solidFill>
+                  <a:srgbClr val="444444"/>
+                </a:solidFill>
+              </a:defRPr>
+            </a:pPr>
+            <a:r>
+              <a:rPr sz="2200" dirty="0"/>
+              <a:t>• Fancy GUI</a:t>
+            </a:r>
+          </a:p>
+        </p:txBody>
+      </p:sp>
+      <p:sp>
+        <p:nvSpPr>
+          <p:cNvPr id="5" name="Slide Number Placeholder 4">
+            <a:extLst>
+              <a:ext uri="{FF2B5EF4-FFF2-40B4-BE49-F238E27FC236}">
+                <a16:creationId xmlns:a16="http://schemas.microsoft.com/office/drawing/2014/main" id="{CA6EB711-C6BC-CCC5-27C1-F8563EA43EED}"/>
+              </a:ext>
+            </a:extLst>
+          </p:cNvPr>
+          <p:cNvSpPr>
+            <a:spLocks noGrp="1"/>
+          </p:cNvSpPr>
+          <p:nvPr>
+            <p:ph type="sldNum" sz="quarter" idx="12"/>
+          </p:nvPr>
+        </p:nvSpPr>
+        <p:spPr/>
+        <p:txBody>
+          <a:bodyPr/>
+          <a:lstStyle/>
+          <a:p>
+            <a:fld id="{C1FF6DA9-008F-8B48-92A6-B652298478BF}" type="slidenum">
+              <a:rPr lang="en-US" smtClean="0"/>
+              <a:t>11</a:t>
+            </a:fld>
+            <a:endParaRPr lang="en-US"/>
+          </a:p>
+        </p:txBody>
+      </p:sp>
+    </p:spTree>
+  </p:cSld>
+  <p:clrMapOvr>
+    <a:masterClrMapping/>
+  </p:clrMapOvr>
+</p:sld>
+</file>
+
+<file path=ppt/slides/slide12.xml><?xml version="1.0" encoding="utf-8"?>
+<p:sld xmlns:a="http://schemas.openxmlformats.org/drawingml/2006/main" xmlns:r="http://schemas.openxmlformats.org/officeDocument/2006/relationships" xmlns:p="http://schemas.openxmlformats.org/presentationml/2006/main">
+  <p:cSld>
+    <p:spTree>
+      <p:nvGrpSpPr>
+        <p:cNvPr id="1" name=""/>
+        <p:cNvGrpSpPr/>
+        <p:nvPr/>
+      </p:nvGrpSpPr>
+      <p:grpSpPr>
+        <a:xfrm>
+          <a:off x="0" y="0"/>
+          <a:ext cx="0" cy="0"/>
+          <a:chOff x="0" y="0"/>
+          <a:chExt cx="0" cy="0"/>
+        </a:xfrm>
+      </p:grpSpPr>
+      <p:sp>
+        <p:nvSpPr>
+          <p:cNvPr id="2" name="TextBox 1"/>
+          <p:cNvSpPr txBox="1"/>
+          <p:nvPr/>
+        </p:nvSpPr>
+        <p:spPr>
+          <a:xfrm>
             <a:off x="3646334" y="2285998"/>
             <a:ext cx="4899333" cy="1754326"/>
           </a:xfrm>
@@ -3719,7 +4557,7 @@
           <a:p>
             <a:fld id="{C1FF6DA9-008F-8B48-92A6-B652298478BF}" type="slidenum">
               <a:rPr lang="en-US" smtClean="0"/>
-              <a:t>10</a:t>
+              <a:t>12</a:t>
             </a:fld>
             <a:endParaRPr lang="en-US"/>
           </a:p>
@@ -5608,7 +6446,15 @@
             </a:pPr>
             <a:r>
               <a:rPr lang="en-US" sz="2200" dirty="0"/>
-              <a:t> Analyze both test code and production code</a:t>
+              <a:t> </a:t>
+            </a:r>
+            <a:r>
+              <a:rPr lang="en-US" sz="2200" dirty="0" err="1"/>
+              <a:t>Analyse</a:t>
+            </a:r>
+            <a:r>
+              <a:rPr lang="en-US" sz="2200" dirty="0"/>
+              <a:t> test code</a:t>
             </a:r>
           </a:p>
           <a:p>
@@ -5737,9 +6583,924 @@
           <a:chExt cx="0" cy="0"/>
         </a:xfrm>
       </p:grpSpPr>
-      <p:sp>
-        <p:nvSpPr>
-          <p:cNvPr id="11" name="Down Arrow 7">
+      <p:sp useBgFill="1">
+        <p:nvSpPr>
+          <p:cNvPr id="28" name="Rectangle 27">
+            <a:extLst>
+              <a:ext uri="{FF2B5EF4-FFF2-40B4-BE49-F238E27FC236}">
+                <a16:creationId xmlns:a16="http://schemas.microsoft.com/office/drawing/2014/main" id="{533BF18B-C8A1-400D-BBBD-6103EC90FE1A}"/>
+              </a:ext>
+              <a:ext uri="{C183D7F6-B498-43B3-948B-1728B52AA6E4}">
+                <adec:decorative xmlns:adec="http://schemas.microsoft.com/office/drawing/2017/decorative" val="1"/>
+              </a:ext>
+            </a:extLst>
+          </p:cNvPr>
+          <p:cNvSpPr>
+            <a:spLocks noGrp="1" noRot="1" noChangeAspect="1" noMove="1" noResize="1" noEditPoints="1" noAdjustHandles="1" noChangeArrowheads="1" noChangeShapeType="1" noTextEdit="1"/>
+          </p:cNvSpPr>
+          <p:nvPr>
+            <p:extLst>
+              <p:ext uri="{386F3935-93C4-4BCD-93E2-E3B085C9AB24}">
+                <p16:designElem xmlns:p16="http://schemas.microsoft.com/office/powerpoint/2015/main" val="1"/>
+              </p:ext>
+            </p:extLst>
+          </p:nvPr>
+        </p:nvSpPr>
+        <p:spPr>
+          <a:xfrm>
+            <a:off x="0" y="0"/>
+            <a:ext cx="12191999" cy="6857365"/>
+          </a:xfrm>
+          <a:prstGeom prst="rect">
+            <a:avLst/>
+          </a:prstGeom>
+          <a:ln>
+            <a:noFill/>
+          </a:ln>
+        </p:spPr>
+        <p:style>
+          <a:lnRef idx="2">
+            <a:schemeClr val="accent1">
+              <a:shade val="50000"/>
+            </a:schemeClr>
+          </a:lnRef>
+          <a:fillRef idx="1">
+            <a:schemeClr val="accent1"/>
+          </a:fillRef>
+          <a:effectRef idx="0">
+            <a:schemeClr val="accent1"/>
+          </a:effectRef>
+          <a:fontRef idx="minor">
+            <a:schemeClr val="lt1"/>
+          </a:fontRef>
+        </p:style>
+        <p:txBody>
+          <a:bodyPr rtlCol="0" anchor="ctr"/>
+          <a:lstStyle/>
+          <a:p>
+            <a:pPr algn="ctr"/>
+            <a:endParaRPr lang="en-US"/>
+          </a:p>
+        </p:txBody>
+      </p:sp>
+      <p:sp>
+        <p:nvSpPr>
+          <p:cNvPr id="2" name="TextBox 1"/>
+          <p:cNvSpPr txBox="1"/>
+          <p:nvPr/>
+        </p:nvSpPr>
+        <p:spPr>
+          <a:xfrm>
+            <a:off x="9267909" y="2023110"/>
+            <a:ext cx="2469624" cy="2846070"/>
+          </a:xfrm>
+          <a:prstGeom prst="rect">
+            <a:avLst/>
+          </a:prstGeom>
+        </p:spPr>
+        <p:txBody>
+          <a:bodyPr vert="horz" lIns="91440" tIns="45720" rIns="91440" bIns="45720" rtlCol="0" anchor="ctr">
+            <a:normAutofit/>
+          </a:bodyPr>
+          <a:lstStyle/>
+          <a:p>
+            <a:pPr defTabSz="914400">
+              <a:lnSpc>
+                <a:spcPct val="90000"/>
+              </a:lnSpc>
+              <a:spcBef>
+                <a:spcPct val="0"/>
+              </a:spcBef>
+              <a:spcAft>
+                <a:spcPts val="600"/>
+              </a:spcAft>
+              <a:defRPr sz="4400" b="1">
+                <a:solidFill>
+                  <a:srgbClr val="5CB85C"/>
+                </a:solidFill>
+              </a:defRPr>
+            </a:pPr>
+            <a:r>
+              <a:rPr lang="en-US" sz="3700" kern="1200">
+                <a:solidFill>
+                  <a:schemeClr val="tx1"/>
+                </a:solidFill>
+                <a:latin typeface="+mj-lt"/>
+                <a:ea typeface="+mj-ea"/>
+                <a:cs typeface="+mj-cs"/>
+              </a:rPr>
+              <a:t>Demo </a:t>
+            </a:r>
+          </a:p>
+          <a:p>
+            <a:pPr defTabSz="914400">
+              <a:lnSpc>
+                <a:spcPct val="90000"/>
+              </a:lnSpc>
+              <a:spcBef>
+                <a:spcPct val="0"/>
+              </a:spcBef>
+              <a:spcAft>
+                <a:spcPts val="600"/>
+              </a:spcAft>
+              <a:defRPr sz="4400" b="1">
+                <a:solidFill>
+                  <a:srgbClr val="5CB85C"/>
+                </a:solidFill>
+              </a:defRPr>
+            </a:pPr>
+            <a:r>
+              <a:rPr lang="en-US" sz="3700" kern="1200">
+                <a:solidFill>
+                  <a:schemeClr val="tx1"/>
+                </a:solidFill>
+                <a:latin typeface="+mj-lt"/>
+                <a:ea typeface="+mj-ea"/>
+                <a:cs typeface="+mj-cs"/>
+              </a:rPr>
+              <a:t>I/O</a:t>
+            </a:r>
+          </a:p>
+        </p:txBody>
+      </p:sp>
+      <p:sp>
+        <p:nvSpPr>
+          <p:cNvPr id="35" name="Rectangle 34">
+            <a:extLst>
+              <a:ext uri="{FF2B5EF4-FFF2-40B4-BE49-F238E27FC236}">
+                <a16:creationId xmlns:a16="http://schemas.microsoft.com/office/drawing/2014/main" id="{99413ED5-9ED4-4772-BCE4-2BCAE6B12E35}"/>
+              </a:ext>
+              <a:ext uri="{C183D7F6-B498-43B3-948B-1728B52AA6E4}">
+                <adec:decorative xmlns:adec="http://schemas.microsoft.com/office/drawing/2017/decorative" val="1"/>
+              </a:ext>
+            </a:extLst>
+          </p:cNvPr>
+          <p:cNvSpPr>
+            <a:spLocks noGrp="1" noRot="1" noChangeAspect="1" noMove="1" noResize="1" noEditPoints="1" noAdjustHandles="1" noChangeArrowheads="1" noChangeShapeType="1" noTextEdit="1"/>
+          </p:cNvSpPr>
+          <p:nvPr>
+            <p:extLst>
+              <p:ext uri="{386F3935-93C4-4BCD-93E2-E3B085C9AB24}">
+                <p16:designElem xmlns:p16="http://schemas.microsoft.com/office/powerpoint/2015/main" val="1"/>
+              </p:ext>
+            </p:extLst>
+          </p:nvPr>
+        </p:nvSpPr>
+        <p:spPr>
+          <a:xfrm rot="16200000">
+            <a:off x="3433973" y="-827233"/>
+            <a:ext cx="1715478" cy="8583421"/>
+          </a:xfrm>
+          <a:prstGeom prst="rect">
+            <a:avLst/>
+          </a:prstGeom>
+          <a:solidFill>
+            <a:schemeClr val="accent4"/>
+          </a:solidFill>
+          <a:ln>
+            <a:noFill/>
+          </a:ln>
+        </p:spPr>
+        <p:style>
+          <a:lnRef idx="2">
+            <a:schemeClr val="accent1">
+              <a:shade val="50000"/>
+            </a:schemeClr>
+          </a:lnRef>
+          <a:fillRef idx="1">
+            <a:schemeClr val="accent1"/>
+          </a:fillRef>
+          <a:effectRef idx="0">
+            <a:schemeClr val="accent1"/>
+          </a:effectRef>
+          <a:fontRef idx="minor">
+            <a:schemeClr val="lt1"/>
+          </a:fontRef>
+        </p:style>
+        <p:txBody>
+          <a:bodyPr rtlCol="0" anchor="ctr"/>
+          <a:lstStyle/>
+          <a:p>
+            <a:pPr algn="ctr"/>
+            <a:endParaRPr lang="en-US" dirty="0"/>
+          </a:p>
+        </p:txBody>
+      </p:sp>
+      <p:sp>
+        <p:nvSpPr>
+          <p:cNvPr id="36" name="Rectangle 35">
+            <a:extLst>
+              <a:ext uri="{FF2B5EF4-FFF2-40B4-BE49-F238E27FC236}">
+                <a16:creationId xmlns:a16="http://schemas.microsoft.com/office/drawing/2014/main" id="{04357C93-F0CB-4A1C-8F77-4E9063789819}"/>
+              </a:ext>
+              <a:ext uri="{C183D7F6-B498-43B3-948B-1728B52AA6E4}">
+                <adec:decorative xmlns:adec="http://schemas.microsoft.com/office/drawing/2017/decorative" val="1"/>
+              </a:ext>
+            </a:extLst>
+          </p:cNvPr>
+          <p:cNvSpPr>
+            <a:spLocks noGrp="1" noRot="1" noChangeAspect="1" noMove="1" noResize="1" noEditPoints="1" noAdjustHandles="1" noChangeArrowheads="1" noChangeShapeType="1" noTextEdit="1"/>
+          </p:cNvSpPr>
+          <p:nvPr>
+            <p:extLst>
+              <p:ext uri="{386F3935-93C4-4BCD-93E2-E3B085C9AB24}">
+                <p16:designElem xmlns:p16="http://schemas.microsoft.com/office/powerpoint/2015/main" val="1"/>
+              </p:ext>
+            </p:extLst>
+          </p:nvPr>
+        </p:nvSpPr>
+        <p:spPr>
+          <a:xfrm>
+            <a:off x="302085" y="664308"/>
+            <a:ext cx="8082632" cy="5600340"/>
+          </a:xfrm>
+          <a:prstGeom prst="rect">
+            <a:avLst/>
+          </a:prstGeom>
+          <a:solidFill>
+            <a:schemeClr val="bg1"/>
+          </a:solidFill>
+          <a:ln>
+            <a:noFill/>
+          </a:ln>
+          <a:effectLst>
+            <a:outerShdw blurRad="139700" dist="127000" dir="5400000" algn="t" rotWithShape="0">
+              <a:prstClr val="black">
+                <a:alpha val="15000"/>
+              </a:prstClr>
+            </a:outerShdw>
+          </a:effectLst>
+        </p:spPr>
+        <p:style>
+          <a:lnRef idx="2">
+            <a:schemeClr val="accent1">
+              <a:shade val="50000"/>
+            </a:schemeClr>
+          </a:lnRef>
+          <a:fillRef idx="1">
+            <a:schemeClr val="accent1"/>
+          </a:fillRef>
+          <a:effectRef idx="0">
+            <a:schemeClr val="accent1"/>
+          </a:effectRef>
+          <a:fontRef idx="minor">
+            <a:schemeClr val="lt1"/>
+          </a:fontRef>
+        </p:style>
+        <p:txBody>
+          <a:bodyPr rtlCol="0" anchor="ctr"/>
+          <a:lstStyle/>
+          <a:p>
+            <a:pPr algn="ctr"/>
+            <a:endParaRPr lang="en-US"/>
+          </a:p>
+        </p:txBody>
+      </p:sp>
+      <p:pic>
+        <p:nvPicPr>
+          <p:cNvPr id="5" name="Picture 4">
+            <a:extLst>
+              <a:ext uri="{FF2B5EF4-FFF2-40B4-BE49-F238E27FC236}">
+                <a16:creationId xmlns:a16="http://schemas.microsoft.com/office/drawing/2014/main" id="{102A4762-FB5F-71BC-E6EB-D026C18DF419}"/>
+              </a:ext>
+            </a:extLst>
+          </p:cNvPr>
+          <p:cNvPicPr>
+            <a:picLocks noChangeAspect="1"/>
+          </p:cNvPicPr>
+          <p:nvPr/>
+        </p:nvPicPr>
+        <p:blipFill>
+          <a:blip r:embed="rId2"/>
+          <a:srcRect r="23515" b="-4"/>
+          <a:stretch>
+            <a:fillRect/>
+          </a:stretch>
+        </p:blipFill>
+        <p:spPr>
+          <a:xfrm>
+            <a:off x="302083" y="664306"/>
+            <a:ext cx="8236995" cy="5600339"/>
+          </a:xfrm>
+          <a:prstGeom prst="rect">
+            <a:avLst/>
+          </a:prstGeom>
+        </p:spPr>
+      </p:pic>
+      <p:sp>
+        <p:nvSpPr>
+          <p:cNvPr id="34" name="Rectangle 33">
+            <a:extLst>
+              <a:ext uri="{FF2B5EF4-FFF2-40B4-BE49-F238E27FC236}">
+                <a16:creationId xmlns:a16="http://schemas.microsoft.com/office/drawing/2014/main" id="{90F533E9-6690-41A8-A372-4C6C622D028D}"/>
+              </a:ext>
+              <a:ext uri="{C183D7F6-B498-43B3-948B-1728B52AA6E4}">
+                <adec:decorative xmlns:adec="http://schemas.microsoft.com/office/drawing/2017/decorative" val="1"/>
+              </a:ext>
+            </a:extLst>
+          </p:cNvPr>
+          <p:cNvSpPr>
+            <a:spLocks noGrp="1" noRot="1" noChangeAspect="1" noMove="1" noResize="1" noEditPoints="1" noAdjustHandles="1" noChangeArrowheads="1" noChangeShapeType="1" noTextEdit="1"/>
+          </p:cNvSpPr>
+          <p:nvPr>
+            <p:extLst>
+              <p:ext uri="{386F3935-93C4-4BCD-93E2-E3B085C9AB24}">
+                <p16:designElem xmlns:p16="http://schemas.microsoft.com/office/powerpoint/2015/main" val="1"/>
+              </p:ext>
+            </p:extLst>
+          </p:nvPr>
+        </p:nvSpPr>
+        <p:spPr>
+          <a:xfrm rot="5400000">
+            <a:off x="7950447" y="3392097"/>
+            <a:ext cx="1719072" cy="152382"/>
+          </a:xfrm>
+          <a:prstGeom prst="rect">
+            <a:avLst/>
+          </a:prstGeom>
+          <a:solidFill>
+            <a:schemeClr val="accent4"/>
+          </a:solidFill>
+          <a:ln>
+            <a:noFill/>
+          </a:ln>
+        </p:spPr>
+        <p:style>
+          <a:lnRef idx="2">
+            <a:schemeClr val="accent1">
+              <a:shade val="50000"/>
+            </a:schemeClr>
+          </a:lnRef>
+          <a:fillRef idx="1">
+            <a:schemeClr val="accent1"/>
+          </a:fillRef>
+          <a:effectRef idx="0">
+            <a:schemeClr val="accent1"/>
+          </a:effectRef>
+          <a:fontRef idx="minor">
+            <a:schemeClr val="lt1"/>
+          </a:fontRef>
+        </p:style>
+        <p:txBody>
+          <a:bodyPr rtlCol="0" anchor="ctr"/>
+          <a:lstStyle/>
+          <a:p>
+            <a:pPr algn="ctr"/>
+            <a:endParaRPr lang="en-US"/>
+          </a:p>
+        </p:txBody>
+      </p:sp>
+      <p:sp>
+        <p:nvSpPr>
+          <p:cNvPr id="4" name="Slide Number Placeholder 3">
+            <a:extLst>
+              <a:ext uri="{FF2B5EF4-FFF2-40B4-BE49-F238E27FC236}">
+                <a16:creationId xmlns:a16="http://schemas.microsoft.com/office/drawing/2014/main" id="{3CB9B738-CE54-DCFC-A1D1-93C1EA03770F}"/>
+              </a:ext>
+            </a:extLst>
+          </p:cNvPr>
+          <p:cNvSpPr>
+            <a:spLocks noGrp="1"/>
+          </p:cNvSpPr>
+          <p:nvPr>
+            <p:ph type="sldNum" sz="quarter" idx="12"/>
+          </p:nvPr>
+        </p:nvSpPr>
+        <p:spPr>
+          <a:xfrm>
+            <a:off x="8610599" y="6492240"/>
+            <a:ext cx="3126933" cy="365125"/>
+          </a:xfrm>
+        </p:spPr>
+        <p:txBody>
+          <a:bodyPr vert="horz" lIns="91440" tIns="45720" rIns="91440" bIns="45720" rtlCol="0" anchor="ctr">
+            <a:normAutofit/>
+          </a:bodyPr>
+          <a:lstStyle/>
+          <a:p>
+            <a:pPr defTabSz="914400">
+              <a:spcAft>
+                <a:spcPts val="600"/>
+              </a:spcAft>
+            </a:pPr>
+            <a:fld id="{C1FF6DA9-008F-8B48-92A6-B652298478BF}" type="slidenum">
+              <a:rPr lang="en-US" smtClean="0"/>
+              <a:pPr defTabSz="914400">
+                <a:spcAft>
+                  <a:spcPts val="600"/>
+                </a:spcAft>
+              </a:pPr>
+              <a:t>7</a:t>
+            </a:fld>
+            <a:endParaRPr lang="en-US"/>
+          </a:p>
+        </p:txBody>
+      </p:sp>
+    </p:spTree>
+  </p:cSld>
+  <p:clrMapOvr>
+    <a:masterClrMapping/>
+  </p:clrMapOvr>
+</p:sld>
+</file>
+
+<file path=ppt/slides/slide8.xml><?xml version="1.0" encoding="utf-8"?>
+<p:sld xmlns:a="http://schemas.openxmlformats.org/drawingml/2006/main" xmlns:r="http://schemas.openxmlformats.org/officeDocument/2006/relationships" xmlns:p="http://schemas.openxmlformats.org/presentationml/2006/main">
+  <p:cSld>
+    <p:bg>
+      <p:bgPr>
+        <a:solidFill>
+          <a:schemeClr val="bg1"/>
+        </a:solidFill>
+        <a:effectLst/>
+      </p:bgPr>
+    </p:bg>
+    <p:spTree>
+      <p:nvGrpSpPr>
+        <p:cNvPr id="1" name="">
+          <a:extLst>
+            <a:ext uri="{FF2B5EF4-FFF2-40B4-BE49-F238E27FC236}">
+              <a16:creationId xmlns:a16="http://schemas.microsoft.com/office/drawing/2014/main" id="{0E8B7F5F-DF68-BDF1-6DDE-4AB3710ED55D}"/>
+            </a:ext>
+          </a:extLst>
+        </p:cNvPr>
+        <p:cNvGrpSpPr/>
+        <p:nvPr/>
+      </p:nvGrpSpPr>
+      <p:grpSpPr>
+        <a:xfrm>
+          <a:off x="0" y="0"/>
+          <a:ext cx="0" cy="0"/>
+          <a:chOff x="0" y="0"/>
+          <a:chExt cx="0" cy="0"/>
+        </a:xfrm>
+      </p:grpSpPr>
+      <p:sp useBgFill="1">
+        <p:nvSpPr>
+          <p:cNvPr id="28" name="Rectangle 27">
+            <a:extLst>
+              <a:ext uri="{FF2B5EF4-FFF2-40B4-BE49-F238E27FC236}">
+                <a16:creationId xmlns:a16="http://schemas.microsoft.com/office/drawing/2014/main" id="{9150B96F-188B-5BD4-9527-92F3A0A81E6E}"/>
+              </a:ext>
+              <a:ext uri="{C183D7F6-B498-43B3-948B-1728B52AA6E4}">
+                <adec:decorative xmlns:adec="http://schemas.microsoft.com/office/drawing/2017/decorative" val="1"/>
+              </a:ext>
+            </a:extLst>
+          </p:cNvPr>
+          <p:cNvSpPr>
+            <a:spLocks noGrp="1" noRot="1" noChangeAspect="1" noMove="1" noResize="1" noEditPoints="1" noAdjustHandles="1" noChangeArrowheads="1" noChangeShapeType="1" noTextEdit="1"/>
+          </p:cNvSpPr>
+          <p:nvPr>
+            <p:extLst>
+              <p:ext uri="{386F3935-93C4-4BCD-93E2-E3B085C9AB24}">
+                <p16:designElem xmlns:p16="http://schemas.microsoft.com/office/powerpoint/2015/main" val="1"/>
+              </p:ext>
+            </p:extLst>
+          </p:nvPr>
+        </p:nvSpPr>
+        <p:spPr>
+          <a:xfrm>
+            <a:off x="0" y="0"/>
+            <a:ext cx="12191999" cy="6857365"/>
+          </a:xfrm>
+          <a:prstGeom prst="rect">
+            <a:avLst/>
+          </a:prstGeom>
+          <a:ln>
+            <a:noFill/>
+          </a:ln>
+        </p:spPr>
+        <p:style>
+          <a:lnRef idx="2">
+            <a:schemeClr val="accent1">
+              <a:shade val="50000"/>
+            </a:schemeClr>
+          </a:lnRef>
+          <a:fillRef idx="1">
+            <a:schemeClr val="accent1"/>
+          </a:fillRef>
+          <a:effectRef idx="0">
+            <a:schemeClr val="accent1"/>
+          </a:effectRef>
+          <a:fontRef idx="minor">
+            <a:schemeClr val="lt1"/>
+          </a:fontRef>
+        </p:style>
+        <p:txBody>
+          <a:bodyPr rtlCol="0" anchor="ctr"/>
+          <a:lstStyle/>
+          <a:p>
+            <a:pPr algn="ctr"/>
+            <a:endParaRPr lang="en-US"/>
+          </a:p>
+        </p:txBody>
+      </p:sp>
+      <p:sp>
+        <p:nvSpPr>
+          <p:cNvPr id="2" name="TextBox 1">
+            <a:extLst>
+              <a:ext uri="{FF2B5EF4-FFF2-40B4-BE49-F238E27FC236}">
+                <a16:creationId xmlns:a16="http://schemas.microsoft.com/office/drawing/2014/main" id="{911D7CA7-1C38-D16E-C3C9-7BAD1BB55922}"/>
+              </a:ext>
+            </a:extLst>
+          </p:cNvPr>
+          <p:cNvSpPr txBox="1"/>
+          <p:nvPr/>
+        </p:nvSpPr>
+        <p:spPr>
+          <a:xfrm>
+            <a:off x="9267909" y="2023110"/>
+            <a:ext cx="2469624" cy="2846070"/>
+          </a:xfrm>
+          <a:prstGeom prst="rect">
+            <a:avLst/>
+          </a:prstGeom>
+        </p:spPr>
+        <p:txBody>
+          <a:bodyPr vert="horz" lIns="91440" tIns="45720" rIns="91440" bIns="45720" rtlCol="0" anchor="ctr">
+            <a:normAutofit/>
+          </a:bodyPr>
+          <a:lstStyle/>
+          <a:p>
+            <a:pPr defTabSz="914400">
+              <a:lnSpc>
+                <a:spcPct val="90000"/>
+              </a:lnSpc>
+              <a:spcBef>
+                <a:spcPct val="0"/>
+              </a:spcBef>
+              <a:spcAft>
+                <a:spcPts val="600"/>
+              </a:spcAft>
+              <a:defRPr sz="4400" b="1">
+                <a:solidFill>
+                  <a:srgbClr val="5CB85C"/>
+                </a:solidFill>
+              </a:defRPr>
+            </a:pPr>
+            <a:r>
+              <a:rPr lang="en-US" sz="3700" kern="1200">
+                <a:solidFill>
+                  <a:schemeClr val="tx1"/>
+                </a:solidFill>
+                <a:latin typeface="+mj-lt"/>
+                <a:ea typeface="+mj-ea"/>
+                <a:cs typeface="+mj-cs"/>
+              </a:rPr>
+              <a:t>Demo </a:t>
+            </a:r>
+          </a:p>
+          <a:p>
+            <a:pPr defTabSz="914400">
+              <a:lnSpc>
+                <a:spcPct val="90000"/>
+              </a:lnSpc>
+              <a:spcBef>
+                <a:spcPct val="0"/>
+              </a:spcBef>
+              <a:spcAft>
+                <a:spcPts val="600"/>
+              </a:spcAft>
+              <a:defRPr sz="4400" b="1">
+                <a:solidFill>
+                  <a:srgbClr val="5CB85C"/>
+                </a:solidFill>
+              </a:defRPr>
+            </a:pPr>
+            <a:r>
+              <a:rPr lang="en-US" sz="3700" kern="1200">
+                <a:solidFill>
+                  <a:schemeClr val="tx1"/>
+                </a:solidFill>
+                <a:latin typeface="+mj-lt"/>
+                <a:ea typeface="+mj-ea"/>
+                <a:cs typeface="+mj-cs"/>
+              </a:rPr>
+              <a:t>I/O</a:t>
+            </a:r>
+          </a:p>
+        </p:txBody>
+      </p:sp>
+      <p:sp>
+        <p:nvSpPr>
+          <p:cNvPr id="35" name="Rectangle 34">
+            <a:extLst>
+              <a:ext uri="{FF2B5EF4-FFF2-40B4-BE49-F238E27FC236}">
+                <a16:creationId xmlns:a16="http://schemas.microsoft.com/office/drawing/2014/main" id="{D8815016-C52E-FCB5-980B-9CED4459E1F5}"/>
+              </a:ext>
+              <a:ext uri="{C183D7F6-B498-43B3-948B-1728B52AA6E4}">
+                <adec:decorative xmlns:adec="http://schemas.microsoft.com/office/drawing/2017/decorative" val="1"/>
+              </a:ext>
+            </a:extLst>
+          </p:cNvPr>
+          <p:cNvSpPr>
+            <a:spLocks noGrp="1" noRot="1" noChangeAspect="1" noMove="1" noResize="1" noEditPoints="1" noAdjustHandles="1" noChangeArrowheads="1" noChangeShapeType="1" noTextEdit="1"/>
+          </p:cNvSpPr>
+          <p:nvPr>
+            <p:extLst>
+              <p:ext uri="{386F3935-93C4-4BCD-93E2-E3B085C9AB24}">
+                <p16:designElem xmlns:p16="http://schemas.microsoft.com/office/powerpoint/2015/main" val="1"/>
+              </p:ext>
+            </p:extLst>
+          </p:nvPr>
+        </p:nvSpPr>
+        <p:spPr>
+          <a:xfrm rot="16200000">
+            <a:off x="3433973" y="-827233"/>
+            <a:ext cx="1715478" cy="8583421"/>
+          </a:xfrm>
+          <a:prstGeom prst="rect">
+            <a:avLst/>
+          </a:prstGeom>
+          <a:solidFill>
+            <a:schemeClr val="accent4"/>
+          </a:solidFill>
+          <a:ln>
+            <a:noFill/>
+          </a:ln>
+        </p:spPr>
+        <p:style>
+          <a:lnRef idx="2">
+            <a:schemeClr val="accent1">
+              <a:shade val="50000"/>
+            </a:schemeClr>
+          </a:lnRef>
+          <a:fillRef idx="1">
+            <a:schemeClr val="accent1"/>
+          </a:fillRef>
+          <a:effectRef idx="0">
+            <a:schemeClr val="accent1"/>
+          </a:effectRef>
+          <a:fontRef idx="minor">
+            <a:schemeClr val="lt1"/>
+          </a:fontRef>
+        </p:style>
+        <p:txBody>
+          <a:bodyPr rtlCol="0" anchor="ctr"/>
+          <a:lstStyle/>
+          <a:p>
+            <a:pPr algn="ctr"/>
+            <a:endParaRPr lang="en-US" dirty="0"/>
+          </a:p>
+        </p:txBody>
+      </p:sp>
+      <p:sp>
+        <p:nvSpPr>
+          <p:cNvPr id="36" name="Rectangle 35">
+            <a:extLst>
+              <a:ext uri="{FF2B5EF4-FFF2-40B4-BE49-F238E27FC236}">
+                <a16:creationId xmlns:a16="http://schemas.microsoft.com/office/drawing/2014/main" id="{499A1ACD-D930-0E8A-EE82-4E2BCC0D54B0}"/>
+              </a:ext>
+              <a:ext uri="{C183D7F6-B498-43B3-948B-1728B52AA6E4}">
+                <adec:decorative xmlns:adec="http://schemas.microsoft.com/office/drawing/2017/decorative" val="1"/>
+              </a:ext>
+            </a:extLst>
+          </p:cNvPr>
+          <p:cNvSpPr>
+            <a:spLocks noGrp="1" noRot="1" noChangeAspect="1" noMove="1" noResize="1" noEditPoints="1" noAdjustHandles="1" noChangeArrowheads="1" noChangeShapeType="1" noTextEdit="1"/>
+          </p:cNvSpPr>
+          <p:nvPr>
+            <p:extLst>
+              <p:ext uri="{386F3935-93C4-4BCD-93E2-E3B085C9AB24}">
+                <p16:designElem xmlns:p16="http://schemas.microsoft.com/office/powerpoint/2015/main" val="1"/>
+              </p:ext>
+            </p:extLst>
+          </p:nvPr>
+        </p:nvSpPr>
+        <p:spPr>
+          <a:xfrm>
+            <a:off x="302085" y="664308"/>
+            <a:ext cx="8082632" cy="5600340"/>
+          </a:xfrm>
+          <a:prstGeom prst="rect">
+            <a:avLst/>
+          </a:prstGeom>
+          <a:solidFill>
+            <a:schemeClr val="bg1"/>
+          </a:solidFill>
+          <a:ln>
+            <a:noFill/>
+          </a:ln>
+          <a:effectLst>
+            <a:outerShdw blurRad="139700" dist="127000" dir="5400000" algn="t" rotWithShape="0">
+              <a:prstClr val="black">
+                <a:alpha val="15000"/>
+              </a:prstClr>
+            </a:outerShdw>
+          </a:effectLst>
+        </p:spPr>
+        <p:style>
+          <a:lnRef idx="2">
+            <a:schemeClr val="accent1">
+              <a:shade val="50000"/>
+            </a:schemeClr>
+          </a:lnRef>
+          <a:fillRef idx="1">
+            <a:schemeClr val="accent1"/>
+          </a:fillRef>
+          <a:effectRef idx="0">
+            <a:schemeClr val="accent1"/>
+          </a:effectRef>
+          <a:fontRef idx="minor">
+            <a:schemeClr val="lt1"/>
+          </a:fontRef>
+        </p:style>
+        <p:txBody>
+          <a:bodyPr rtlCol="0" anchor="ctr"/>
+          <a:lstStyle/>
+          <a:p>
+            <a:pPr algn="ctr"/>
+            <a:endParaRPr lang="en-US"/>
+          </a:p>
+        </p:txBody>
+      </p:sp>
+      <p:pic>
+        <p:nvPicPr>
+          <p:cNvPr id="7" name="Picture 6">
+            <a:extLst>
+              <a:ext uri="{FF2B5EF4-FFF2-40B4-BE49-F238E27FC236}">
+                <a16:creationId xmlns:a16="http://schemas.microsoft.com/office/drawing/2014/main" id="{9026E023-E95C-B077-451D-627FF9856577}"/>
+              </a:ext>
+            </a:extLst>
+          </p:cNvPr>
+          <p:cNvPicPr>
+            <a:picLocks noChangeAspect="1"/>
+          </p:cNvPicPr>
+          <p:nvPr/>
+        </p:nvPicPr>
+        <p:blipFill>
+          <a:blip r:embed="rId2"/>
+          <a:srcRect r="11572"/>
+          <a:stretch>
+            <a:fillRect/>
+          </a:stretch>
+        </p:blipFill>
+        <p:spPr>
+          <a:xfrm>
+            <a:off x="302084" y="817017"/>
+            <a:ext cx="7960022" cy="5412027"/>
+          </a:xfrm>
+          <a:prstGeom prst="rect">
+            <a:avLst/>
+          </a:prstGeom>
+        </p:spPr>
+      </p:pic>
+      <p:sp>
+        <p:nvSpPr>
+          <p:cNvPr id="34" name="Rectangle 33">
+            <a:extLst>
+              <a:ext uri="{FF2B5EF4-FFF2-40B4-BE49-F238E27FC236}">
+                <a16:creationId xmlns:a16="http://schemas.microsoft.com/office/drawing/2014/main" id="{6131577C-FB6F-E2C6-67B2-E3843029A8BD}"/>
+              </a:ext>
+              <a:ext uri="{C183D7F6-B498-43B3-948B-1728B52AA6E4}">
+                <adec:decorative xmlns:adec="http://schemas.microsoft.com/office/drawing/2017/decorative" val="1"/>
+              </a:ext>
+            </a:extLst>
+          </p:cNvPr>
+          <p:cNvSpPr>
+            <a:spLocks noGrp="1" noRot="1" noChangeAspect="1" noMove="1" noResize="1" noEditPoints="1" noAdjustHandles="1" noChangeArrowheads="1" noChangeShapeType="1" noTextEdit="1"/>
+          </p:cNvSpPr>
+          <p:nvPr>
+            <p:extLst>
+              <p:ext uri="{386F3935-93C4-4BCD-93E2-E3B085C9AB24}">
+                <p16:designElem xmlns:p16="http://schemas.microsoft.com/office/powerpoint/2015/main" val="1"/>
+              </p:ext>
+            </p:extLst>
+          </p:nvPr>
+        </p:nvSpPr>
+        <p:spPr>
+          <a:xfrm rot="5400000">
+            <a:off x="7950447" y="3392097"/>
+            <a:ext cx="1719072" cy="152382"/>
+          </a:xfrm>
+          <a:prstGeom prst="rect">
+            <a:avLst/>
+          </a:prstGeom>
+          <a:solidFill>
+            <a:schemeClr val="accent4"/>
+          </a:solidFill>
+          <a:ln>
+            <a:noFill/>
+          </a:ln>
+        </p:spPr>
+        <p:style>
+          <a:lnRef idx="2">
+            <a:schemeClr val="accent1">
+              <a:shade val="50000"/>
+            </a:schemeClr>
+          </a:lnRef>
+          <a:fillRef idx="1">
+            <a:schemeClr val="accent1"/>
+          </a:fillRef>
+          <a:effectRef idx="0">
+            <a:schemeClr val="accent1"/>
+          </a:effectRef>
+          <a:fontRef idx="minor">
+            <a:schemeClr val="lt1"/>
+          </a:fontRef>
+        </p:style>
+        <p:txBody>
+          <a:bodyPr rtlCol="0" anchor="ctr"/>
+          <a:lstStyle/>
+          <a:p>
+            <a:pPr algn="ctr"/>
+            <a:endParaRPr lang="en-US"/>
+          </a:p>
+        </p:txBody>
+      </p:sp>
+      <p:sp>
+        <p:nvSpPr>
+          <p:cNvPr id="4" name="Slide Number Placeholder 3">
+            <a:extLst>
+              <a:ext uri="{FF2B5EF4-FFF2-40B4-BE49-F238E27FC236}">
+                <a16:creationId xmlns:a16="http://schemas.microsoft.com/office/drawing/2014/main" id="{6E9FA4CF-DD0E-46D9-B4D8-2C3E47978EA2}"/>
+              </a:ext>
+            </a:extLst>
+          </p:cNvPr>
+          <p:cNvSpPr>
+            <a:spLocks noGrp="1"/>
+          </p:cNvSpPr>
+          <p:nvPr>
+            <p:ph type="sldNum" sz="quarter" idx="12"/>
+          </p:nvPr>
+        </p:nvSpPr>
+        <p:spPr>
+          <a:xfrm>
+            <a:off x="8610599" y="6492240"/>
+            <a:ext cx="3126933" cy="365125"/>
+          </a:xfrm>
+        </p:spPr>
+        <p:txBody>
+          <a:bodyPr vert="horz" lIns="91440" tIns="45720" rIns="91440" bIns="45720" rtlCol="0" anchor="ctr">
+            <a:normAutofit/>
+          </a:bodyPr>
+          <a:lstStyle/>
+          <a:p>
+            <a:pPr defTabSz="914400">
+              <a:spcAft>
+                <a:spcPts val="600"/>
+              </a:spcAft>
+            </a:pPr>
+            <a:fld id="{C1FF6DA9-008F-8B48-92A6-B652298478BF}" type="slidenum">
+              <a:rPr lang="en-US" smtClean="0"/>
+              <a:pPr defTabSz="914400">
+                <a:spcAft>
+                  <a:spcPts val="600"/>
+                </a:spcAft>
+              </a:pPr>
+              <a:t>8</a:t>
+            </a:fld>
+            <a:endParaRPr lang="en-US"/>
+          </a:p>
+        </p:txBody>
+      </p:sp>
+    </p:spTree>
+    <p:extLst>
+      <p:ext uri="{BB962C8B-B14F-4D97-AF65-F5344CB8AC3E}">
+        <p14:creationId xmlns:p14="http://schemas.microsoft.com/office/powerpoint/2010/main" val="261783017"/>
+      </p:ext>
+    </p:extLst>
+  </p:cSld>
+  <p:clrMapOvr>
+    <a:masterClrMapping/>
+  </p:clrMapOvr>
+</p:sld>
+</file>
+
+<file path=ppt/slides/slide9.xml><?xml version="1.0" encoding="utf-8"?>
+<p:sld xmlns:a="http://schemas.openxmlformats.org/drawingml/2006/main" xmlns:r="http://schemas.openxmlformats.org/officeDocument/2006/relationships" xmlns:p="http://schemas.openxmlformats.org/presentationml/2006/main">
+  <p:cSld>
+    <p:bg>
+      <p:bgPr>
+        <a:solidFill>
+          <a:schemeClr val="bg1"/>
+        </a:solidFill>
+        <a:effectLst/>
+      </p:bgPr>
+    </p:bg>
+    <p:spTree>
+      <p:nvGrpSpPr>
+        <p:cNvPr id="1" name="">
+          <a:extLst>
+            <a:ext uri="{FF2B5EF4-FFF2-40B4-BE49-F238E27FC236}">
+              <a16:creationId xmlns:a16="http://schemas.microsoft.com/office/drawing/2014/main" id="{1F019658-8049-FC9B-A83D-B94C899F194D}"/>
+            </a:ext>
+          </a:extLst>
+        </p:cNvPr>
+        <p:cNvGrpSpPr/>
+        <p:nvPr/>
+      </p:nvGrpSpPr>
+      <p:grpSpPr>
+        <a:xfrm>
+          <a:off x="0" y="0"/>
+          <a:ext cx="0" cy="0"/>
+          <a:chOff x="0" y="0"/>
+          <a:chExt cx="0" cy="0"/>
+        </a:xfrm>
+      </p:grpSpPr>
+      <p:sp>
+        <p:nvSpPr>
+          <p:cNvPr id="57" name="Down Arrow 7">
             <a:extLst>
               <a:ext uri="{FF2B5EF4-FFF2-40B4-BE49-F238E27FC236}">
                 <a16:creationId xmlns:a16="http://schemas.microsoft.com/office/drawing/2014/main" id="{D4771268-CB57-404A-9271-370EB28F6090}"/>
@@ -5805,13 +7566,19 @@
       </p:sp>
       <p:sp>
         <p:nvSpPr>
-          <p:cNvPr id="2" name="TextBox 1"/>
+          <p:cNvPr id="2" name="TextBox 1">
+            <a:extLst>
+              <a:ext uri="{FF2B5EF4-FFF2-40B4-BE49-F238E27FC236}">
+                <a16:creationId xmlns:a16="http://schemas.microsoft.com/office/drawing/2014/main" id="{B62E6979-FB3C-4CA4-037C-137956381956}"/>
+              </a:ext>
+            </a:extLst>
+          </p:cNvPr>
           <p:cNvSpPr txBox="1"/>
           <p:nvPr/>
         </p:nvSpPr>
         <p:spPr>
           <a:xfrm>
-            <a:off x="940211" y="1967266"/>
+            <a:off x="1028700" y="1967266"/>
             <a:ext cx="2628900" cy="2547257"/>
           </a:xfrm>
           <a:prstGeom prst="rect">
@@ -5842,7 +7609,7 @@
               </a:defRPr>
             </a:pPr>
             <a:r>
-              <a:rPr lang="en-US" sz="3600" kern="1200" dirty="0">
+              <a:rPr lang="en-US" sz="3600" kern="1200">
                 <a:solidFill>
                   <a:srgbClr val="FFFFFF"/>
                 </a:solidFill>
@@ -5852,14 +7619,6 @@
               </a:rPr>
               <a:t>Demo </a:t>
             </a:r>
-            <a:endParaRPr lang="en-US" sz="3600" dirty="0">
-              <a:solidFill>
-                <a:srgbClr val="FFFFFF"/>
-              </a:solidFill>
-              <a:latin typeface="+mj-lt"/>
-              <a:ea typeface="+mj-ea"/>
-              <a:cs typeface="+mj-cs"/>
-            </a:endParaRPr>
           </a:p>
           <a:p>
             <a:pPr algn="ctr" defTabSz="914400">
@@ -5889,81 +7648,15 @@
               </a:rPr>
               <a:t>I/O</a:t>
             </a:r>
-            <a:endParaRPr lang="en-US" sz="3600" kern="1200" dirty="0">
-              <a:solidFill>
-                <a:srgbClr val="FFFFFF"/>
-              </a:solidFill>
-              <a:latin typeface="+mj-lt"/>
-              <a:ea typeface="+mj-ea"/>
-              <a:cs typeface="+mj-cs"/>
-            </a:endParaRPr>
-          </a:p>
-        </p:txBody>
-      </p:sp>
-      <p:sp>
-        <p:nvSpPr>
-          <p:cNvPr id="4" name="Slide Number Placeholder 3">
+          </a:p>
+        </p:txBody>
+      </p:sp>
+      <p:pic>
+        <p:nvPicPr>
+          <p:cNvPr id="3" name="Picture 2">
             <a:extLst>
               <a:ext uri="{FF2B5EF4-FFF2-40B4-BE49-F238E27FC236}">
-                <a16:creationId xmlns:a16="http://schemas.microsoft.com/office/drawing/2014/main" id="{3CB9B738-CE54-DCFC-A1D1-93C1EA03770F}"/>
-              </a:ext>
-            </a:extLst>
-          </p:cNvPr>
-          <p:cNvSpPr>
-            <a:spLocks noGrp="1"/>
-          </p:cNvSpPr>
-          <p:nvPr>
-            <p:ph type="sldNum" sz="quarter" idx="12"/>
-          </p:nvPr>
-        </p:nvSpPr>
-        <p:spPr>
-          <a:xfrm>
-            <a:off x="11034184" y="6356350"/>
-            <a:ext cx="514349" cy="365125"/>
-          </a:xfrm>
-        </p:spPr>
-        <p:txBody>
-          <a:bodyPr vert="horz" lIns="91440" tIns="45720" rIns="91440" bIns="45720" rtlCol="0" anchor="ctr">
-            <a:normAutofit/>
-          </a:bodyPr>
-          <a:lstStyle/>
-          <a:p>
-            <a:pPr defTabSz="914400">
-              <a:spcAft>
-                <a:spcPts val="600"/>
-              </a:spcAft>
-            </a:pPr>
-            <a:fld id="{C1FF6DA9-008F-8B48-92A6-B652298478BF}" type="slidenum">
-              <a:rPr lang="en-US" smtClean="0">
-                <a:solidFill>
-                  <a:schemeClr val="tx1">
-                    <a:alpha val="80000"/>
-                  </a:schemeClr>
-                </a:solidFill>
-              </a:rPr>
-              <a:pPr defTabSz="914400">
-                <a:spcAft>
-                  <a:spcPts val="600"/>
-                </a:spcAft>
-              </a:pPr>
-              <a:t>7</a:t>
-            </a:fld>
-            <a:endParaRPr lang="en-US">
-              <a:solidFill>
-                <a:schemeClr val="tx1">
-                  <a:alpha val="80000"/>
-                </a:schemeClr>
-              </a:solidFill>
-            </a:endParaRPr>
-          </a:p>
-        </p:txBody>
-      </p:sp>
-      <p:pic>
-        <p:nvPicPr>
-          <p:cNvPr id="10" name="Picture 9">
-            <a:extLst>
-              <a:ext uri="{FF2B5EF4-FFF2-40B4-BE49-F238E27FC236}">
-                <a16:creationId xmlns:a16="http://schemas.microsoft.com/office/drawing/2014/main" id="{9FF9AD06-4B24-5FAB-A007-805764D15FEA}"/>
+                <a16:creationId xmlns:a16="http://schemas.microsoft.com/office/drawing/2014/main" id="{F4015260-5A05-2A5F-AB5E-4F3D3AA4D6F3}"/>
               </a:ext>
             </a:extLst>
           </p:cNvPr>
@@ -5974,502 +7667,27 @@
         </p:nvPicPr>
         <p:blipFill>
           <a:blip r:embed="rId2"/>
+          <a:srcRect r="24053" b="-1"/>
           <a:stretch>
             <a:fillRect/>
           </a:stretch>
         </p:blipFill>
         <p:spPr>
           <a:xfrm>
-            <a:off x="7543028" y="0"/>
-            <a:ext cx="4677882" cy="6858000"/>
+            <a:off x="5257186" y="38916"/>
+            <a:ext cx="5776998" cy="6682559"/>
           </a:xfrm>
           <a:prstGeom prst="rect">
             <a:avLst/>
           </a:prstGeom>
         </p:spPr>
       </p:pic>
-    </p:spTree>
-  </p:cSld>
-  <p:clrMapOvr>
-    <a:masterClrMapping/>
-  </p:clrMapOvr>
-</p:sld>
-</file>
-
-<file path=ppt/slides/slide8.xml><?xml version="1.0" encoding="utf-8"?>
-<p:sld xmlns:a="http://schemas.openxmlformats.org/drawingml/2006/main" xmlns:r="http://schemas.openxmlformats.org/officeDocument/2006/relationships" xmlns:p="http://schemas.openxmlformats.org/presentationml/2006/main">
-  <p:cSld>
-    <p:spTree>
-      <p:nvGrpSpPr>
-        <p:cNvPr id="1" name=""/>
-        <p:cNvGrpSpPr/>
-        <p:nvPr/>
-      </p:nvGrpSpPr>
-      <p:grpSpPr>
-        <a:xfrm>
-          <a:off x="0" y="0"/>
-          <a:ext cx="0" cy="0"/>
-          <a:chOff x="0" y="0"/>
-          <a:chExt cx="0" cy="0"/>
-        </a:xfrm>
-      </p:grpSpPr>
-      <p:sp>
-        <p:nvSpPr>
-          <p:cNvPr id="2" name="TextBox 1"/>
-          <p:cNvSpPr txBox="1"/>
-          <p:nvPr/>
-        </p:nvSpPr>
-        <p:spPr>
-          <a:xfrm>
-            <a:off x="2953475" y="274321"/>
-            <a:ext cx="6285054" cy="769441"/>
-          </a:xfrm>
-          <a:prstGeom prst="rect">
-            <a:avLst/>
-          </a:prstGeom>
-          <a:noFill/>
-        </p:spPr>
-        <p:txBody>
-          <a:bodyPr wrap="none">
-            <a:spAutoFit/>
-          </a:bodyPr>
-          <a:lstStyle/>
-          <a:p>
-            <a:pPr algn="ctr">
-              <a:defRPr sz="4400" b="1">
-                <a:solidFill>
-                  <a:srgbClr val="1F4E79"/>
-                </a:solidFill>
-              </a:defRPr>
-            </a:pPr>
-            <a:r>
-              <a:rPr sz="4400" dirty="0"/>
-              <a:t>What </a:t>
-            </a:r>
-            <a:r>
-              <a:rPr lang="en-US" sz="4400" dirty="0"/>
-              <a:t>The</a:t>
-            </a:r>
-            <a:r>
-              <a:rPr sz="4400" dirty="0"/>
-              <a:t> Tool </a:t>
-            </a:r>
-            <a:r>
-              <a:rPr lang="en-US" sz="4400" dirty="0"/>
-              <a:t>Will Detect</a:t>
-            </a:r>
-            <a:endParaRPr sz="4400" dirty="0"/>
-          </a:p>
-        </p:txBody>
-      </p:sp>
-      <p:sp>
-        <p:nvSpPr>
-          <p:cNvPr id="3" name="Rounded Rectangle 2"/>
-          <p:cNvSpPr/>
-          <p:nvPr/>
-        </p:nvSpPr>
-        <p:spPr>
-          <a:xfrm>
-            <a:off x="1539050" y="1645920"/>
-            <a:ext cx="3657600" cy="4389120"/>
-          </a:xfrm>
-          <a:prstGeom prst="roundRect">
-            <a:avLst/>
-          </a:prstGeom>
-          <a:solidFill>
-            <a:srgbClr val="F2F2F2"/>
-          </a:solidFill>
-          <a:ln w="38100">
-            <a:solidFill>
-              <a:srgbClr val="ED7D31"/>
-            </a:solidFill>
-          </a:ln>
-        </p:spPr>
-        <p:style>
-          <a:lnRef idx="1">
-            <a:schemeClr val="accent1"/>
-          </a:lnRef>
-          <a:fillRef idx="3">
-            <a:schemeClr val="accent1"/>
-          </a:fillRef>
-          <a:effectRef idx="2">
-            <a:schemeClr val="accent1"/>
-          </a:effectRef>
-          <a:fontRef idx="minor">
-            <a:schemeClr val="lt1"/>
-          </a:fontRef>
-        </p:style>
-        <p:txBody>
-          <a:bodyPr rtlCol="0" anchor="ctr"/>
-          <a:lstStyle/>
-          <a:p>
-            <a:pPr algn="ctr"/>
-            <a:endParaRPr/>
-          </a:p>
-        </p:txBody>
-      </p:sp>
-      <p:sp>
-        <p:nvSpPr>
-          <p:cNvPr id="4" name="TextBox 3"/>
-          <p:cNvSpPr txBox="1"/>
-          <p:nvPr/>
-        </p:nvSpPr>
-        <p:spPr>
-          <a:xfrm>
-            <a:off x="1876779" y="1818968"/>
-            <a:ext cx="2645275" cy="523220"/>
-          </a:xfrm>
-          <a:prstGeom prst="rect">
-            <a:avLst/>
-          </a:prstGeom>
-          <a:noFill/>
-        </p:spPr>
-        <p:txBody>
-          <a:bodyPr wrap="none">
-            <a:spAutoFit/>
-          </a:bodyPr>
-          <a:lstStyle/>
-          <a:p>
-            <a:pPr algn="ctr">
-              <a:defRPr sz="2800" b="1">
-                <a:solidFill>
-                  <a:srgbClr val="ED7D31"/>
-                </a:solidFill>
-              </a:defRPr>
-            </a:pPr>
-            <a:r>
-              <a:rPr sz="2800" dirty="0"/>
-              <a:t>Flakiness Causes</a:t>
-            </a:r>
-          </a:p>
-        </p:txBody>
-      </p:sp>
-      <p:sp>
-        <p:nvSpPr>
-          <p:cNvPr id="5" name="TextBox 4"/>
-          <p:cNvSpPr txBox="1"/>
-          <p:nvPr/>
-        </p:nvSpPr>
-        <p:spPr>
-          <a:xfrm>
-            <a:off x="1644936" y="2459048"/>
-            <a:ext cx="3108960" cy="3313728"/>
-          </a:xfrm>
-          <a:prstGeom prst="rect">
-            <a:avLst/>
-          </a:prstGeom>
-          <a:noFill/>
-        </p:spPr>
-        <p:txBody>
-          <a:bodyPr wrap="square">
-            <a:spAutoFit/>
-          </a:bodyPr>
-          <a:lstStyle/>
-          <a:p>
-            <a:pPr>
-              <a:spcBef>
-                <a:spcPts val="800"/>
-              </a:spcBef>
-              <a:defRPr sz="2200">
-                <a:solidFill>
-                  <a:srgbClr val="444444"/>
-                </a:solidFill>
-              </a:defRPr>
-            </a:pPr>
-            <a:r>
-              <a:rPr sz="2200" dirty="0"/>
-              <a:t>• Random numbers (no seed)</a:t>
-            </a:r>
-          </a:p>
-          <a:p>
-            <a:pPr>
-              <a:spcBef>
-                <a:spcPts val="800"/>
-              </a:spcBef>
-              <a:defRPr sz="2200">
-                <a:solidFill>
-                  <a:srgbClr val="444444"/>
-                </a:solidFill>
-              </a:defRPr>
-            </a:pPr>
-            <a:r>
-              <a:rPr sz="2200" dirty="0"/>
-              <a:t>• Sleep or wait calls</a:t>
-            </a:r>
-          </a:p>
-          <a:p>
-            <a:pPr>
-              <a:spcBef>
-                <a:spcPts val="800"/>
-              </a:spcBef>
-              <a:defRPr sz="2200">
-                <a:solidFill>
-                  <a:srgbClr val="444444"/>
-                </a:solidFill>
-              </a:defRPr>
-            </a:pPr>
-            <a:r>
-              <a:rPr sz="2200" dirty="0"/>
-              <a:t>• Environment variables</a:t>
-            </a:r>
-          </a:p>
-          <a:p>
-            <a:pPr>
-              <a:spcBef>
-                <a:spcPts val="800"/>
-              </a:spcBef>
-              <a:defRPr sz="2200">
-                <a:solidFill>
-                  <a:srgbClr val="444444"/>
-                </a:solidFill>
-              </a:defRPr>
-            </a:pPr>
-            <a:r>
-              <a:rPr sz="2200" dirty="0"/>
-              <a:t>• Time-based code</a:t>
-            </a:r>
-          </a:p>
-          <a:p>
-            <a:pPr>
-              <a:spcBef>
-                <a:spcPts val="800"/>
-              </a:spcBef>
-              <a:defRPr sz="2200">
-                <a:solidFill>
-                  <a:srgbClr val="444444"/>
-                </a:solidFill>
-              </a:defRPr>
-            </a:pPr>
-            <a:r>
-              <a:rPr sz="2200" dirty="0"/>
-              <a:t>• Shared global variables</a:t>
-            </a:r>
-          </a:p>
-          <a:p>
-            <a:pPr>
-              <a:spcBef>
-                <a:spcPts val="800"/>
-              </a:spcBef>
-              <a:defRPr sz="2200">
-                <a:solidFill>
-                  <a:srgbClr val="444444"/>
-                </a:solidFill>
-              </a:defRPr>
-            </a:pPr>
-            <a:r>
-              <a:rPr sz="2200" dirty="0"/>
-              <a:t>• Thread/concurrency issues</a:t>
-            </a:r>
-          </a:p>
-        </p:txBody>
-      </p:sp>
-      <p:sp>
-        <p:nvSpPr>
-          <p:cNvPr id="6" name="Rounded Rectangle 5"/>
-          <p:cNvSpPr/>
-          <p:nvPr/>
-        </p:nvSpPr>
-        <p:spPr>
-          <a:xfrm>
-            <a:off x="6632839" y="1616424"/>
-            <a:ext cx="3657600" cy="4389120"/>
-          </a:xfrm>
-          <a:prstGeom prst="roundRect">
-            <a:avLst/>
-          </a:prstGeom>
-          <a:solidFill>
-            <a:srgbClr val="F2F2F2"/>
-          </a:solidFill>
-          <a:ln w="38100">
-            <a:solidFill>
-              <a:srgbClr val="4472C4"/>
-            </a:solidFill>
-          </a:ln>
-        </p:spPr>
-        <p:style>
-          <a:lnRef idx="1">
-            <a:schemeClr val="accent1"/>
-          </a:lnRef>
-          <a:fillRef idx="3">
-            <a:schemeClr val="accent1"/>
-          </a:fillRef>
-          <a:effectRef idx="2">
-            <a:schemeClr val="accent1"/>
-          </a:effectRef>
-          <a:fontRef idx="minor">
-            <a:schemeClr val="lt1"/>
-          </a:fontRef>
-        </p:style>
-        <p:txBody>
-          <a:bodyPr rtlCol="0" anchor="ctr"/>
-          <a:lstStyle/>
-          <a:p>
-            <a:pPr algn="ctr"/>
-            <a:endParaRPr/>
-          </a:p>
-        </p:txBody>
-      </p:sp>
-      <p:sp>
-        <p:nvSpPr>
-          <p:cNvPr id="7" name="TextBox 6"/>
-          <p:cNvSpPr txBox="1"/>
-          <p:nvPr/>
-        </p:nvSpPr>
-        <p:spPr>
-          <a:xfrm>
-            <a:off x="7248583" y="1799304"/>
-            <a:ext cx="2426113" cy="523220"/>
-          </a:xfrm>
-          <a:prstGeom prst="rect">
-            <a:avLst/>
-          </a:prstGeom>
-          <a:noFill/>
-        </p:spPr>
-        <p:txBody>
-          <a:bodyPr wrap="none">
-            <a:spAutoFit/>
-          </a:bodyPr>
-          <a:lstStyle/>
-          <a:p>
-            <a:pPr algn="ctr">
-              <a:defRPr sz="2800" b="1">
-                <a:solidFill>
-                  <a:srgbClr val="4472C4"/>
-                </a:solidFill>
-              </a:defRPr>
-            </a:pPr>
-            <a:r>
-              <a:rPr sz="2800"/>
-              <a:t>Code Problems</a:t>
-            </a:r>
-          </a:p>
-        </p:txBody>
-      </p:sp>
-      <p:sp>
-        <p:nvSpPr>
-          <p:cNvPr id="8" name="TextBox 7"/>
-          <p:cNvSpPr txBox="1"/>
-          <p:nvPr/>
-        </p:nvSpPr>
-        <p:spPr>
-          <a:xfrm>
-            <a:off x="6907159" y="2439385"/>
-            <a:ext cx="3108960" cy="2975173"/>
-          </a:xfrm>
-          <a:prstGeom prst="rect">
-            <a:avLst/>
-          </a:prstGeom>
-          <a:noFill/>
-        </p:spPr>
-        <p:txBody>
-          <a:bodyPr wrap="square">
-            <a:spAutoFit/>
-          </a:bodyPr>
-          <a:lstStyle/>
-          <a:p>
-            <a:pPr>
-              <a:spcBef>
-                <a:spcPts val="800"/>
-              </a:spcBef>
-              <a:defRPr sz="2200">
-                <a:solidFill>
-                  <a:srgbClr val="444444"/>
-                </a:solidFill>
-              </a:defRPr>
-            </a:pPr>
-            <a:r>
-              <a:rPr sz="2200" dirty="0"/>
-              <a:t>• Array out of bounds</a:t>
-            </a:r>
-          </a:p>
-          <a:p>
-            <a:pPr>
-              <a:spcBef>
-                <a:spcPts val="800"/>
-              </a:spcBef>
-              <a:defRPr sz="2200">
-                <a:solidFill>
-                  <a:srgbClr val="444444"/>
-                </a:solidFill>
-              </a:defRPr>
-            </a:pPr>
-            <a:r>
-              <a:rPr sz="2200" dirty="0"/>
-              <a:t>• Null pointer use</a:t>
-            </a:r>
-          </a:p>
-          <a:p>
-            <a:pPr>
-              <a:spcBef>
-                <a:spcPts val="800"/>
-              </a:spcBef>
-              <a:defRPr sz="2200">
-                <a:solidFill>
-                  <a:srgbClr val="444444"/>
-                </a:solidFill>
-              </a:defRPr>
-            </a:pPr>
-            <a:r>
-              <a:rPr sz="2200" dirty="0"/>
-              <a:t>• Memory leaks</a:t>
-            </a:r>
-          </a:p>
-          <a:p>
-            <a:pPr>
-              <a:spcBef>
-                <a:spcPts val="800"/>
-              </a:spcBef>
-              <a:defRPr sz="2200">
-                <a:solidFill>
-                  <a:srgbClr val="444444"/>
-                </a:solidFill>
-              </a:defRPr>
-            </a:pPr>
-            <a:r>
-              <a:rPr sz="2200" dirty="0"/>
-              <a:t>• Division by zero</a:t>
-            </a:r>
-          </a:p>
-          <a:p>
-            <a:pPr>
-              <a:spcBef>
-                <a:spcPts val="800"/>
-              </a:spcBef>
-              <a:defRPr sz="2200">
-                <a:solidFill>
-                  <a:srgbClr val="444444"/>
-                </a:solidFill>
-              </a:defRPr>
-            </a:pPr>
-            <a:r>
-              <a:rPr sz="2200" dirty="0"/>
-              <a:t>• Uninitialized variables</a:t>
-            </a:r>
-          </a:p>
-          <a:p>
-            <a:pPr>
-              <a:spcBef>
-                <a:spcPts val="800"/>
-              </a:spcBef>
-              <a:defRPr sz="2200">
-                <a:solidFill>
-                  <a:srgbClr val="444444"/>
-                </a:solidFill>
-              </a:defRPr>
-            </a:pPr>
-            <a:r>
-              <a:rPr sz="2200" dirty="0"/>
-              <a:t>• Missing return statements</a:t>
-            </a:r>
-          </a:p>
-        </p:txBody>
-      </p:sp>
-      <p:sp>
-        <p:nvSpPr>
-          <p:cNvPr id="9" name="Slide Number Placeholder 8">
+      <p:sp>
+        <p:nvSpPr>
+          <p:cNvPr id="4" name="Slide Number Placeholder 3">
             <a:extLst>
               <a:ext uri="{FF2B5EF4-FFF2-40B4-BE49-F238E27FC236}">
-                <a16:creationId xmlns:a16="http://schemas.microsoft.com/office/drawing/2014/main" id="{90F6EF5D-D2A8-35D8-C8FB-B180A01CEADC}"/>
+                <a16:creationId xmlns:a16="http://schemas.microsoft.com/office/drawing/2014/main" id="{A728EF9C-ED45-EC1F-AFBC-D879A812B492}"/>
               </a:ext>
             </a:extLst>
           </p:cNvPr>
@@ -6480,347 +7698,54 @@
             <p:ph type="sldNum" sz="quarter" idx="12"/>
           </p:nvPr>
         </p:nvSpPr>
-        <p:spPr/>
-        <p:txBody>
-          <a:bodyPr/>
-          <a:lstStyle/>
-          <a:p>
-            <a:fld id="{C1FF6DA9-008F-8B48-92A6-B652298478BF}" type="slidenum">
-              <a:rPr lang="en-US" smtClean="0"/>
-              <a:t>8</a:t>
-            </a:fld>
-            <a:endParaRPr lang="en-US"/>
-          </a:p>
-        </p:txBody>
-      </p:sp>
-    </p:spTree>
-  </p:cSld>
-  <p:clrMapOvr>
-    <a:masterClrMapping/>
-  </p:clrMapOvr>
-</p:sld>
-</file>
-
-<file path=ppt/slides/slide9.xml><?xml version="1.0" encoding="utf-8"?>
-<p:sld xmlns:a="http://schemas.openxmlformats.org/drawingml/2006/main" xmlns:r="http://schemas.openxmlformats.org/officeDocument/2006/relationships" xmlns:p="http://schemas.openxmlformats.org/presentationml/2006/main">
-  <p:cSld>
-    <p:spTree>
-      <p:nvGrpSpPr>
-        <p:cNvPr id="1" name=""/>
-        <p:cNvGrpSpPr/>
-        <p:nvPr/>
-      </p:nvGrpSpPr>
-      <p:grpSpPr>
-        <a:xfrm>
-          <a:off x="0" y="0"/>
-          <a:ext cx="0" cy="0"/>
-          <a:chOff x="0" y="0"/>
-          <a:chExt cx="0" cy="0"/>
-        </a:xfrm>
-      </p:grpSpPr>
-      <p:sp>
-        <p:nvSpPr>
-          <p:cNvPr id="2" name="TextBox 1"/>
-          <p:cNvSpPr txBox="1"/>
-          <p:nvPr/>
-        </p:nvSpPr>
         <p:spPr>
           <a:xfrm>
-            <a:off x="4417496" y="274321"/>
-            <a:ext cx="3357009" cy="769441"/>
+            <a:off x="11034184" y="6356350"/>
+            <a:ext cx="514349" cy="365125"/>
           </a:xfrm>
-          <a:prstGeom prst="rect">
-            <a:avLst/>
-          </a:prstGeom>
-          <a:noFill/>
         </p:spPr>
         <p:txBody>
-          <a:bodyPr wrap="none">
-            <a:spAutoFit/>
+          <a:bodyPr vert="horz" lIns="91440" tIns="45720" rIns="91440" bIns="45720" rtlCol="0" anchor="ctr">
+            <a:normAutofit/>
           </a:bodyPr>
           <a:lstStyle/>
           <a:p>
-            <a:pPr algn="ctr">
-              <a:defRPr sz="4400" b="1">
-                <a:solidFill>
-                  <a:srgbClr val="1F4E79"/>
-                </a:solidFill>
-              </a:defRPr>
-            </a:pPr>
-            <a:r>
-              <a:rPr sz="4400"/>
-              <a:t>Project Scope</a:t>
-            </a:r>
-          </a:p>
-        </p:txBody>
-      </p:sp>
-      <p:sp>
-        <p:nvSpPr>
-          <p:cNvPr id="3" name="TextBox 2"/>
-          <p:cNvSpPr txBox="1"/>
-          <p:nvPr/>
-        </p:nvSpPr>
-        <p:spPr>
-          <a:xfrm>
-            <a:off x="2144421" y="2158176"/>
-            <a:ext cx="2850364" cy="3016210"/>
-          </a:xfrm>
-          <a:prstGeom prst="rect">
-            <a:avLst/>
-          </a:prstGeom>
-          <a:noFill/>
-        </p:spPr>
-        <p:txBody>
-          <a:bodyPr wrap="square">
-            <a:spAutoFit/>
-          </a:bodyPr>
-          <a:lstStyle/>
-          <a:p>
-            <a:pPr algn="ctr">
-              <a:defRPr sz="3000" b="1">
-                <a:solidFill>
-                  <a:srgbClr val="5CB85C"/>
-                </a:solidFill>
-              </a:defRPr>
-            </a:pPr>
-            <a:r>
-              <a:rPr sz="3000" dirty="0"/>
-              <a:t>What's Included</a:t>
-            </a:r>
-          </a:p>
-          <a:p>
-            <a:pPr>
-              <a:spcBef>
-                <a:spcPts val="1200"/>
-              </a:spcBef>
-              <a:defRPr sz="2200">
-                <a:solidFill>
-                  <a:srgbClr val="444444"/>
-                </a:solidFill>
-              </a:defRPr>
-            </a:pPr>
-            <a:r>
-              <a:rPr sz="2200" dirty="0"/>
-              <a:t>• C++ and </a:t>
-            </a:r>
-            <a:r>
-              <a:rPr sz="2200" dirty="0" err="1"/>
-              <a:t>GoogleTest</a:t>
-            </a:r>
-            <a:endParaRPr sz="2200" dirty="0"/>
-          </a:p>
-          <a:p>
-            <a:pPr>
-              <a:spcBef>
-                <a:spcPts val="1200"/>
-              </a:spcBef>
-              <a:defRPr sz="2200">
-                <a:solidFill>
-                  <a:srgbClr val="444444"/>
-                </a:solidFill>
-              </a:defRPr>
-            </a:pPr>
-            <a:r>
-              <a:rPr sz="2200" dirty="0"/>
-              <a:t>• Simple and fast</a:t>
-            </a:r>
-          </a:p>
-          <a:p>
-            <a:pPr>
-              <a:spcBef>
-                <a:spcPts val="1200"/>
-              </a:spcBef>
-              <a:defRPr sz="2200">
-                <a:solidFill>
-                  <a:srgbClr val="444444"/>
-                </a:solidFill>
-              </a:defRPr>
-            </a:pPr>
-            <a:r>
-              <a:rPr sz="2200" dirty="0"/>
-              <a:t>• Find flaky tests</a:t>
-            </a:r>
-          </a:p>
-          <a:p>
-            <a:pPr>
-              <a:spcBef>
-                <a:spcPts val="1200"/>
-              </a:spcBef>
-              <a:defRPr sz="2200">
-                <a:solidFill>
-                  <a:srgbClr val="444444"/>
-                </a:solidFill>
-              </a:defRPr>
-            </a:pPr>
-            <a:r>
-              <a:rPr sz="2200" dirty="0"/>
-              <a:t>• Explain why they fail</a:t>
-            </a:r>
-          </a:p>
-          <a:p>
-            <a:pPr>
-              <a:spcBef>
-                <a:spcPts val="1200"/>
-              </a:spcBef>
-              <a:defRPr sz="2200">
-                <a:solidFill>
-                  <a:srgbClr val="444444"/>
-                </a:solidFill>
-              </a:defRPr>
-            </a:pPr>
-            <a:r>
-              <a:rPr sz="2200" dirty="0"/>
-              <a:t>• Easy to use</a:t>
-            </a:r>
-          </a:p>
-        </p:txBody>
-      </p:sp>
-      <p:sp>
-        <p:nvSpPr>
-          <p:cNvPr id="4" name="TextBox 3"/>
-          <p:cNvSpPr txBox="1"/>
-          <p:nvPr/>
-        </p:nvSpPr>
-        <p:spPr>
-          <a:xfrm>
-            <a:off x="7416469" y="2158176"/>
-            <a:ext cx="2850363" cy="3016210"/>
-          </a:xfrm>
-          <a:prstGeom prst="rect">
-            <a:avLst/>
-          </a:prstGeom>
-          <a:noFill/>
-        </p:spPr>
-        <p:txBody>
-          <a:bodyPr wrap="square">
-            <a:spAutoFit/>
-          </a:bodyPr>
-          <a:lstStyle/>
-          <a:p>
-            <a:pPr algn="ctr">
-              <a:defRPr sz="3000" b="1">
-                <a:solidFill>
-                  <a:srgbClr val="D9534F"/>
-                </a:solidFill>
-              </a:defRPr>
-            </a:pPr>
-            <a:r>
-              <a:rPr sz="3000" dirty="0"/>
-              <a:t>Not Included</a:t>
-            </a:r>
-          </a:p>
-          <a:p>
-            <a:pPr>
-              <a:spcBef>
-                <a:spcPts val="1200"/>
-              </a:spcBef>
-              <a:defRPr sz="2200">
-                <a:solidFill>
-                  <a:srgbClr val="444444"/>
-                </a:solidFill>
-              </a:defRPr>
-            </a:pPr>
-            <a:r>
-              <a:rPr sz="2200" dirty="0"/>
-              <a:t>• Big complex libraries</a:t>
-            </a:r>
-          </a:p>
-          <a:p>
-            <a:pPr>
-              <a:spcBef>
-                <a:spcPts val="1200"/>
-              </a:spcBef>
-              <a:defRPr sz="2200">
-                <a:solidFill>
-                  <a:srgbClr val="444444"/>
-                </a:solidFill>
-              </a:defRPr>
-            </a:pPr>
-            <a:r>
-              <a:rPr sz="2200" dirty="0"/>
-              <a:t>• Full compiler</a:t>
-            </a:r>
-          </a:p>
-          <a:p>
-            <a:pPr>
-              <a:spcBef>
-                <a:spcPts val="1200"/>
-              </a:spcBef>
-              <a:defRPr sz="2200">
-                <a:solidFill>
-                  <a:srgbClr val="444444"/>
-                </a:solidFill>
-              </a:defRPr>
-            </a:pPr>
-            <a:r>
-              <a:rPr sz="2200" dirty="0"/>
-              <a:t>• Auto code fixing</a:t>
-            </a:r>
-          </a:p>
-          <a:p>
-            <a:pPr>
-              <a:spcBef>
-                <a:spcPts val="1200"/>
-              </a:spcBef>
-              <a:defRPr sz="2200">
-                <a:solidFill>
-                  <a:srgbClr val="444444"/>
-                </a:solidFill>
-              </a:defRPr>
-            </a:pPr>
-            <a:r>
-              <a:rPr sz="2200" dirty="0"/>
-              <a:t>• Multiple languages</a:t>
-            </a:r>
-          </a:p>
-          <a:p>
-            <a:pPr>
-              <a:spcBef>
-                <a:spcPts val="1200"/>
-              </a:spcBef>
-              <a:defRPr sz="2200">
-                <a:solidFill>
-                  <a:srgbClr val="444444"/>
-                </a:solidFill>
-              </a:defRPr>
-            </a:pPr>
-            <a:r>
-              <a:rPr sz="2200" dirty="0"/>
-              <a:t>• Fancy GUI</a:t>
-            </a:r>
-          </a:p>
-        </p:txBody>
-      </p:sp>
-      <p:sp>
-        <p:nvSpPr>
-          <p:cNvPr id="5" name="Slide Number Placeholder 4">
-            <a:extLst>
-              <a:ext uri="{FF2B5EF4-FFF2-40B4-BE49-F238E27FC236}">
-                <a16:creationId xmlns:a16="http://schemas.microsoft.com/office/drawing/2014/main" id="{CA6EB711-C6BC-CCC5-27C1-F8563EA43EED}"/>
-              </a:ext>
-            </a:extLst>
-          </p:cNvPr>
-          <p:cNvSpPr>
-            <a:spLocks noGrp="1"/>
-          </p:cNvSpPr>
-          <p:nvPr>
-            <p:ph type="sldNum" sz="quarter" idx="12"/>
-          </p:nvPr>
-        </p:nvSpPr>
-        <p:spPr/>
-        <p:txBody>
-          <a:bodyPr/>
-          <a:lstStyle/>
-          <a:p>
+            <a:pPr defTabSz="914400">
+              <a:spcAft>
+                <a:spcPts val="600"/>
+              </a:spcAft>
+            </a:pPr>
             <a:fld id="{C1FF6DA9-008F-8B48-92A6-B652298478BF}" type="slidenum">
-              <a:rPr lang="en-US" smtClean="0"/>
+              <a:rPr lang="en-US" smtClean="0">
+                <a:solidFill>
+                  <a:schemeClr val="tx1">
+                    <a:alpha val="80000"/>
+                  </a:schemeClr>
+                </a:solidFill>
+              </a:rPr>
+              <a:pPr defTabSz="914400">
+                <a:spcAft>
+                  <a:spcPts val="600"/>
+                </a:spcAft>
+              </a:pPr>
               <a:t>9</a:t>
             </a:fld>
-            <a:endParaRPr lang="en-US"/>
+            <a:endParaRPr lang="en-US">
+              <a:solidFill>
+                <a:schemeClr val="tx1">
+                  <a:alpha val="80000"/>
+                </a:schemeClr>
+              </a:solidFill>
+            </a:endParaRPr>
           </a:p>
         </p:txBody>
       </p:sp>
     </p:spTree>
+    <p:extLst>
+      <p:ext uri="{BB962C8B-B14F-4D97-AF65-F5344CB8AC3E}">
+        <p14:creationId xmlns:p14="http://schemas.microsoft.com/office/powerpoint/2010/main" val="2200034343"/>
+      </p:ext>
+    </p:extLst>
   </p:cSld>
   <p:clrMapOvr>
     <a:masterClrMapping/>
